--- a/sessions_in_Abu_Dhabi/session_7.pptx
+++ b/sessions_in_Abu_Dhabi/session_7.pptx
@@ -22,6 +22,8 @@
     <p:sldId id="270" r:id="rId16"/>
     <p:sldId id="271" r:id="rId17"/>
     <p:sldId id="272" r:id="rId18"/>
+    <p:sldId id="273" r:id="rId19"/>
+    <p:sldId id="274" r:id="rId20"/>
   </p:sldIdLst>
   <p:sldSz cx="9144000" cy="5143500" type="screen16x9"/>
   <p:notesSz cx="6858000" cy="9144000"/>
@@ -3178,6 +3180,576 @@
 </file>
 
 <file path=ppt/slides/slide10.xml><?xml version="1.0" encoding="utf-8"?>
+<p:sld xmlns:a="http://schemas.openxmlformats.org/drawingml/2006/main" xmlns:r="http://schemas.openxmlformats.org/officeDocument/2006/relationships" xmlns:p="http://schemas.openxmlformats.org/presentationml/2006/main">
+  <p:cSld>
+    <p:spTree>
+      <p:nvGrpSpPr>
+        <p:cNvPr id="1" name=""/>
+        <p:cNvGrpSpPr/>
+        <p:nvPr/>
+      </p:nvGrpSpPr>
+      <p:grpSpPr>
+        <a:xfrm>
+          <a:off x="0" y="0"/>
+          <a:ext cx="0" cy="0"/>
+          <a:chOff x="0" y="0"/>
+          <a:chExt cx="0" cy="0"/>
+        </a:xfrm>
+      </p:grpSpPr>
+      <p:sp>
+        <p:nvSpPr>
+          <p:cNvPr id="2" name="Title 1"/>
+          <p:cNvSpPr>
+            <a:spLocks noGrp="1"/>
+          </p:cNvSpPr>
+          <p:nvPr>
+            <p:ph type="title"/>
+          </p:nvPr>
+        </p:nvSpPr>
+        <p:spPr/>
+        <p:txBody>
+          <a:bodyPr/>
+          <a:lstStyle/>
+          <a:p>
+            <a:pPr lvl="0" indent="0" marL="0">
+              <a:buNone/>
+            </a:pPr>
+            <a:r>
+              <a:rPr/>
+              <a:t>Understanding LATE: The Complier Effect</a:t>
+            </a:r>
+          </a:p>
+        </p:txBody>
+      </p:sp>
+      <p:sp>
+        <p:nvSpPr>
+          <p:cNvPr id="3" name="Content Placeholder 2"/>
+          <p:cNvSpPr>
+            <a:spLocks noGrp="1"/>
+          </p:cNvSpPr>
+          <p:nvPr>
+            <p:ph idx="1"/>
+          </p:nvPr>
+        </p:nvSpPr>
+        <p:spPr/>
+        <p:txBody>
+          <a:bodyPr/>
+          <a:lstStyle/>
+          <a:p>
+            <a:pPr lvl="0" indent="0" marL="0">
+              <a:buNone/>
+            </a:pPr>
+            <a:r>
+              <a:rPr/>
+              <a:t>The IV estimate (LATE) applies to compliers only:</a:t>
+            </a:r>
+          </a:p>
+        </p:txBody>
+      </p:sp>
+    </p:spTree>
+  </p:cSld>
+</p:sld>
+</file>
+
+<file path=ppt/slides/slide11.xml><?xml version="1.0" encoding="utf-8"?>
+<p:sld xmlns:a="http://schemas.openxmlformats.org/drawingml/2006/main" xmlns:r="http://schemas.openxmlformats.org/officeDocument/2006/relationships" xmlns:p="http://schemas.openxmlformats.org/presentationml/2006/main">
+  <p:cSld>
+    <p:spTree>
+      <p:nvGrpSpPr>
+        <p:cNvPr id="1" name=""/>
+        <p:cNvGrpSpPr/>
+        <p:nvPr/>
+      </p:nvGrpSpPr>
+      <p:grpSpPr>
+        <a:xfrm>
+          <a:off x="0" y="0"/>
+          <a:ext cx="0" cy="0"/>
+          <a:chOff x="0" y="0"/>
+          <a:chExt cx="0" cy="0"/>
+        </a:xfrm>
+      </p:grpSpPr>
+      <p:sp>
+        <p:nvSpPr>
+          <p:cNvPr id="3" name="Content Placeholder 2"/>
+          <p:cNvSpPr>
+            <a:spLocks noGrp="1"/>
+          </p:cNvSpPr>
+          <p:nvPr>
+            <p:ph idx="1" sz="half"/>
+          </p:nvPr>
+        </p:nvSpPr>
+        <p:spPr/>
+        <p:txBody>
+          <a:bodyPr/>
+          <a:lstStyle/>
+          <a:p>
+            <a:pPr lvl="0" indent="0" marL="0">
+              <a:buNone/>
+            </a:pPr>
+            <a:r>
+              <a:rPr b="1"/>
+              <a:t>Types of industries:</a:t>
+            </a:r>
+          </a:p>
+          <a:p>
+            <a:pPr lvl="0"/>
+            <a:r>
+              <a:rPr/>
+              <a:t>Always-takers: Enroll regardless of promotion (8%)</a:t>
+            </a:r>
+          </a:p>
+          <a:p>
+            <a:pPr lvl="0"/>
+            <a:r>
+              <a:rPr/>
+              <a:t>Compliers: Enroll only with promotion (41%)</a:t>
+            </a:r>
+          </a:p>
+          <a:p>
+            <a:pPr lvl="0"/>
+            <a:r>
+              <a:rPr/>
+              <a:t>Never-takers: Don’t enroll regardless of promotion (51%)</a:t>
+            </a:r>
+          </a:p>
+          <a:p>
+            <a:pPr lvl="0"/>
+            <a:r>
+              <a:rPr/>
+              <a:t>Defiers: Enroll only without promotion (0% by assumption)</a:t>
+            </a:r>
+          </a:p>
+        </p:txBody>
+      </p:sp>
+      <p:sp>
+        <p:nvSpPr>
+          <p:cNvPr id="4" name="Content Placeholder 3"/>
+          <p:cNvSpPr>
+            <a:spLocks noGrp="1"/>
+          </p:cNvSpPr>
+          <p:nvPr>
+            <p:ph idx="2" sz="half"/>
+          </p:nvPr>
+        </p:nvSpPr>
+        <p:spPr/>
+        <p:txBody>
+          <a:bodyPr/>
+          <a:lstStyle/>
+          <a:p>
+            <a:pPr lvl="0" indent="0" marL="0">
+              <a:buNone/>
+            </a:pPr>
+            <a:r>
+              <a:rPr b="1"/>
+              <a:t>Implications:</a:t>
+            </a:r>
+          </a:p>
+          <a:p>
+            <a:pPr lvl="0"/>
+            <a:r>
+              <a:rPr/>
+              <a:t>If treatment effects vary, LATE may not generalize</a:t>
+            </a:r>
+          </a:p>
+          <a:p>
+            <a:pPr lvl="0"/>
+            <a:r>
+              <a:rPr/>
+              <a:t>External validity depends on how representative compliers are</a:t>
+            </a:r>
+          </a:p>
+          <a:p>
+            <a:pPr lvl="0"/>
+            <a:r>
+              <a:rPr/>
+              <a:t>Policy relevant if we care about those influenced by promotion</a:t>
+            </a:r>
+          </a:p>
+        </p:txBody>
+      </p:sp>
+    </p:spTree>
+  </p:cSld>
+  <p:timing>
+    <p:tnLst>
+      <p:par>
+        <p:cTn id="1" dur="indefinite" restart="never" nodeType="tmRoot">
+          <p:childTnLst>
+            <p:seq concurrent="1" nextAc="seek">
+              <p:cTn id="2" dur="indefinite" nodeType="mainSeq">
+                <p:childTnLst>
+                  <p:par>
+                    <p:cTn id="3" fill="hold">
+                      <p:stCondLst>
+                        <p:cond delay="indefinite"/>
+                      </p:stCondLst>
+                      <p:childTnLst>
+                        <p:par>
+                          <p:cTn id="4" fill="hold">
+                            <p:stCondLst>
+                              <p:cond delay="0"/>
+                            </p:stCondLst>
+                            <p:childTnLst>
+                              <p:par>
+                                <p:cTn id="5" presetID="1" presetClass="entr" presetSubtype="0" fill="hold" grpId="0" nodeType="clickEffect">
+                                  <p:stCondLst>
+                                    <p:cond delay="0"/>
+                                  </p:stCondLst>
+                                  <p:childTnLst>
+                                    <p:set>
+                                      <p:cBhvr>
+                                        <p:cTn id="6" dur="1" fill="hold">
+                                          <p:stCondLst>
+                                            <p:cond delay="0"/>
+                                          </p:stCondLst>
+                                        </p:cTn>
+                                        <p:tgtEl>
+                                          <p:spTgt spid="3">
+                                            <p:txEl>
+                                              <p:pRg st="1" end="1"/>
+                                            </p:txEl>
+                                          </p:spTgt>
+                                        </p:tgtEl>
+                                        <p:attrNameLst>
+                                          <p:attrName>style.visibility</p:attrName>
+                                        </p:attrNameLst>
+                                      </p:cBhvr>
+                                      <p:to>
+                                        <p:strVal val="visible"/>
+                                      </p:to>
+                                    </p:set>
+                                  </p:childTnLst>
+                                </p:cTn>
+                              </p:par>
+                            </p:childTnLst>
+                          </p:cTn>
+                        </p:par>
+                      </p:childTnLst>
+                    </p:cTn>
+                  </p:par>
+                  <p:par>
+                    <p:cTn id="7" fill="hold">
+                      <p:stCondLst>
+                        <p:cond delay="indefinite"/>
+                      </p:stCondLst>
+                      <p:childTnLst>
+                        <p:par>
+                          <p:cTn id="8" fill="hold">
+                            <p:stCondLst>
+                              <p:cond delay="0"/>
+                            </p:stCondLst>
+                            <p:childTnLst>
+                              <p:par>
+                                <p:cTn id="9" presetID="1" presetClass="entr" presetSubtype="0" fill="hold" grpId="0" nodeType="clickEffect">
+                                  <p:stCondLst>
+                                    <p:cond delay="0"/>
+                                  </p:stCondLst>
+                                  <p:childTnLst>
+                                    <p:set>
+                                      <p:cBhvr>
+                                        <p:cTn id="10" dur="1" fill="hold">
+                                          <p:stCondLst>
+                                            <p:cond delay="0"/>
+                                          </p:stCondLst>
+                                        </p:cTn>
+                                        <p:tgtEl>
+                                          <p:spTgt spid="3">
+                                            <p:txEl>
+                                              <p:pRg st="2" end="2"/>
+                                            </p:txEl>
+                                          </p:spTgt>
+                                        </p:tgtEl>
+                                        <p:attrNameLst>
+                                          <p:attrName>style.visibility</p:attrName>
+                                        </p:attrNameLst>
+                                      </p:cBhvr>
+                                      <p:to>
+                                        <p:strVal val="visible"/>
+                                      </p:to>
+                                    </p:set>
+                                  </p:childTnLst>
+                                </p:cTn>
+                              </p:par>
+                            </p:childTnLst>
+                          </p:cTn>
+                        </p:par>
+                      </p:childTnLst>
+                    </p:cTn>
+                  </p:par>
+                  <p:par>
+                    <p:cTn id="11" fill="hold">
+                      <p:stCondLst>
+                        <p:cond delay="indefinite"/>
+                      </p:stCondLst>
+                      <p:childTnLst>
+                        <p:par>
+                          <p:cTn id="12" fill="hold">
+                            <p:stCondLst>
+                              <p:cond delay="0"/>
+                            </p:stCondLst>
+                            <p:childTnLst>
+                              <p:par>
+                                <p:cTn id="13" presetID="1" presetClass="entr" presetSubtype="0" fill="hold" grpId="0" nodeType="clickEffect">
+                                  <p:stCondLst>
+                                    <p:cond delay="0"/>
+                                  </p:stCondLst>
+                                  <p:childTnLst>
+                                    <p:set>
+                                      <p:cBhvr>
+                                        <p:cTn id="14" dur="1" fill="hold">
+                                          <p:stCondLst>
+                                            <p:cond delay="0"/>
+                                          </p:stCondLst>
+                                        </p:cTn>
+                                        <p:tgtEl>
+                                          <p:spTgt spid="3">
+                                            <p:txEl>
+                                              <p:pRg st="3" end="3"/>
+                                            </p:txEl>
+                                          </p:spTgt>
+                                        </p:tgtEl>
+                                        <p:attrNameLst>
+                                          <p:attrName>style.visibility</p:attrName>
+                                        </p:attrNameLst>
+                                      </p:cBhvr>
+                                      <p:to>
+                                        <p:strVal val="visible"/>
+                                      </p:to>
+                                    </p:set>
+                                  </p:childTnLst>
+                                </p:cTn>
+                              </p:par>
+                            </p:childTnLst>
+                          </p:cTn>
+                        </p:par>
+                      </p:childTnLst>
+                    </p:cTn>
+                  </p:par>
+                  <p:par>
+                    <p:cTn id="15" fill="hold">
+                      <p:stCondLst>
+                        <p:cond delay="indefinite"/>
+                      </p:stCondLst>
+                      <p:childTnLst>
+                        <p:par>
+                          <p:cTn id="16" fill="hold">
+                            <p:stCondLst>
+                              <p:cond delay="0"/>
+                            </p:stCondLst>
+                            <p:childTnLst>
+                              <p:par>
+                                <p:cTn id="17" presetID="1" presetClass="entr" presetSubtype="0" fill="hold" grpId="0" nodeType="clickEffect">
+                                  <p:stCondLst>
+                                    <p:cond delay="0"/>
+                                  </p:stCondLst>
+                                  <p:childTnLst>
+                                    <p:set>
+                                      <p:cBhvr>
+                                        <p:cTn id="18" dur="1" fill="hold">
+                                          <p:stCondLst>
+                                            <p:cond delay="0"/>
+                                          </p:stCondLst>
+                                        </p:cTn>
+                                        <p:tgtEl>
+                                          <p:spTgt spid="3">
+                                            <p:txEl>
+                                              <p:pRg st="4" end="4"/>
+                                            </p:txEl>
+                                          </p:spTgt>
+                                        </p:tgtEl>
+                                        <p:attrNameLst>
+                                          <p:attrName>style.visibility</p:attrName>
+                                        </p:attrNameLst>
+                                      </p:cBhvr>
+                                      <p:to>
+                                        <p:strVal val="visible"/>
+                                      </p:to>
+                                    </p:set>
+                                  </p:childTnLst>
+                                </p:cTn>
+                              </p:par>
+                            </p:childTnLst>
+                          </p:cTn>
+                        </p:par>
+                      </p:childTnLst>
+                    </p:cTn>
+                  </p:par>
+                  <p:par>
+                    <p:cTn id="19" fill="hold">
+                      <p:stCondLst>
+                        <p:cond delay="indefinite"/>
+                      </p:stCondLst>
+                      <p:childTnLst>
+                        <p:par>
+                          <p:cTn id="20" fill="hold">
+                            <p:stCondLst>
+                              <p:cond delay="0"/>
+                            </p:stCondLst>
+                            <p:childTnLst>
+                              <p:par>
+                                <p:cTn id="21" presetID="1" presetClass="entr" presetSubtype="0" fill="hold" grpId="0" nodeType="clickEffect">
+                                  <p:stCondLst>
+                                    <p:cond delay="0"/>
+                                  </p:stCondLst>
+                                  <p:childTnLst>
+                                    <p:set>
+                                      <p:cBhvr>
+                                        <p:cTn id="22" dur="1" fill="hold">
+                                          <p:stCondLst>
+                                            <p:cond delay="0"/>
+                                          </p:stCondLst>
+                                        </p:cTn>
+                                        <p:tgtEl>
+                                          <p:spTgt spid="4">
+                                            <p:txEl>
+                                              <p:pRg st="1" end="1"/>
+                                            </p:txEl>
+                                          </p:spTgt>
+                                        </p:tgtEl>
+                                        <p:attrNameLst>
+                                          <p:attrName>style.visibility</p:attrName>
+                                        </p:attrNameLst>
+                                      </p:cBhvr>
+                                      <p:to>
+                                        <p:strVal val="visible"/>
+                                      </p:to>
+                                    </p:set>
+                                  </p:childTnLst>
+                                </p:cTn>
+                              </p:par>
+                            </p:childTnLst>
+                          </p:cTn>
+                        </p:par>
+                      </p:childTnLst>
+                    </p:cTn>
+                  </p:par>
+                  <p:par>
+                    <p:cTn id="23" fill="hold">
+                      <p:stCondLst>
+                        <p:cond delay="indefinite"/>
+                      </p:stCondLst>
+                      <p:childTnLst>
+                        <p:par>
+                          <p:cTn id="24" fill="hold">
+                            <p:stCondLst>
+                              <p:cond delay="0"/>
+                            </p:stCondLst>
+                            <p:childTnLst>
+                              <p:par>
+                                <p:cTn id="25" presetID="1" presetClass="entr" presetSubtype="0" fill="hold" grpId="0" nodeType="clickEffect">
+                                  <p:stCondLst>
+                                    <p:cond delay="0"/>
+                                  </p:stCondLst>
+                                  <p:childTnLst>
+                                    <p:set>
+                                      <p:cBhvr>
+                                        <p:cTn id="26" dur="1" fill="hold">
+                                          <p:stCondLst>
+                                            <p:cond delay="0"/>
+                                          </p:stCondLst>
+                                        </p:cTn>
+                                        <p:tgtEl>
+                                          <p:spTgt spid="4">
+                                            <p:txEl>
+                                              <p:pRg st="2" end="2"/>
+                                            </p:txEl>
+                                          </p:spTgt>
+                                        </p:tgtEl>
+                                        <p:attrNameLst>
+                                          <p:attrName>style.visibility</p:attrName>
+                                        </p:attrNameLst>
+                                      </p:cBhvr>
+                                      <p:to>
+                                        <p:strVal val="visible"/>
+                                      </p:to>
+                                    </p:set>
+                                  </p:childTnLst>
+                                </p:cTn>
+                              </p:par>
+                            </p:childTnLst>
+                          </p:cTn>
+                        </p:par>
+                      </p:childTnLst>
+                    </p:cTn>
+                  </p:par>
+                  <p:par>
+                    <p:cTn id="27" fill="hold">
+                      <p:stCondLst>
+                        <p:cond delay="indefinite"/>
+                      </p:stCondLst>
+                      <p:childTnLst>
+                        <p:par>
+                          <p:cTn id="28" fill="hold">
+                            <p:stCondLst>
+                              <p:cond delay="0"/>
+                            </p:stCondLst>
+                            <p:childTnLst>
+                              <p:par>
+                                <p:cTn id="29" presetID="1" presetClass="entr" presetSubtype="0" fill="hold" grpId="0" nodeType="clickEffect">
+                                  <p:stCondLst>
+                                    <p:cond delay="0"/>
+                                  </p:stCondLst>
+                                  <p:childTnLst>
+                                    <p:set>
+                                      <p:cBhvr>
+                                        <p:cTn id="30" dur="1" fill="hold">
+                                          <p:stCondLst>
+                                            <p:cond delay="0"/>
+                                          </p:stCondLst>
+                                        </p:cTn>
+                                        <p:tgtEl>
+                                          <p:spTgt spid="4">
+                                            <p:txEl>
+                                              <p:pRg st="3" end="3"/>
+                                            </p:txEl>
+                                          </p:spTgt>
+                                        </p:tgtEl>
+                                        <p:attrNameLst>
+                                          <p:attrName>style.visibility</p:attrName>
+                                        </p:attrNameLst>
+                                      </p:cBhvr>
+                                      <p:to>
+                                        <p:strVal val="visible"/>
+                                      </p:to>
+                                    </p:set>
+                                  </p:childTnLst>
+                                </p:cTn>
+                              </p:par>
+                            </p:childTnLst>
+                          </p:cTn>
+                        </p:par>
+                      </p:childTnLst>
+                    </p:cTn>
+                  </p:par>
+                </p:childTnLst>
+              </p:cTn>
+              <p:prevCondLst>
+                <p:cond evt="onPrev" delay="0">
+                  <p:tgtEl>
+                    <p:sldTgt/>
+                  </p:tgtEl>
+                </p:cond>
+              </p:prevCondLst>
+              <p:nextCondLst>
+                <p:cond evt="onNext" delay="0">
+                  <p:tgtEl>
+                    <p:sldTgt/>
+                  </p:tgtEl>
+                </p:cond>
+              </p:nextCondLst>
+            </p:seq>
+          </p:childTnLst>
+        </p:cTn>
+      </p:par>
+    </p:tnLst>
+    <p:bldLst>
+      <p:bldP spid="3" grpId="0" uiExpand="1" build="p"/>
+      <p:bldP spid="4" grpId="0" uiExpand="1" build="p"/>
+    </p:bldLst>
+  </p:timing>
+</p:sld>
+</file>
+
+<file path=ppt/slides/slide12.xml><?xml version="1.0" encoding="utf-8"?>
 <p:sld xmlns:a="http://schemas.openxmlformats.org/drawingml/2006/main" xmlns:r="http://schemas.openxmlformats.org/officeDocument/2006/relationships" xmlns:p="http://schemas.openxmlformats.org/presentationml/2006/main">
   <p:cSld>
     <p:spTree>
@@ -3665,7 +4237,7 @@
 </p:sld>
 </file>
 
-<file path=ppt/slides/slide11.xml><?xml version="1.0" encoding="utf-8"?>
+<file path=ppt/slides/slide13.xml><?xml version="1.0" encoding="utf-8"?>
 <p:sld xmlns:a="http://schemas.openxmlformats.org/drawingml/2006/main" xmlns:r="http://schemas.openxmlformats.org/officeDocument/2006/relationships" xmlns:p="http://schemas.openxmlformats.org/presentationml/2006/main">
   <p:cSld>
     <p:spTree>
@@ -3744,7 +4316,7 @@
             </a:r>
             <a:r>
               <a:rPr/>
-              <a:t> Program must reduce waste management costs by at least $10,000.</a:t>
+              <a:t> Program must reduce waste management costs by at least 1,000 AED.</a:t>
             </a:r>
           </a:p>
           <a:p>
@@ -3760,14 +4332,14 @@
             <a:pPr lvl="0"/>
             <a:r>
               <a:rPr/>
-              <a:t>LATE: -$9,496 (from our calculation above)</a:t>
+              <a:t>LATE: -1,033 AED (from our calculation above)</a:t>
             </a:r>
           </a:p>
           <a:p>
             <a:pPr lvl="0"/>
             <a:r>
               <a:rPr/>
-              <a:t>Point estimate is below the $10,000 threshold</a:t>
+              <a:t>Point estimate is above the 1,000 AED threshold</a:t>
             </a:r>
           </a:p>
           <a:p>
@@ -3787,7 +4359,7 @@
             </a:r>
             <a:r>
               <a:rPr/>
-              <a:t> Based strictly on the estimate, the program should not be scaled up nationally. However, the estimate is very close to the threshold.</a:t>
+              <a:t> Based strictly on the estimate, the program should be scaled up nationally.</a:t>
             </a:r>
           </a:p>
         </p:txBody>
@@ -3977,7 +4549,7 @@
 </p:sld>
 </file>
 
-<file path=ppt/slides/slide12.xml><?xml version="1.0" encoding="utf-8"?>
+<file path=ppt/slides/slide14.xml><?xml version="1.0" encoding="utf-8"?>
 <p:sld xmlns:a="http://schemas.openxmlformats.org/drawingml/2006/main" xmlns:r="http://schemas.openxmlformats.org/officeDocument/2006/relationships" xmlns:p="http://schemas.openxmlformats.org/presentationml/2006/main">
   <p:cSld>
     <p:spTree>
@@ -4043,25 +4615,37 @@
             </a:r>
           </a:p>
           <a:p>
+            <a:pPr lvl="0"/>
+            <a:r>
+              <a:rPr/>
+              <a:t>LATE = -1,033 AED</a:t>
+            </a:r>
+          </a:p>
+          <a:p>
+            <a:pPr lvl="0"/>
+            <a:r>
+              <a:rPr/>
+              <a:t>Effect on compliers only</a:t>
+            </a:r>
+          </a:p>
+          <a:p>
+            <a:pPr lvl="0"/>
+            <a:r>
+              <a:rPr/>
+              <a:t>Larger standard errors</a:t>
+            </a:r>
+          </a:p>
+          <a:p>
             <a:pPr lvl="0" indent="0" marL="0">
               <a:buNone/>
             </a:pPr>
             <a:r>
-              <a:rPr/>
-              <a:t>LATE = -$9,496 Effect on compliers only Larger standard errors</a:t>
-            </a:r>
-          </a:p>
-          <a:p>
-            <a:pPr lvl="0" indent="0" marL="0">
-              <a:buNone/>
-            </a:pPr>
-            <a:r>
               <a:rPr b="1"/>
               <a:t>Policy recommendation:</a:t>
             </a:r>
             <a:r>
               <a:rPr/>
-              <a:t> Do not scale up (but close to threshold)</a:t>
+              <a:t> Scale up since above threshold</a:t>
             </a:r>
           </a:p>
         </p:txBody>
@@ -4090,12 +4674,24 @@
             </a:r>
           </a:p>
           <a:p>
-            <a:pPr lvl="0" indent="0" marL="0">
-              <a:buNone/>
-            </a:pPr>
+            <a:pPr lvl="0"/>
             <a:r>
               <a:rPr/>
-              <a:t>ATE = -$10,140 Effect on all eligible facilities More precise estimate</a:t>
+              <a:t>ATE = -1,014 AED</a:t>
+            </a:r>
+          </a:p>
+          <a:p>
+            <a:pPr lvl="0"/>
+            <a:r>
+              <a:rPr/>
+              <a:t>Effect on all eligible facilities</a:t>
+            </a:r>
+          </a:p>
+          <a:p>
+            <a:pPr lvl="0"/>
+            <a:r>
+              <a:rPr/>
+              <a:t>More precise estimate</a:t>
             </a:r>
           </a:p>
           <a:p>
@@ -4115,10 +4711,338 @@
       </p:sp>
     </p:spTree>
   </p:cSld>
+  <p:timing>
+    <p:tnLst>
+      <p:par>
+        <p:cTn id="1" dur="indefinite" restart="never" nodeType="tmRoot">
+          <p:childTnLst>
+            <p:seq concurrent="1" nextAc="seek">
+              <p:cTn id="2" dur="indefinite" nodeType="mainSeq">
+                <p:childTnLst>
+                  <p:par>
+                    <p:cTn id="3" fill="hold">
+                      <p:stCondLst>
+                        <p:cond delay="indefinite"/>
+                      </p:stCondLst>
+                      <p:childTnLst>
+                        <p:par>
+                          <p:cTn id="4" fill="hold">
+                            <p:stCondLst>
+                              <p:cond delay="0"/>
+                            </p:stCondLst>
+                            <p:childTnLst>
+                              <p:par>
+                                <p:cTn id="5" presetID="1" presetClass="entr" presetSubtype="0" fill="hold" grpId="0" nodeType="clickEffect">
+                                  <p:stCondLst>
+                                    <p:cond delay="0"/>
+                                  </p:stCondLst>
+                                  <p:childTnLst>
+                                    <p:set>
+                                      <p:cBhvr>
+                                        <p:cTn id="6" dur="1" fill="hold">
+                                          <p:stCondLst>
+                                            <p:cond delay="0"/>
+                                          </p:stCondLst>
+                                        </p:cTn>
+                                        <p:tgtEl>
+                                          <p:spTgt spid="3">
+                                            <p:txEl>
+                                              <p:pRg st="1" end="1"/>
+                                            </p:txEl>
+                                          </p:spTgt>
+                                        </p:tgtEl>
+                                        <p:attrNameLst>
+                                          <p:attrName>style.visibility</p:attrName>
+                                        </p:attrNameLst>
+                                      </p:cBhvr>
+                                      <p:to>
+                                        <p:strVal val="visible"/>
+                                      </p:to>
+                                    </p:set>
+                                  </p:childTnLst>
+                                </p:cTn>
+                              </p:par>
+                            </p:childTnLst>
+                          </p:cTn>
+                        </p:par>
+                      </p:childTnLst>
+                    </p:cTn>
+                  </p:par>
+                  <p:par>
+                    <p:cTn id="7" fill="hold">
+                      <p:stCondLst>
+                        <p:cond delay="indefinite"/>
+                      </p:stCondLst>
+                      <p:childTnLst>
+                        <p:par>
+                          <p:cTn id="8" fill="hold">
+                            <p:stCondLst>
+                              <p:cond delay="0"/>
+                            </p:stCondLst>
+                            <p:childTnLst>
+                              <p:par>
+                                <p:cTn id="9" presetID="1" presetClass="entr" presetSubtype="0" fill="hold" grpId="0" nodeType="clickEffect">
+                                  <p:stCondLst>
+                                    <p:cond delay="0"/>
+                                  </p:stCondLst>
+                                  <p:childTnLst>
+                                    <p:set>
+                                      <p:cBhvr>
+                                        <p:cTn id="10" dur="1" fill="hold">
+                                          <p:stCondLst>
+                                            <p:cond delay="0"/>
+                                          </p:stCondLst>
+                                        </p:cTn>
+                                        <p:tgtEl>
+                                          <p:spTgt spid="3">
+                                            <p:txEl>
+                                              <p:pRg st="2" end="2"/>
+                                            </p:txEl>
+                                          </p:spTgt>
+                                        </p:tgtEl>
+                                        <p:attrNameLst>
+                                          <p:attrName>style.visibility</p:attrName>
+                                        </p:attrNameLst>
+                                      </p:cBhvr>
+                                      <p:to>
+                                        <p:strVal val="visible"/>
+                                      </p:to>
+                                    </p:set>
+                                  </p:childTnLst>
+                                </p:cTn>
+                              </p:par>
+                            </p:childTnLst>
+                          </p:cTn>
+                        </p:par>
+                      </p:childTnLst>
+                    </p:cTn>
+                  </p:par>
+                  <p:par>
+                    <p:cTn id="11" fill="hold">
+                      <p:stCondLst>
+                        <p:cond delay="indefinite"/>
+                      </p:stCondLst>
+                      <p:childTnLst>
+                        <p:par>
+                          <p:cTn id="12" fill="hold">
+                            <p:stCondLst>
+                              <p:cond delay="0"/>
+                            </p:stCondLst>
+                            <p:childTnLst>
+                              <p:par>
+                                <p:cTn id="13" presetID="1" presetClass="entr" presetSubtype="0" fill="hold" grpId="0" nodeType="clickEffect">
+                                  <p:stCondLst>
+                                    <p:cond delay="0"/>
+                                  </p:stCondLst>
+                                  <p:childTnLst>
+                                    <p:set>
+                                      <p:cBhvr>
+                                        <p:cTn id="14" dur="1" fill="hold">
+                                          <p:stCondLst>
+                                            <p:cond delay="0"/>
+                                          </p:stCondLst>
+                                        </p:cTn>
+                                        <p:tgtEl>
+                                          <p:spTgt spid="3">
+                                            <p:txEl>
+                                              <p:pRg st="3" end="3"/>
+                                            </p:txEl>
+                                          </p:spTgt>
+                                        </p:tgtEl>
+                                        <p:attrNameLst>
+                                          <p:attrName>style.visibility</p:attrName>
+                                        </p:attrNameLst>
+                                      </p:cBhvr>
+                                      <p:to>
+                                        <p:strVal val="visible"/>
+                                      </p:to>
+                                    </p:set>
+                                  </p:childTnLst>
+                                </p:cTn>
+                              </p:par>
+                            </p:childTnLst>
+                          </p:cTn>
+                        </p:par>
+                      </p:childTnLst>
+                    </p:cTn>
+                  </p:par>
+                  <p:par>
+                    <p:cTn id="15" fill="hold">
+                      <p:stCondLst>
+                        <p:cond delay="indefinite"/>
+                      </p:stCondLst>
+                      <p:childTnLst>
+                        <p:par>
+                          <p:cTn id="16" fill="hold">
+                            <p:stCondLst>
+                              <p:cond delay="0"/>
+                            </p:stCondLst>
+                            <p:childTnLst>
+                              <p:par>
+                                <p:cTn id="17" presetID="1" presetClass="entr" presetSubtype="0" fill="hold" grpId="0" nodeType="clickEffect">
+                                  <p:stCondLst>
+                                    <p:cond delay="0"/>
+                                  </p:stCondLst>
+                                  <p:childTnLst>
+                                    <p:set>
+                                      <p:cBhvr>
+                                        <p:cTn id="18" dur="1" fill="hold">
+                                          <p:stCondLst>
+                                            <p:cond delay="0"/>
+                                          </p:stCondLst>
+                                        </p:cTn>
+                                        <p:tgtEl>
+                                          <p:spTgt spid="4">
+                                            <p:txEl>
+                                              <p:pRg st="1" end="1"/>
+                                            </p:txEl>
+                                          </p:spTgt>
+                                        </p:tgtEl>
+                                        <p:attrNameLst>
+                                          <p:attrName>style.visibility</p:attrName>
+                                        </p:attrNameLst>
+                                      </p:cBhvr>
+                                      <p:to>
+                                        <p:strVal val="visible"/>
+                                      </p:to>
+                                    </p:set>
+                                  </p:childTnLst>
+                                </p:cTn>
+                              </p:par>
+                            </p:childTnLst>
+                          </p:cTn>
+                        </p:par>
+                      </p:childTnLst>
+                    </p:cTn>
+                  </p:par>
+                  <p:par>
+                    <p:cTn id="19" fill="hold">
+                      <p:stCondLst>
+                        <p:cond delay="indefinite"/>
+                      </p:stCondLst>
+                      <p:childTnLst>
+                        <p:par>
+                          <p:cTn id="20" fill="hold">
+                            <p:stCondLst>
+                              <p:cond delay="0"/>
+                            </p:stCondLst>
+                            <p:childTnLst>
+                              <p:par>
+                                <p:cTn id="21" presetID="1" presetClass="entr" presetSubtype="0" fill="hold" grpId="0" nodeType="clickEffect">
+                                  <p:stCondLst>
+                                    <p:cond delay="0"/>
+                                  </p:stCondLst>
+                                  <p:childTnLst>
+                                    <p:set>
+                                      <p:cBhvr>
+                                        <p:cTn id="22" dur="1" fill="hold">
+                                          <p:stCondLst>
+                                            <p:cond delay="0"/>
+                                          </p:stCondLst>
+                                        </p:cTn>
+                                        <p:tgtEl>
+                                          <p:spTgt spid="4">
+                                            <p:txEl>
+                                              <p:pRg st="2" end="2"/>
+                                            </p:txEl>
+                                          </p:spTgt>
+                                        </p:tgtEl>
+                                        <p:attrNameLst>
+                                          <p:attrName>style.visibility</p:attrName>
+                                        </p:attrNameLst>
+                                      </p:cBhvr>
+                                      <p:to>
+                                        <p:strVal val="visible"/>
+                                      </p:to>
+                                    </p:set>
+                                  </p:childTnLst>
+                                </p:cTn>
+                              </p:par>
+                            </p:childTnLst>
+                          </p:cTn>
+                        </p:par>
+                      </p:childTnLst>
+                    </p:cTn>
+                  </p:par>
+                  <p:par>
+                    <p:cTn id="23" fill="hold">
+                      <p:stCondLst>
+                        <p:cond delay="indefinite"/>
+                      </p:stCondLst>
+                      <p:childTnLst>
+                        <p:par>
+                          <p:cTn id="24" fill="hold">
+                            <p:stCondLst>
+                              <p:cond delay="0"/>
+                            </p:stCondLst>
+                            <p:childTnLst>
+                              <p:par>
+                                <p:cTn id="25" presetID="1" presetClass="entr" presetSubtype="0" fill="hold" grpId="0" nodeType="clickEffect">
+                                  <p:stCondLst>
+                                    <p:cond delay="0"/>
+                                  </p:stCondLst>
+                                  <p:childTnLst>
+                                    <p:set>
+                                      <p:cBhvr>
+                                        <p:cTn id="26" dur="1" fill="hold">
+                                          <p:stCondLst>
+                                            <p:cond delay="0"/>
+                                          </p:stCondLst>
+                                        </p:cTn>
+                                        <p:tgtEl>
+                                          <p:spTgt spid="4">
+                                            <p:txEl>
+                                              <p:pRg st="3" end="3"/>
+                                            </p:txEl>
+                                          </p:spTgt>
+                                        </p:tgtEl>
+                                        <p:attrNameLst>
+                                          <p:attrName>style.visibility</p:attrName>
+                                        </p:attrNameLst>
+                                      </p:cBhvr>
+                                      <p:to>
+                                        <p:strVal val="visible"/>
+                                      </p:to>
+                                    </p:set>
+                                  </p:childTnLst>
+                                </p:cTn>
+                              </p:par>
+                            </p:childTnLst>
+                          </p:cTn>
+                        </p:par>
+                      </p:childTnLst>
+                    </p:cTn>
+                  </p:par>
+                </p:childTnLst>
+              </p:cTn>
+              <p:prevCondLst>
+                <p:cond evt="onPrev" delay="0">
+                  <p:tgtEl>
+                    <p:sldTgt/>
+                  </p:tgtEl>
+                </p:cond>
+              </p:prevCondLst>
+              <p:nextCondLst>
+                <p:cond evt="onNext" delay="0">
+                  <p:tgtEl>
+                    <p:sldTgt/>
+                  </p:tgtEl>
+                </p:cond>
+              </p:nextCondLst>
+            </p:seq>
+          </p:childTnLst>
+        </p:cTn>
+      </p:par>
+    </p:tnLst>
+    <p:bldLst>
+      <p:bldP spid="3" grpId="0" uiExpand="1" build="p"/>
+      <p:bldP spid="4" grpId="0" uiExpand="1" build="p"/>
+    </p:bldLst>
+  </p:timing>
 </p:sld>
 </file>
 
-<file path=ppt/slides/slide13.xml><?xml version="1.0" encoding="utf-8"?>
+<file path=ppt/slides/slide15.xml><?xml version="1.0" encoding="utf-8"?>
 <p:sld xmlns:a="http://schemas.openxmlformats.org/drawingml/2006/main" xmlns:r="http://schemas.openxmlformats.org/officeDocument/2006/relationships" xmlns:p="http://schemas.openxmlformats.org/presentationml/2006/main">
   <p:cSld>
     <p:spTree>
@@ -4159,22 +5083,214 @@
             </a:r>
           </a:p>
           <a:p>
-            <a:pPr lvl="0" indent="0" marL="0">
-              <a:buNone/>
-            </a:pPr>
+            <a:pPr lvl="0"/>
             <a:r>
               <a:rPr/>
-              <a:t>Different populations: LATE vs. ATE Different precision: IV is less efficient Different contexts: National scale-up vs. pilot program</a:t>
+              <a:t>Different populations: LATE vs. ATE</a:t>
+            </a:r>
+          </a:p>
+          <a:p>
+            <a:pPr lvl="0"/>
+            <a:r>
+              <a:rPr/>
+              <a:t>Different precision: IV is less efficient</a:t>
+            </a:r>
+          </a:p>
+          <a:p>
+            <a:pPr lvl="0"/>
+            <a:r>
+              <a:rPr/>
+              <a:t>Different contexts: National scale-up vs. pilot program</a:t>
             </a:r>
           </a:p>
         </p:txBody>
       </p:sp>
     </p:spTree>
   </p:cSld>
+  <p:timing>
+    <p:tnLst>
+      <p:par>
+        <p:cTn id="1" dur="indefinite" restart="never" nodeType="tmRoot">
+          <p:childTnLst>
+            <p:seq concurrent="1" nextAc="seek">
+              <p:cTn id="2" dur="indefinite" nodeType="mainSeq">
+                <p:childTnLst>
+                  <p:par>
+                    <p:cTn id="3" fill="hold">
+                      <p:stCondLst>
+                        <p:cond delay="indefinite"/>
+                      </p:stCondLst>
+                      <p:childTnLst>
+                        <p:par>
+                          <p:cTn id="4" fill="hold">
+                            <p:stCondLst>
+                              <p:cond delay="0"/>
+                            </p:stCondLst>
+                            <p:childTnLst>
+                              <p:par>
+                                <p:cTn id="5" presetID="1" presetClass="entr" presetSubtype="0" fill="hold" grpId="0" nodeType="clickEffect">
+                                  <p:stCondLst>
+                                    <p:cond delay="0"/>
+                                  </p:stCondLst>
+                                  <p:childTnLst>
+                                    <p:set>
+                                      <p:cBhvr>
+                                        <p:cTn id="6" dur="1" fill="hold">
+                                          <p:stCondLst>
+                                            <p:cond delay="0"/>
+                                          </p:stCondLst>
+                                        </p:cTn>
+                                        <p:tgtEl>
+                                          <p:spTgt spid="3">
+                                            <p:txEl>
+                                              <p:pRg st="1" end="1"/>
+                                            </p:txEl>
+                                          </p:spTgt>
+                                        </p:tgtEl>
+                                        <p:attrNameLst>
+                                          <p:attrName>style.visibility</p:attrName>
+                                        </p:attrNameLst>
+                                      </p:cBhvr>
+                                      <p:to>
+                                        <p:strVal val="visible"/>
+                                      </p:to>
+                                    </p:set>
+                                  </p:childTnLst>
+                                </p:cTn>
+                              </p:par>
+                            </p:childTnLst>
+                          </p:cTn>
+                        </p:par>
+                      </p:childTnLst>
+                    </p:cTn>
+                  </p:par>
+                  <p:par>
+                    <p:cTn id="7" fill="hold">
+                      <p:stCondLst>
+                        <p:cond delay="indefinite"/>
+                      </p:stCondLst>
+                      <p:childTnLst>
+                        <p:par>
+                          <p:cTn id="8" fill="hold">
+                            <p:stCondLst>
+                              <p:cond delay="0"/>
+                            </p:stCondLst>
+                            <p:childTnLst>
+                              <p:par>
+                                <p:cTn id="9" presetID="1" presetClass="entr" presetSubtype="0" fill="hold" grpId="0" nodeType="clickEffect">
+                                  <p:stCondLst>
+                                    <p:cond delay="0"/>
+                                  </p:stCondLst>
+                                  <p:childTnLst>
+                                    <p:set>
+                                      <p:cBhvr>
+                                        <p:cTn id="10" dur="1" fill="hold">
+                                          <p:stCondLst>
+                                            <p:cond delay="0"/>
+                                          </p:stCondLst>
+                                        </p:cTn>
+                                        <p:tgtEl>
+                                          <p:spTgt spid="3">
+                                            <p:txEl>
+                                              <p:pRg st="2" end="2"/>
+                                            </p:txEl>
+                                          </p:spTgt>
+                                        </p:tgtEl>
+                                        <p:attrNameLst>
+                                          <p:attrName>style.visibility</p:attrName>
+                                        </p:attrNameLst>
+                                      </p:cBhvr>
+                                      <p:to>
+                                        <p:strVal val="visible"/>
+                                      </p:to>
+                                    </p:set>
+                                  </p:childTnLst>
+                                </p:cTn>
+                              </p:par>
+                            </p:childTnLst>
+                          </p:cTn>
+                        </p:par>
+                      </p:childTnLst>
+                    </p:cTn>
+                  </p:par>
+                  <p:par>
+                    <p:cTn id="11" fill="hold">
+                      <p:stCondLst>
+                        <p:cond delay="indefinite"/>
+                      </p:stCondLst>
+                      <p:childTnLst>
+                        <p:par>
+                          <p:cTn id="12" fill="hold">
+                            <p:stCondLst>
+                              <p:cond delay="0"/>
+                            </p:stCondLst>
+                            <p:childTnLst>
+                              <p:par>
+                                <p:cTn id="13" presetID="1" presetClass="entr" presetSubtype="0" fill="hold" grpId="0" nodeType="clickEffect">
+                                  <p:stCondLst>
+                                    <p:cond delay="0"/>
+                                  </p:stCondLst>
+                                  <p:childTnLst>
+                                    <p:set>
+                                      <p:cBhvr>
+                                        <p:cTn id="14" dur="1" fill="hold">
+                                          <p:stCondLst>
+                                            <p:cond delay="0"/>
+                                          </p:stCondLst>
+                                        </p:cTn>
+                                        <p:tgtEl>
+                                          <p:spTgt spid="3">
+                                            <p:txEl>
+                                              <p:pRg st="3" end="3"/>
+                                            </p:txEl>
+                                          </p:spTgt>
+                                        </p:tgtEl>
+                                        <p:attrNameLst>
+                                          <p:attrName>style.visibility</p:attrName>
+                                        </p:attrNameLst>
+                                      </p:cBhvr>
+                                      <p:to>
+                                        <p:strVal val="visible"/>
+                                      </p:to>
+                                    </p:set>
+                                  </p:childTnLst>
+                                </p:cTn>
+                              </p:par>
+                            </p:childTnLst>
+                          </p:cTn>
+                        </p:par>
+                      </p:childTnLst>
+                    </p:cTn>
+                  </p:par>
+                </p:childTnLst>
+              </p:cTn>
+              <p:prevCondLst>
+                <p:cond evt="onPrev" delay="0">
+                  <p:tgtEl>
+                    <p:sldTgt/>
+                  </p:tgtEl>
+                </p:cond>
+              </p:prevCondLst>
+              <p:nextCondLst>
+                <p:cond evt="onNext" delay="0">
+                  <p:tgtEl>
+                    <p:sldTgt/>
+                  </p:tgtEl>
+                </p:cond>
+              </p:nextCondLst>
+            </p:seq>
+          </p:childTnLst>
+        </p:cTn>
+      </p:par>
+    </p:tnLst>
+    <p:bldLst>
+      <p:bldP spid="3" grpId="0" uiExpand="1" build="p"/>
+    </p:bldLst>
+  </p:timing>
 </p:sld>
 </file>
 
-<file path=ppt/slides/slide14.xml><?xml version="1.0" encoding="utf-8"?>
+<file path=ppt/slides/slide16.xml><?xml version="1.0" encoding="utf-8"?>
 <p:sld xmlns:a="http://schemas.openxmlformats.org/drawingml/2006/main" xmlns:r="http://schemas.openxmlformats.org/officeDocument/2006/relationships" xmlns:p="http://schemas.openxmlformats.org/presentationml/2006/main">
   <p:cSld>
     <p:spTree>
@@ -4680,7 +5796,7 @@
 </p:sld>
 </file>
 
-<file path=ppt/slides/slide15.xml><?xml version="1.0" encoding="utf-8"?>
+<file path=ppt/slides/slide17.xml><?xml version="1.0" encoding="utf-8"?>
 <p:sld xmlns:a="http://schemas.openxmlformats.org/drawingml/2006/main" xmlns:r="http://schemas.openxmlformats.org/officeDocument/2006/relationships" xmlns:p="http://schemas.openxmlformats.org/presentationml/2006/main">
   <p:cSld>
     <p:spTree>
@@ -5260,7 +6376,7 @@
 </p:sld>
 </file>
 
-<file path=ppt/slides/slide16.xml><?xml version="1.0" encoding="utf-8"?>
+<file path=ppt/slides/slide18.xml><?xml version="1.0" encoding="utf-8"?>
 <p:sld xmlns:a="http://schemas.openxmlformats.org/drawingml/2006/main" xmlns:r="http://schemas.openxmlformats.org/officeDocument/2006/relationships" xmlns:p="http://schemas.openxmlformats.org/presentationml/2006/main">
   <p:cSld>
     <p:spTree>
@@ -5341,7 +6457,7 @@
             <a:pPr lvl="0"/>
             <a:r>
               <a:rPr/>
-              <a:t>The program reduced waste management costs by $9,496 for compliers, slightly below the threshold</a:t>
+              <a:t>The program reduced waste management costs by 1,033 AED for compliers, above the threshold</a:t>
             </a:r>
           </a:p>
           <a:p>
@@ -5636,7 +6752,7 @@
 </p:sld>
 </file>
 
-<file path=ppt/slides/slide17.xml><?xml version="1.0" encoding="utf-8"?>
+<file path=ppt/slides/slide19.xml><?xml version="1.0" encoding="utf-8"?>
 <p:sld xmlns:a="http://schemas.openxmlformats.org/drawingml/2006/main" xmlns:r="http://schemas.openxmlformats.org/officeDocument/2006/relationships" xmlns:p="http://schemas.openxmlformats.org/presentationml/2006/main">
   <p:cSld>
     <p:spTree>
@@ -5782,7 +6898,7 @@
             <a:pPr lvl="0"/>
             <a:r>
               <a:rPr/>
-              <a:t>Example: National scale-up of Program means we can’t deny eligibility</a:t>
+              <a:t>Example: National scale-up of the Program means we can’t deny eligibility</a:t>
             </a:r>
           </a:p>
           <a:p>
@@ -5802,7 +6918,7 @@
             </a:r>
             <a:r>
               <a:rPr/>
-              <a:t> How to measure impact when actual participation is voluntary?</a:t>
+              <a:t> How do we measure impact when actual participation is voluntary?</a:t>
             </a:r>
           </a:p>
         </p:txBody>
@@ -6103,7 +7219,7 @@
             </a:pPr>
             <a:r>
               <a:rPr b="1"/>
-              <a:t>Instrumental variable (IV)</a:t>
+              <a:t>Instrumental Variable (IV)</a:t>
             </a:r>
             <a:r>
               <a:rPr/>
@@ -6483,7 +7599,7 @@
             <a:pPr lvl="0"/>
             <a:r>
               <a:rPr/>
-              <a:t>The ministry wants to make the Programm available to all industries</a:t>
+              <a:t>The ministry wants to make the program available to all industries</a:t>
             </a:r>
           </a:p>
           <a:p>
@@ -6505,6 +7621,33 @@
             <a:r>
               <a:rPr/>
               <a:t>This creates exogenous variation in enrollment</a:t>
+            </a:r>
+          </a:p>
+          <a:p>
+            <a:pPr lvl="0" indent="0" marL="0">
+              <a:buNone/>
+            </a:pPr>
+            <a:r>
+              <a:rPr/>
+              <a:t>If the promotion is effective, then we should have a higher likelihood of participation in the intervention for those who received it. If we are just interested in the question of whether encouraging enrollment in the project using messages improved our outcomes compared to providing the program without messaging, then we can run the regression for those that randomly received messaging versus those that did not. This is what we learned about randomization so far.</a:t>
+            </a:r>
+          </a:p>
+          <a:p>
+            <a:pPr lvl="0" indent="0" marL="0">
+              <a:buNone/>
+            </a:pPr>
+            <a:r>
+              <a:rPr/>
+              <a:t>However, we ideally want an estimate of the program not the messaging, and there also may be some individuals that received the promotion but still didn’t take up the program. This creates selection bias since those that actually take up the program may have higher outcomes to begin with. We want to run our analyses to see if receiving the promotion encouraged participants to take part in the project AND if that participation impacted their crop yields.</a:t>
+            </a:r>
+          </a:p>
+          <a:p>
+            <a:pPr lvl="0" indent="0" marL="0">
+              <a:buNone/>
+            </a:pPr>
+            <a:r>
+              <a:rPr/>
+              <a:t>How do we do this? In two stages.</a:t>
             </a:r>
           </a:p>
         </p:txBody>
@@ -6800,6 +7943,15 @@
           <a:bodyPr/>
           <a:lstStyle/>
           <a:p>
+            <a:pPr lvl="0" indent="0" marL="0">
+              <a:buNone/>
+            </a:pPr>
+            <a:r>
+              <a:rPr/>
+              <a:t>In the first stage, we measure the effect of encouragement on participation in program (e.g., how much more likely someone is to participate due to the encouragement).</a:t>
+            </a:r>
+          </a:p>
+          <a:p>
             <a:pPr lvl="0" indent="0">
               <a:buNone/>
             </a:pPr>
@@ -7026,6 +8178,62 @@
             <a:r>
               <a:rPr/>
               <a:t>Strong first stage (F-statistic &gt; 10): 2552.2</a:t>
+            </a:r>
+          </a:p>
+          <a:p>
+            <a:pPr lvl="0" indent="0" marL="1270000">
+              <a:buNone/>
+            </a:pPr>
+            <a:r>
+              <a:rPr sz="2000" b="1"/>
+              <a:t>What is the F-statistic?</a:t>
+            </a:r>
+            <a:br/>
+            <a:r>
+              <a:rPr sz="2000"/>
+              <a:t>The F-statistic tests whether the instrument (promotion) is a </a:t>
+            </a:r>
+            <a:r>
+              <a:rPr sz="2000" b="1"/>
+              <a:t>strong predictor</a:t>
+            </a:r>
+            <a:r>
+              <a:rPr sz="2000"/>
+              <a:t> of the endogenous variable (enrollment).</a:t>
+            </a:r>
+            <a:br/>
+            <a:r>
+              <a:rPr sz="2000"/>
+              <a:t>- A </a:t>
+            </a:r>
+            <a:r>
+              <a:rPr sz="2000" b="1"/>
+              <a:t>high F-statistic</a:t>
+            </a:r>
+            <a:r>
+              <a:rPr sz="2000"/>
+              <a:t> (greater than 10) suggests the instrument is strong and relevant.</a:t>
+            </a:r>
+            <a:br/>
+            <a:r>
+              <a:rPr sz="2000"/>
+              <a:t>- A </a:t>
+            </a:r>
+            <a:r>
+              <a:rPr sz="2000" b="1"/>
+              <a:t>low F-statistic</a:t>
+            </a:r>
+            <a:r>
+              <a:rPr sz="2000"/>
+              <a:t> (below 10) would indicate a </a:t>
+            </a:r>
+            <a:r>
+              <a:rPr sz="2000" b="1"/>
+              <a:t>weak instrument</a:t>
+            </a:r>
+            <a:r>
+              <a:rPr sz="2000"/>
+              <a:t>, which could bias IV estimates and make them unreliable.</a:t>
             </a:r>
           </a:p>
         </p:txBody>
@@ -7307,6 +8515,1977 @@
                         <a:rPr/>
                         <a:t> + p &lt; 0.1, * p &lt; 0.05, ** p &lt; 0.01, *** p &lt; 0.001</a:t>
                       </a:r>
+                    </a:p>
+                  </a:txBody>
+                </a:tc>
+                <a:tc>
+                  <a:txBody>
+                    <a:bodyPr/>
+                    <a:lstStyle/>
+                    <a:p>
+                      <a:endParaRPr/>
+                    </a:p>
+                  </a:txBody>
+                </a:tc>
+              </a:tr>
+            </a:tbl>
+          </a:graphicData>
+        </a:graphic>
+      </p:graphicFrame>
+    </p:spTree>
+  </p:cSld>
+  <p:timing>
+    <p:tnLst>
+      <p:par>
+        <p:cTn id="1" dur="indefinite" restart="never" nodeType="tmRoot">
+          <p:childTnLst>
+            <p:seq concurrent="1" nextAc="seek">
+              <p:cTn id="2" dur="indefinite" nodeType="mainSeq">
+                <p:childTnLst>
+                  <p:par>
+                    <p:cTn id="3" fill="hold">
+                      <p:stCondLst>
+                        <p:cond delay="indefinite"/>
+                      </p:stCondLst>
+                      <p:childTnLst>
+                        <p:par>
+                          <p:cTn id="4" fill="hold">
+                            <p:stCondLst>
+                              <p:cond delay="0"/>
+                            </p:stCondLst>
+                            <p:childTnLst>
+                              <p:par>
+                                <p:cTn id="5" presetID="1" presetClass="entr" presetSubtype="0" fill="hold" grpId="0" nodeType="clickEffect">
+                                  <p:stCondLst>
+                                    <p:cond delay="0"/>
+                                  </p:stCondLst>
+                                  <p:childTnLst>
+                                    <p:set>
+                                      <p:cBhvr>
+                                        <p:cTn id="6" dur="1" fill="hold">
+                                          <p:stCondLst>
+                                            <p:cond delay="0"/>
+                                          </p:stCondLst>
+                                        </p:cTn>
+                                        <p:tgtEl>
+                                          <p:spTgt spid="3">
+                                            <p:txEl>
+                                              <p:pRg st="3" end="3"/>
+                                            </p:txEl>
+                                          </p:spTgt>
+                                        </p:tgtEl>
+                                        <p:attrNameLst>
+                                          <p:attrName>style.visibility</p:attrName>
+                                        </p:attrNameLst>
+                                      </p:cBhvr>
+                                      <p:to>
+                                        <p:strVal val="visible"/>
+                                      </p:to>
+                                    </p:set>
+                                  </p:childTnLst>
+                                </p:cTn>
+                              </p:par>
+                            </p:childTnLst>
+                          </p:cTn>
+                        </p:par>
+                      </p:childTnLst>
+                    </p:cTn>
+                  </p:par>
+                  <p:par>
+                    <p:cTn id="7" fill="hold">
+                      <p:stCondLst>
+                        <p:cond delay="indefinite"/>
+                      </p:stCondLst>
+                      <p:childTnLst>
+                        <p:par>
+                          <p:cTn id="8" fill="hold">
+                            <p:stCondLst>
+                              <p:cond delay="0"/>
+                            </p:stCondLst>
+                            <p:childTnLst>
+                              <p:par>
+                                <p:cTn id="9" presetID="1" presetClass="entr" presetSubtype="0" fill="hold" grpId="0" nodeType="clickEffect">
+                                  <p:stCondLst>
+                                    <p:cond delay="0"/>
+                                  </p:stCondLst>
+                                  <p:childTnLst>
+                                    <p:set>
+                                      <p:cBhvr>
+                                        <p:cTn id="10" dur="1" fill="hold">
+                                          <p:stCondLst>
+                                            <p:cond delay="0"/>
+                                          </p:stCondLst>
+                                        </p:cTn>
+                                        <p:tgtEl>
+                                          <p:spTgt spid="3">
+                                            <p:txEl>
+                                              <p:pRg st="4" end="4"/>
+                                            </p:txEl>
+                                          </p:spTgt>
+                                        </p:tgtEl>
+                                        <p:attrNameLst>
+                                          <p:attrName>style.visibility</p:attrName>
+                                        </p:attrNameLst>
+                                      </p:cBhvr>
+                                      <p:to>
+                                        <p:strVal val="visible"/>
+                                      </p:to>
+                                    </p:set>
+                                  </p:childTnLst>
+                                </p:cTn>
+                              </p:par>
+                            </p:childTnLst>
+                          </p:cTn>
+                        </p:par>
+                      </p:childTnLst>
+                    </p:cTn>
+                  </p:par>
+                  <p:par>
+                    <p:cTn id="11" fill="hold">
+                      <p:stCondLst>
+                        <p:cond delay="indefinite"/>
+                      </p:stCondLst>
+                      <p:childTnLst>
+                        <p:par>
+                          <p:cTn id="12" fill="hold">
+                            <p:stCondLst>
+                              <p:cond delay="0"/>
+                            </p:stCondLst>
+                            <p:childTnLst>
+                              <p:par>
+                                <p:cTn id="13" presetID="1" presetClass="entr" presetSubtype="0" fill="hold" grpId="0" nodeType="clickEffect">
+                                  <p:stCondLst>
+                                    <p:cond delay="0"/>
+                                  </p:stCondLst>
+                                  <p:childTnLst>
+                                    <p:set>
+                                      <p:cBhvr>
+                                        <p:cTn id="14" dur="1" fill="hold">
+                                          <p:stCondLst>
+                                            <p:cond delay="0"/>
+                                          </p:stCondLst>
+                                        </p:cTn>
+                                        <p:tgtEl>
+                                          <p:spTgt spid="3">
+                                            <p:txEl>
+                                              <p:pRg st="5" end="5"/>
+                                            </p:txEl>
+                                          </p:spTgt>
+                                        </p:tgtEl>
+                                        <p:attrNameLst>
+                                          <p:attrName>style.visibility</p:attrName>
+                                        </p:attrNameLst>
+                                      </p:cBhvr>
+                                      <p:to>
+                                        <p:strVal val="visible"/>
+                                      </p:to>
+                                    </p:set>
+                                  </p:childTnLst>
+                                </p:cTn>
+                              </p:par>
+                            </p:childTnLst>
+                          </p:cTn>
+                        </p:par>
+                      </p:childTnLst>
+                    </p:cTn>
+                  </p:par>
+                  <p:par>
+                    <p:cTn id="15" fill="hold">
+                      <p:stCondLst>
+                        <p:cond delay="indefinite"/>
+                      </p:stCondLst>
+                      <p:childTnLst>
+                        <p:par>
+                          <p:cTn id="16" fill="hold">
+                            <p:stCondLst>
+                              <p:cond delay="0"/>
+                            </p:stCondLst>
+                            <p:childTnLst>
+                              <p:par>
+                                <p:cTn id="17" presetID="1" presetClass="entr" presetSubtype="0" fill="hold" grpId="0" nodeType="clickEffect">
+                                  <p:stCondLst>
+                                    <p:cond delay="0"/>
+                                  </p:stCondLst>
+                                  <p:childTnLst>
+                                    <p:set>
+                                      <p:cBhvr>
+                                        <p:cTn id="18" dur="1" fill="hold">
+                                          <p:stCondLst>
+                                            <p:cond delay="0"/>
+                                          </p:stCondLst>
+                                        </p:cTn>
+                                        <p:tgtEl>
+                                          <p:spTgt spid="3">
+                                            <p:txEl>
+                                              <p:pRg st="6" end="6"/>
+                                            </p:txEl>
+                                          </p:spTgt>
+                                        </p:tgtEl>
+                                        <p:attrNameLst>
+                                          <p:attrName>style.visibility</p:attrName>
+                                        </p:attrNameLst>
+                                      </p:cBhvr>
+                                      <p:to>
+                                        <p:strVal val="visible"/>
+                                      </p:to>
+                                    </p:set>
+                                  </p:childTnLst>
+                                </p:cTn>
+                              </p:par>
+                            </p:childTnLst>
+                          </p:cTn>
+                        </p:par>
+                      </p:childTnLst>
+                    </p:cTn>
+                  </p:par>
+                </p:childTnLst>
+              </p:cTn>
+              <p:prevCondLst>
+                <p:cond evt="onPrev" delay="0">
+                  <p:tgtEl>
+                    <p:sldTgt/>
+                  </p:tgtEl>
+                </p:cond>
+              </p:prevCondLst>
+              <p:nextCondLst>
+                <p:cond evt="onNext" delay="0">
+                  <p:tgtEl>
+                    <p:sldTgt/>
+                  </p:tgtEl>
+                </p:cond>
+              </p:nextCondLst>
+            </p:seq>
+          </p:childTnLst>
+        </p:cTn>
+      </p:par>
+    </p:tnLst>
+    <p:bldLst>
+      <p:bldP spid="3" grpId="0" uiExpand="1" build="p"/>
+    </p:bldLst>
+  </p:timing>
+</p:sld>
+</file>
+
+<file path=ppt/slides/slide6.xml><?xml version="1.0" encoding="utf-8"?>
+<p:sld xmlns:a="http://schemas.openxmlformats.org/drawingml/2006/main" xmlns:r="http://schemas.openxmlformats.org/officeDocument/2006/relationships" xmlns:p="http://schemas.openxmlformats.org/presentationml/2006/main">
+  <p:cSld>
+    <p:spTree>
+      <p:nvGrpSpPr>
+        <p:cNvPr id="1" name=""/>
+        <p:cNvGrpSpPr/>
+        <p:nvPr/>
+      </p:nvGrpSpPr>
+      <p:grpSpPr>
+        <a:xfrm>
+          <a:off x="0" y="0"/>
+          <a:ext cx="0" cy="0"/>
+          <a:chOff x="0" y="0"/>
+          <a:chExt cx="0" cy="0"/>
+        </a:xfrm>
+      </p:grpSpPr>
+      <p:sp>
+        <p:nvSpPr>
+          <p:cNvPr id="2" name="Title 1"/>
+          <p:cNvSpPr>
+            <a:spLocks noGrp="1"/>
+          </p:cNvSpPr>
+          <p:nvPr>
+            <p:ph type="title"/>
+          </p:nvPr>
+        </p:nvSpPr>
+        <p:spPr/>
+        <p:txBody>
+          <a:bodyPr/>
+          <a:lstStyle/>
+          <a:p>
+            <a:pPr lvl="0" indent="0" marL="0">
+              <a:buNone/>
+            </a:pPr>
+            <a:r>
+              <a:rPr/>
+              <a:t>2. Intention-to-Treat (ITT) Effect</a:t>
+            </a:r>
+          </a:p>
+        </p:txBody>
+      </p:sp>
+      <p:sp>
+        <p:nvSpPr>
+          <p:cNvPr id="3" name="Content Placeholder 2"/>
+          <p:cNvSpPr>
+            <a:spLocks noGrp="1"/>
+          </p:cNvSpPr>
+          <p:nvPr>
+            <p:ph idx="1"/>
+          </p:nvPr>
+        </p:nvSpPr>
+        <p:spPr/>
+        <p:txBody>
+          <a:bodyPr/>
+          <a:lstStyle/>
+          <a:p>
+            <a:pPr lvl="0" indent="0" marL="0">
+              <a:buNone/>
+            </a:pPr>
+            <a:r>
+              <a:rPr/>
+              <a:t>The second stage is the link between participation on our outcomes of interest. This second stage is the effect of the </a:t>
+            </a:r>
+            <a:r>
+              <a:rPr i="1"/>
+              <a:t>encouragement</a:t>
+            </a:r>
+            <a:r>
+              <a:rPr/>
+              <a:t> on the outcome (referred to as the “reduced form”). This is also known as the Intention-to-Treat (ITT) Effect or the effect on outcomes based on the original randomization, regardless of the actual treatment or compliance with the program.</a:t>
+            </a:r>
+          </a:p>
+        </p:txBody>
+      </p:sp>
+    </p:spTree>
+  </p:cSld>
+</p:sld>
+</file>
+
+<file path=ppt/slides/slide7.xml><?xml version="1.0" encoding="utf-8"?>
+<p:sld xmlns:a="http://schemas.openxmlformats.org/drawingml/2006/main" xmlns:r="http://schemas.openxmlformats.org/officeDocument/2006/relationships" xmlns:p="http://schemas.openxmlformats.org/presentationml/2006/main">
+  <p:cSld>
+    <p:spTree>
+      <p:nvGrpSpPr>
+        <p:cNvPr id="1" name=""/>
+        <p:cNvGrpSpPr/>
+        <p:nvPr/>
+      </p:nvGrpSpPr>
+      <p:grpSpPr>
+        <a:xfrm>
+          <a:off x="0" y="0"/>
+          <a:ext cx="0" cy="0"/>
+          <a:chOff x="0" y="0"/>
+          <a:chExt cx="0" cy="0"/>
+        </a:xfrm>
+      </p:grpSpPr>
+      <p:sp>
+        <p:nvSpPr>
+          <p:cNvPr id="3" name="Content Placeholder 2"/>
+          <p:cNvSpPr>
+            <a:spLocks noGrp="1"/>
+          </p:cNvSpPr>
+          <p:nvPr>
+            <p:ph idx="1" sz="half"/>
+          </p:nvPr>
+        </p:nvSpPr>
+        <p:spPr/>
+        <p:txBody>
+          <a:bodyPr/>
+          <a:lstStyle/>
+          <a:p>
+            <a:pPr lvl="0" indent="0">
+              <a:buNone/>
+            </a:pPr>
+            <a:r>
+              <a:rPr>
+                <a:solidFill>
+                  <a:srgbClr val="5E5E5E"/>
+                </a:solidFill>
+                <a:latin typeface="Courier"/>
+              </a:rPr>
+              <a:t># Estimate ITT effect (reduced form)</a:t>
+            </a:r>
+            <a:br/>
+            <a:r>
+              <a:rPr>
+                <a:solidFill>
+                  <a:srgbClr val="003B4F"/>
+                </a:solidFill>
+                <a:latin typeface="Courier"/>
+              </a:rPr>
+              <a:t>m_itt &lt;- </a:t>
+            </a:r>
+            <a:r>
+              <a:rPr>
+                <a:solidFill>
+                  <a:srgbClr val="4758AB"/>
+                </a:solidFill>
+                <a:latin typeface="Courier"/>
+              </a:rPr>
+              <a:t>lm_robust</a:t>
+            </a:r>
+            <a:r>
+              <a:rPr>
+                <a:solidFill>
+                  <a:srgbClr val="003B4F"/>
+                </a:solidFill>
+                <a:latin typeface="Courier"/>
+              </a:rPr>
+              <a:t>(waste_management_costs </a:t>
+            </a:r>
+            <a:r>
+              <a:rPr>
+                <a:solidFill>
+                  <a:srgbClr val="5E5E5E"/>
+                </a:solidFill>
+                <a:latin typeface="Courier"/>
+              </a:rPr>
+              <a:t>~</a:t>
+            </a:r>
+            <a:r>
+              <a:rPr>
+                <a:solidFill>
+                  <a:srgbClr val="003B4F"/>
+                </a:solidFill>
+                <a:latin typeface="Courier"/>
+              </a:rPr>
+              <a:t> promotion_zone,</a:t>
+            </a:r>
+            <a:br/>
+            <a:r>
+              <a:rPr>
+                <a:solidFill>
+                  <a:srgbClr val="003B4F"/>
+                </a:solidFill>
+                <a:latin typeface="Courier"/>
+              </a:rPr>
+              <a:t>                   </a:t>
+            </a:r>
+            <a:r>
+              <a:rPr>
+                <a:solidFill>
+                  <a:srgbClr val="657422"/>
+                </a:solidFill>
+                <a:latin typeface="Courier"/>
+              </a:rPr>
+              <a:t>clusters =</a:t>
+            </a:r>
+            <a:r>
+              <a:rPr>
+                <a:solidFill>
+                  <a:srgbClr val="003B4F"/>
+                </a:solidFill>
+                <a:latin typeface="Courier"/>
+              </a:rPr>
+              <a:t> zone_identifier,</a:t>
+            </a:r>
+            <a:br/>
+            <a:r>
+              <a:rPr>
+                <a:solidFill>
+                  <a:srgbClr val="003B4F"/>
+                </a:solidFill>
+                <a:latin typeface="Courier"/>
+              </a:rPr>
+              <a:t>                   </a:t>
+            </a:r>
+            <a:r>
+              <a:rPr>
+                <a:solidFill>
+                  <a:srgbClr val="657422"/>
+                </a:solidFill>
+                <a:latin typeface="Courier"/>
+              </a:rPr>
+              <a:t>data =</a:t>
+            </a:r>
+            <a:r>
+              <a:rPr>
+                <a:solidFill>
+                  <a:srgbClr val="003B4F"/>
+                </a:solidFill>
+                <a:latin typeface="Courier"/>
+              </a:rPr>
+              <a:t> df </a:t>
+            </a:r>
+            <a:r>
+              <a:rPr>
+                <a:solidFill>
+                  <a:srgbClr val="5E5E5E"/>
+                </a:solidFill>
+                <a:latin typeface="Courier"/>
+              </a:rPr>
+              <a:t>%&gt;%</a:t>
+            </a:r>
+            <a:r>
+              <a:rPr>
+                <a:solidFill>
+                  <a:srgbClr val="003B4F"/>
+                </a:solidFill>
+                <a:latin typeface="Courier"/>
+              </a:rPr>
+              <a:t> </a:t>
+            </a:r>
+            <a:r>
+              <a:rPr>
+                <a:solidFill>
+                  <a:srgbClr val="4758AB"/>
+                </a:solidFill>
+                <a:latin typeface="Courier"/>
+              </a:rPr>
+              <a:t>filter</a:t>
+            </a:r>
+            <a:r>
+              <a:rPr>
+                <a:solidFill>
+                  <a:srgbClr val="003B4F"/>
+                </a:solidFill>
+                <a:latin typeface="Courier"/>
+              </a:rPr>
+              <a:t>(round </a:t>
+            </a:r>
+            <a:r>
+              <a:rPr>
+                <a:solidFill>
+                  <a:srgbClr val="5E5E5E"/>
+                </a:solidFill>
+                <a:latin typeface="Courier"/>
+              </a:rPr>
+              <a:t>==</a:t>
+            </a:r>
+            <a:r>
+              <a:rPr>
+                <a:solidFill>
+                  <a:srgbClr val="003B4F"/>
+                </a:solidFill>
+                <a:latin typeface="Courier"/>
+              </a:rPr>
+              <a:t> </a:t>
+            </a:r>
+            <a:r>
+              <a:rPr>
+                <a:solidFill>
+                  <a:srgbClr val="AD0000"/>
+                </a:solidFill>
+                <a:latin typeface="Courier"/>
+              </a:rPr>
+              <a:t>1</a:t>
+            </a:r>
+            <a:r>
+              <a:rPr>
+                <a:solidFill>
+                  <a:srgbClr val="003B4F"/>
+                </a:solidFill>
+                <a:latin typeface="Courier"/>
+              </a:rPr>
+              <a:t>))</a:t>
+            </a:r>
+            <a:br/>
+            <a:br/>
+            <a:r>
+              <a:rPr>
+                <a:solidFill>
+                  <a:srgbClr val="5E5E5E"/>
+                </a:solidFill>
+                <a:latin typeface="Courier"/>
+              </a:rPr>
+              <a:t># With covariate adjustment</a:t>
+            </a:r>
+            <a:br/>
+            <a:r>
+              <a:rPr>
+                <a:solidFill>
+                  <a:srgbClr val="003B4F"/>
+                </a:solidFill>
+                <a:latin typeface="Courier"/>
+              </a:rPr>
+              <a:t>m_itt_wcov &lt;- </a:t>
+            </a:r>
+            <a:r>
+              <a:rPr>
+                <a:solidFill>
+                  <a:srgbClr val="4758AB"/>
+                </a:solidFill>
+                <a:latin typeface="Courier"/>
+              </a:rPr>
+              <a:t>lm_robust</a:t>
+            </a:r>
+            <a:r>
+              <a:rPr>
+                <a:solidFill>
+                  <a:srgbClr val="003B4F"/>
+                </a:solidFill>
+                <a:latin typeface="Courier"/>
+              </a:rPr>
+              <a:t>(waste_management_costs </a:t>
+            </a:r>
+            <a:r>
+              <a:rPr>
+                <a:solidFill>
+                  <a:srgbClr val="5E5E5E"/>
+                </a:solidFill>
+                <a:latin typeface="Courier"/>
+              </a:rPr>
+              <a:t>~</a:t>
+            </a:r>
+            <a:r>
+              <a:rPr>
+                <a:solidFill>
+                  <a:srgbClr val="003B4F"/>
+                </a:solidFill>
+                <a:latin typeface="Courier"/>
+              </a:rPr>
+              <a:t> promotion_zone </a:t>
+            </a:r>
+            <a:r>
+              <a:rPr>
+                <a:solidFill>
+                  <a:srgbClr val="5E5E5E"/>
+                </a:solidFill>
+                <a:latin typeface="Courier"/>
+              </a:rPr>
+              <a:t>+</a:t>
+            </a:r>
+            <a:r>
+              <a:rPr>
+                <a:solidFill>
+                  <a:srgbClr val="003B4F"/>
+                </a:solidFill>
+                <a:latin typeface="Courier"/>
+              </a:rPr>
+              <a:t> </a:t>
+            </a:r>
+            <a:br/>
+            <a:r>
+              <a:rPr>
+                <a:solidFill>
+                  <a:srgbClr val="003B4F"/>
+                </a:solidFill>
+                <a:latin typeface="Courier"/>
+              </a:rPr>
+              <a:t>                        age_manager </a:t>
+            </a:r>
+            <a:r>
+              <a:rPr>
+                <a:solidFill>
+                  <a:srgbClr val="5E5E5E"/>
+                </a:solidFill>
+                <a:latin typeface="Courier"/>
+              </a:rPr>
+              <a:t>+</a:t>
+            </a:r>
+            <a:r>
+              <a:rPr>
+                <a:solidFill>
+                  <a:srgbClr val="003B4F"/>
+                </a:solidFill>
+                <a:latin typeface="Courier"/>
+              </a:rPr>
+              <a:t> age_deputy </a:t>
+            </a:r>
+            <a:r>
+              <a:rPr>
+                <a:solidFill>
+                  <a:srgbClr val="5E5E5E"/>
+                </a:solidFill>
+                <a:latin typeface="Courier"/>
+              </a:rPr>
+              <a:t>+</a:t>
+            </a:r>
+            <a:br/>
+            <a:r>
+              <a:rPr>
+                <a:solidFill>
+                  <a:srgbClr val="003B4F"/>
+                </a:solidFill>
+                <a:latin typeface="Courier"/>
+              </a:rPr>
+              <a:t>                        female_manager </a:t>
+            </a:r>
+            <a:r>
+              <a:rPr>
+                <a:solidFill>
+                  <a:srgbClr val="5E5E5E"/>
+                </a:solidFill>
+                <a:latin typeface="Courier"/>
+              </a:rPr>
+              <a:t>+</a:t>
+            </a:r>
+            <a:r>
+              <a:rPr>
+                <a:solidFill>
+                  <a:srgbClr val="003B4F"/>
+                </a:solidFill>
+                <a:latin typeface="Courier"/>
+              </a:rPr>
+              <a:t> foreign_owned </a:t>
+            </a:r>
+            <a:r>
+              <a:rPr>
+                <a:solidFill>
+                  <a:srgbClr val="5E5E5E"/>
+                </a:solidFill>
+                <a:latin typeface="Courier"/>
+              </a:rPr>
+              <a:t>+</a:t>
+            </a:r>
+            <a:r>
+              <a:rPr>
+                <a:solidFill>
+                  <a:srgbClr val="003B4F"/>
+                </a:solidFill>
+                <a:latin typeface="Courier"/>
+              </a:rPr>
+              <a:t> </a:t>
+            </a:r>
+            <a:br/>
+            <a:r>
+              <a:rPr>
+                <a:solidFill>
+                  <a:srgbClr val="003B4F"/>
+                </a:solidFill>
+                <a:latin typeface="Courier"/>
+              </a:rPr>
+              <a:t>                        staff_size </a:t>
+            </a:r>
+            <a:r>
+              <a:rPr>
+                <a:solidFill>
+                  <a:srgbClr val="5E5E5E"/>
+                </a:solidFill>
+                <a:latin typeface="Courier"/>
+              </a:rPr>
+              <a:t>+</a:t>
+            </a:r>
+            <a:br/>
+            <a:r>
+              <a:rPr>
+                <a:solidFill>
+                  <a:srgbClr val="003B4F"/>
+                </a:solidFill>
+                <a:latin typeface="Courier"/>
+              </a:rPr>
+              <a:t>                        advanced_filtration </a:t>
+            </a:r>
+            <a:r>
+              <a:rPr>
+                <a:solidFill>
+                  <a:srgbClr val="5E5E5E"/>
+                </a:solidFill>
+                <a:latin typeface="Courier"/>
+              </a:rPr>
+              <a:t>+</a:t>
+            </a:r>
+            <a:r>
+              <a:rPr>
+                <a:solidFill>
+                  <a:srgbClr val="003B4F"/>
+                </a:solidFill>
+                <a:latin typeface="Courier"/>
+              </a:rPr>
+              <a:t> </a:t>
+            </a:r>
+            <a:br/>
+            <a:r>
+              <a:rPr>
+                <a:solidFill>
+                  <a:srgbClr val="003B4F"/>
+                </a:solidFill>
+                <a:latin typeface="Courier"/>
+              </a:rPr>
+              <a:t>                        facility_area </a:t>
+            </a:r>
+            <a:r>
+              <a:rPr>
+                <a:solidFill>
+                  <a:srgbClr val="5E5E5E"/>
+                </a:solidFill>
+                <a:latin typeface="Courier"/>
+              </a:rPr>
+              <a:t>+</a:t>
+            </a:r>
+            <a:br/>
+            <a:r>
+              <a:rPr>
+                <a:solidFill>
+                  <a:srgbClr val="003B4F"/>
+                </a:solidFill>
+                <a:latin typeface="Courier"/>
+              </a:rPr>
+              <a:t>                        recycling_center_distance,</a:t>
+            </a:r>
+            <a:br/>
+            <a:r>
+              <a:rPr>
+                <a:solidFill>
+                  <a:srgbClr val="003B4F"/>
+                </a:solidFill>
+                <a:latin typeface="Courier"/>
+              </a:rPr>
+              <a:t>                        </a:t>
+            </a:r>
+            <a:r>
+              <a:rPr>
+                <a:solidFill>
+                  <a:srgbClr val="657422"/>
+                </a:solidFill>
+                <a:latin typeface="Courier"/>
+              </a:rPr>
+              <a:t>clusters =</a:t>
+            </a:r>
+            <a:r>
+              <a:rPr>
+                <a:solidFill>
+                  <a:srgbClr val="003B4F"/>
+                </a:solidFill>
+                <a:latin typeface="Courier"/>
+              </a:rPr>
+              <a:t> zone_identifier,</a:t>
+            </a:r>
+            <a:br/>
+            <a:r>
+              <a:rPr>
+                <a:solidFill>
+                  <a:srgbClr val="003B4F"/>
+                </a:solidFill>
+                <a:latin typeface="Courier"/>
+              </a:rPr>
+              <a:t>                        </a:t>
+            </a:r>
+            <a:r>
+              <a:rPr>
+                <a:solidFill>
+                  <a:srgbClr val="657422"/>
+                </a:solidFill>
+                <a:latin typeface="Courier"/>
+              </a:rPr>
+              <a:t>data =</a:t>
+            </a:r>
+            <a:r>
+              <a:rPr>
+                <a:solidFill>
+                  <a:srgbClr val="003B4F"/>
+                </a:solidFill>
+                <a:latin typeface="Courier"/>
+              </a:rPr>
+              <a:t> df </a:t>
+            </a:r>
+            <a:r>
+              <a:rPr>
+                <a:solidFill>
+                  <a:srgbClr val="5E5E5E"/>
+                </a:solidFill>
+                <a:latin typeface="Courier"/>
+              </a:rPr>
+              <a:t>%&gt;%</a:t>
+            </a:r>
+            <a:r>
+              <a:rPr>
+                <a:solidFill>
+                  <a:srgbClr val="003B4F"/>
+                </a:solidFill>
+                <a:latin typeface="Courier"/>
+              </a:rPr>
+              <a:t> </a:t>
+            </a:r>
+            <a:r>
+              <a:rPr>
+                <a:solidFill>
+                  <a:srgbClr val="4758AB"/>
+                </a:solidFill>
+                <a:latin typeface="Courier"/>
+              </a:rPr>
+              <a:t>filter</a:t>
+            </a:r>
+            <a:r>
+              <a:rPr>
+                <a:solidFill>
+                  <a:srgbClr val="003B4F"/>
+                </a:solidFill>
+                <a:latin typeface="Courier"/>
+              </a:rPr>
+              <a:t>(round </a:t>
+            </a:r>
+            <a:r>
+              <a:rPr>
+                <a:solidFill>
+                  <a:srgbClr val="5E5E5E"/>
+                </a:solidFill>
+                <a:latin typeface="Courier"/>
+              </a:rPr>
+              <a:t>==</a:t>
+            </a:r>
+            <a:r>
+              <a:rPr>
+                <a:solidFill>
+                  <a:srgbClr val="003B4F"/>
+                </a:solidFill>
+                <a:latin typeface="Courier"/>
+              </a:rPr>
+              <a:t> </a:t>
+            </a:r>
+            <a:r>
+              <a:rPr>
+                <a:solidFill>
+                  <a:srgbClr val="AD0000"/>
+                </a:solidFill>
+                <a:latin typeface="Courier"/>
+              </a:rPr>
+              <a:t>1</a:t>
+            </a:r>
+            <a:r>
+              <a:rPr>
+                <a:solidFill>
+                  <a:srgbClr val="003B4F"/>
+                </a:solidFill>
+                <a:latin typeface="Courier"/>
+              </a:rPr>
+              <a:t>))</a:t>
+            </a:r>
+          </a:p>
+          <a:p>
+            <a:pPr lvl="0" indent="0" marL="0">
+              <a:buNone/>
+            </a:pPr>
+            <a:r>
+              <a:rPr b="1"/>
+              <a:t>ITT Results</a:t>
+            </a:r>
+            <a:r>
+              <a:rPr/>
+              <a:t>:</a:t>
+            </a:r>
+          </a:p>
+          <a:p>
+            <a:pPr lvl="0"/>
+            <a:r>
+              <a:rPr/>
+              <a:t>Promotion directly reduces waste management costs by -387 units</a:t>
+            </a:r>
+          </a:p>
+          <a:p>
+            <a:pPr lvl="0"/>
+            <a:r>
+              <a:rPr/>
+              <a:t>Promotion directly reduces waste management costs</a:t>
+            </a:r>
+          </a:p>
+          <a:p>
+            <a:pPr lvl="0"/>
+            <a:r>
+              <a:rPr/>
+              <a:t>This is the policy-relevant effect of offering promotion</a:t>
+            </a:r>
+          </a:p>
+          <a:p>
+            <a:pPr lvl="0"/>
+            <a:r>
+              <a:rPr/>
+              <a:t>But this underestimates the effect on those who actually enroll</a:t>
+            </a:r>
+          </a:p>
+        </p:txBody>
+      </p:sp>
+      <p:graphicFrame>
+        <p:nvGraphicFramePr>
+          <p:cNvPr id="6" name="Content Placeholder 5"/>
+          <p:cNvGraphicFramePr>
+            <a:graphicFrameLocks noGrp="1"/>
+          </p:cNvGraphicFramePr>
+          <p:nvPr>
+            <p:ph idx="1"/>
+          </p:nvPr>
+        </p:nvGraphicFramePr>
+        <p:xfrm>
+          <a:off x="4648200" y="1193800"/>
+          <a:ext cx="4038600" cy="3390900"/>
+        </p:xfrm>
+        <a:graphic>
+          <a:graphicData uri="http://schemas.openxmlformats.org/drawingml/2006/table">
+            <a:tbl>
+              <a:tblPr firstRow="1" bandRow="1">
+                <a:tableStyleId>{5C22544A-7EE6-4342-B048-85BDC9FD1C3A}</a:tableStyleId>
+              </a:tblPr>
+              <a:tblGrid>
+                <a:gridCol w="1346200"/>
+                <a:gridCol w="1346200"/>
+                <a:gridCol w="1346200"/>
+              </a:tblGrid>
+              <a:tr h="0">
+                <a:tc>
+                  <a:txBody>
+                    <a:bodyPr/>
+                    <a:lstStyle/>
+                    <a:p>
+                      <a:endParaRPr/>
+                    </a:p>
+                  </a:txBody>
+                  <a:tcPr/>
+                </a:tc>
+                <a:tc>
+                  <a:txBody>
+                    <a:bodyPr/>
+                    <a:lstStyle/>
+                    <a:p>
+                      <a:pPr lvl="0" indent="0" marL="0" algn="ctr">
+                        <a:buNone/>
+                      </a:pPr>
+                      <a:r>
+                        <a:rPr/>
+                        <a:t>No covariate adj.</a:t>
+                      </a:r>
+                    </a:p>
+                  </a:txBody>
+                  <a:tcPr/>
+                </a:tc>
+                <a:tc>
+                  <a:txBody>
+                    <a:bodyPr/>
+                    <a:lstStyle/>
+                    <a:p>
+                      <a:pPr lvl="0" indent="0" marL="0" algn="ctr">
+                        <a:buNone/>
+                      </a:pPr>
+                      <a:r>
+                        <a:rPr/>
+                        <a:t>With covariate adj.</a:t>
+                      </a:r>
+                    </a:p>
+                  </a:txBody>
+                  <a:tcPr/>
+                </a:tc>
+              </a:tr>
+              <a:tr h="0">
+                <a:tc>
+                  <a:txBody>
+                    <a:bodyPr/>
+                    <a:lstStyle/>
+                    <a:p>
+                      <a:pPr lvl="0" indent="0" marL="0" algn="l">
+                        <a:buNone/>
+                      </a:pPr>
+                      <a:r>
+                        <a:rPr/>
+                        <a:t>(Intercept)</a:t>
+                      </a:r>
+                    </a:p>
+                  </a:txBody>
+                </a:tc>
+                <a:tc>
+                  <a:txBody>
+                    <a:bodyPr/>
+                    <a:lstStyle/>
+                    <a:p>
+                      <a:pPr lvl="0" indent="0" marL="0" algn="ctr">
+                        <a:buNone/>
+                      </a:pPr>
+                      <a:r>
+                        <a:rPr/>
+                        <a:t>1884.538***</a:t>
+                      </a:r>
+                    </a:p>
+                  </a:txBody>
+                </a:tc>
+                <a:tc>
+                  <a:txBody>
+                    <a:bodyPr/>
+                    <a:lstStyle/>
+                    <a:p>
+                      <a:pPr lvl="0" indent="0" marL="0" algn="ctr">
+                        <a:buNone/>
+                      </a:pPr>
+                      <a:r>
+                        <a:rPr/>
+                        <a:t>2948.054***</a:t>
+                      </a:r>
+                    </a:p>
+                  </a:txBody>
+                </a:tc>
+              </a:tr>
+              <a:tr h="0">
+                <a:tc>
+                  <a:txBody>
+                    <a:bodyPr/>
+                    <a:lstStyle/>
+                    <a:p>
+                      <a:endParaRPr/>
+                    </a:p>
+                  </a:txBody>
+                </a:tc>
+                <a:tc>
+                  <a:txBody>
+                    <a:bodyPr/>
+                    <a:lstStyle/>
+                    <a:p>
+                      <a:pPr lvl="0" indent="0" marL="0" algn="ctr">
+                        <a:buNone/>
+                      </a:pPr>
+                      <a:r>
+                        <a:rPr/>
+                        <a:t>(48.382)</a:t>
+                      </a:r>
+                    </a:p>
+                  </a:txBody>
+                </a:tc>
+                <a:tc>
+                  <a:txBody>
+                    <a:bodyPr/>
+                    <a:lstStyle/>
+                    <a:p>
+                      <a:pPr lvl="0" indent="0" marL="0" algn="ctr">
+                        <a:buNone/>
+                      </a:pPr>
+                      <a:r>
+                        <a:rPr/>
+                        <a:t>(71.439)</a:t>
+                      </a:r>
+                    </a:p>
+                  </a:txBody>
+                </a:tc>
+              </a:tr>
+              <a:tr h="0">
+                <a:tc>
+                  <a:txBody>
+                    <a:bodyPr/>
+                    <a:lstStyle/>
+                    <a:p>
+                      <a:pPr lvl="0" indent="0" marL="0" algn="l">
+                        <a:buNone/>
+                      </a:pPr>
+                      <a:r>
+                        <a:rPr/>
+                        <a:t>promotion_zone</a:t>
+                      </a:r>
+                    </a:p>
+                  </a:txBody>
+                </a:tc>
+                <a:tc>
+                  <a:txBody>
+                    <a:bodyPr/>
+                    <a:lstStyle/>
+                    <a:p>
+                      <a:pPr lvl="0" indent="0" marL="0" algn="ctr">
+                        <a:buNone/>
+                      </a:pPr>
+                      <a:r>
+                        <a:rPr/>
+                        <a:t>−387.386***</a:t>
+                      </a:r>
+                    </a:p>
+                  </a:txBody>
+                </a:tc>
+                <a:tc>
+                  <a:txBody>
+                    <a:bodyPr/>
+                    <a:lstStyle/>
+                    <a:p>
+                      <a:pPr lvl="0" indent="0" marL="0" algn="ctr">
+                        <a:buNone/>
+                      </a:pPr>
+                      <a:r>
+                        <a:rPr/>
+                        <a:t>−402.509***</a:t>
+                      </a:r>
+                    </a:p>
+                  </a:txBody>
+                </a:tc>
+              </a:tr>
+              <a:tr h="0">
+                <a:tc>
+                  <a:txBody>
+                    <a:bodyPr/>
+                    <a:lstStyle/>
+                    <a:p>
+                      <a:endParaRPr/>
+                    </a:p>
+                  </a:txBody>
+                </a:tc>
+                <a:tc>
+                  <a:txBody>
+                    <a:bodyPr/>
+                    <a:lstStyle/>
+                    <a:p>
+                      <a:pPr lvl="0" indent="0" marL="0" algn="ctr">
+                        <a:buNone/>
+                      </a:pPr>
+                      <a:r>
+                        <a:rPr/>
+                        <a:t>(63.733)</a:t>
+                      </a:r>
+                    </a:p>
+                  </a:txBody>
+                </a:tc>
+                <a:tc>
+                  <a:txBody>
+                    <a:bodyPr/>
+                    <a:lstStyle/>
+                    <a:p>
+                      <a:pPr lvl="0" indent="0" marL="0" algn="ctr">
+                        <a:buNone/>
+                      </a:pPr>
+                      <a:r>
+                        <a:rPr/>
+                        <a:t>(52.253)</a:t>
+                      </a:r>
+                    </a:p>
+                  </a:txBody>
+                </a:tc>
+              </a:tr>
+              <a:tr h="0">
+                <a:tc>
+                  <a:txBody>
+                    <a:bodyPr/>
+                    <a:lstStyle/>
+                    <a:p>
+                      <a:pPr lvl="0" indent="0" marL="0" algn="l">
+                        <a:buNone/>
+                      </a:pPr>
+                      <a:r>
+                        <a:rPr/>
+                        <a:t>age_manager</a:t>
+                      </a:r>
+                    </a:p>
+                  </a:txBody>
+                </a:tc>
+                <a:tc>
+                  <a:txBody>
+                    <a:bodyPr/>
+                    <a:lstStyle/>
+                    <a:p>
+                      <a:endParaRPr/>
+                    </a:p>
+                  </a:txBody>
+                </a:tc>
+                <a:tc>
+                  <a:txBody>
+                    <a:bodyPr/>
+                    <a:lstStyle/>
+                    <a:p>
+                      <a:pPr lvl="0" indent="0" marL="0" algn="ctr">
+                        <a:buNone/>
+                      </a:pPr>
+                      <a:r>
+                        <a:rPr/>
+                        <a:t>10.505***</a:t>
+                      </a:r>
+                    </a:p>
+                  </a:txBody>
+                </a:tc>
+              </a:tr>
+              <a:tr h="0">
+                <a:tc>
+                  <a:txBody>
+                    <a:bodyPr/>
+                    <a:lstStyle/>
+                    <a:p>
+                      <a:endParaRPr/>
+                    </a:p>
+                  </a:txBody>
+                </a:tc>
+                <a:tc>
+                  <a:txBody>
+                    <a:bodyPr/>
+                    <a:lstStyle/>
+                    <a:p>
+                      <a:endParaRPr/>
+                    </a:p>
+                  </a:txBody>
+                </a:tc>
+                <a:tc>
+                  <a:txBody>
+                    <a:bodyPr/>
+                    <a:lstStyle/>
+                    <a:p>
+                      <a:pPr lvl="0" indent="0" marL="0" algn="ctr">
+                        <a:buNone/>
+                      </a:pPr>
+                      <a:r>
+                        <a:rPr/>
+                        <a:t>(1.535)</a:t>
+                      </a:r>
+                    </a:p>
+                  </a:txBody>
+                </a:tc>
+              </a:tr>
+              <a:tr h="0">
+                <a:tc>
+                  <a:txBody>
+                    <a:bodyPr/>
+                    <a:lstStyle/>
+                    <a:p>
+                      <a:pPr lvl="0" indent="0" marL="0" algn="l">
+                        <a:buNone/>
+                      </a:pPr>
+                      <a:r>
+                        <a:rPr/>
+                        <a:t>age_deputy</a:t>
+                      </a:r>
+                    </a:p>
+                  </a:txBody>
+                </a:tc>
+                <a:tc>
+                  <a:txBody>
+                    <a:bodyPr/>
+                    <a:lstStyle/>
+                    <a:p>
+                      <a:endParaRPr/>
+                    </a:p>
+                  </a:txBody>
+                </a:tc>
+                <a:tc>
+                  <a:txBody>
+                    <a:bodyPr/>
+                    <a:lstStyle/>
+                    <a:p>
+                      <a:pPr lvl="0" indent="0" marL="0" algn="ctr">
+                        <a:buNone/>
+                      </a:pPr>
+                      <a:r>
+                        <a:rPr/>
+                        <a:t>0.461</a:t>
+                      </a:r>
+                    </a:p>
+                  </a:txBody>
+                </a:tc>
+              </a:tr>
+              <a:tr h="0">
+                <a:tc>
+                  <a:txBody>
+                    <a:bodyPr/>
+                    <a:lstStyle/>
+                    <a:p>
+                      <a:endParaRPr/>
+                    </a:p>
+                  </a:txBody>
+                </a:tc>
+                <a:tc>
+                  <a:txBody>
+                    <a:bodyPr/>
+                    <a:lstStyle/>
+                    <a:p>
+                      <a:endParaRPr/>
+                    </a:p>
+                  </a:txBody>
+                </a:tc>
+                <a:tc>
+                  <a:txBody>
+                    <a:bodyPr/>
+                    <a:lstStyle/>
+                    <a:p>
+                      <a:pPr lvl="0" indent="0" marL="0" algn="ctr">
+                        <a:buNone/>
+                      </a:pPr>
+                      <a:r>
+                        <a:rPr/>
+                        <a:t>(1.691)</a:t>
+                      </a:r>
+                    </a:p>
+                  </a:txBody>
+                </a:tc>
+              </a:tr>
+              <a:tr h="0">
+                <a:tc>
+                  <a:txBody>
+                    <a:bodyPr/>
+                    <a:lstStyle/>
+                    <a:p>
+                      <a:pPr lvl="0" indent="0" marL="0" algn="l">
+                        <a:buNone/>
+                      </a:pPr>
+                      <a:r>
+                        <a:rPr/>
+                        <a:t>female_manager</a:t>
+                      </a:r>
+                    </a:p>
+                  </a:txBody>
+                </a:tc>
+                <a:tc>
+                  <a:txBody>
+                    <a:bodyPr/>
+                    <a:lstStyle/>
+                    <a:p>
+                      <a:endParaRPr/>
+                    </a:p>
+                  </a:txBody>
+                </a:tc>
+                <a:tc>
+                  <a:txBody>
+                    <a:bodyPr/>
+                    <a:lstStyle/>
+                    <a:p>
+                      <a:pPr lvl="0" indent="0" marL="0" algn="ctr">
+                        <a:buNone/>
+                      </a:pPr>
+                      <a:r>
+                        <a:rPr/>
+                        <a:t>92.953+</a:t>
+                      </a:r>
+                    </a:p>
+                  </a:txBody>
+                </a:tc>
+              </a:tr>
+              <a:tr h="0">
+                <a:tc>
+                  <a:txBody>
+                    <a:bodyPr/>
+                    <a:lstStyle/>
+                    <a:p>
+                      <a:endParaRPr/>
+                    </a:p>
+                  </a:txBody>
+                </a:tc>
+                <a:tc>
+                  <a:txBody>
+                    <a:bodyPr/>
+                    <a:lstStyle/>
+                    <a:p>
+                      <a:endParaRPr/>
+                    </a:p>
+                  </a:txBody>
+                </a:tc>
+                <a:tc>
+                  <a:txBody>
+                    <a:bodyPr/>
+                    <a:lstStyle/>
+                    <a:p>
+                      <a:pPr lvl="0" indent="0" marL="0" algn="ctr">
+                        <a:buNone/>
+                      </a:pPr>
+                      <a:r>
+                        <a:rPr/>
+                        <a:t>(48.965)</a:t>
+                      </a:r>
+                    </a:p>
+                  </a:txBody>
+                </a:tc>
+              </a:tr>
+              <a:tr h="0">
+                <a:tc>
+                  <a:txBody>
+                    <a:bodyPr/>
+                    <a:lstStyle/>
+                    <a:p>
+                      <a:pPr lvl="0" indent="0" marL="0" algn="l">
+                        <a:buNone/>
+                      </a:pPr>
+                      <a:r>
+                        <a:rPr/>
+                        <a:t>foreign_owned</a:t>
+                      </a:r>
+                    </a:p>
+                  </a:txBody>
+                </a:tc>
+                <a:tc>
+                  <a:txBody>
+                    <a:bodyPr/>
+                    <a:lstStyle/>
+                    <a:p>
+                      <a:endParaRPr/>
+                    </a:p>
+                  </a:txBody>
+                </a:tc>
+                <a:tc>
+                  <a:txBody>
+                    <a:bodyPr/>
+                    <a:lstStyle/>
+                    <a:p>
+                      <a:pPr lvl="0" indent="0" marL="0" algn="ctr">
+                        <a:buNone/>
+                      </a:pPr>
+                      <a:r>
+                        <a:rPr/>
+                        <a:t>−317.771***</a:t>
+                      </a:r>
+                    </a:p>
+                  </a:txBody>
+                </a:tc>
+              </a:tr>
+              <a:tr h="0">
+                <a:tc>
+                  <a:txBody>
+                    <a:bodyPr/>
+                    <a:lstStyle/>
+                    <a:p>
+                      <a:endParaRPr/>
+                    </a:p>
+                  </a:txBody>
+                </a:tc>
+                <a:tc>
+                  <a:txBody>
+                    <a:bodyPr/>
+                    <a:lstStyle/>
+                    <a:p>
+                      <a:endParaRPr/>
+                    </a:p>
+                  </a:txBody>
+                </a:tc>
+                <a:tc>
+                  <a:txBody>
+                    <a:bodyPr/>
+                    <a:lstStyle/>
+                    <a:p>
+                      <a:pPr lvl="0" indent="0" marL="0" algn="ctr">
+                        <a:buNone/>
+                      </a:pPr>
+                      <a:r>
+                        <a:rPr/>
+                        <a:t>(47.308)</a:t>
+                      </a:r>
+                    </a:p>
+                  </a:txBody>
+                </a:tc>
+              </a:tr>
+              <a:tr h="0">
+                <a:tc>
+                  <a:txBody>
+                    <a:bodyPr/>
+                    <a:lstStyle/>
+                    <a:p>
+                      <a:pPr lvl="0" indent="0" marL="0" algn="l">
+                        <a:buNone/>
+                      </a:pPr>
+                      <a:r>
+                        <a:rPr/>
+                        <a:t>staff_size</a:t>
+                      </a:r>
+                    </a:p>
+                  </a:txBody>
+                </a:tc>
+                <a:tc>
+                  <a:txBody>
+                    <a:bodyPr/>
+                    <a:lstStyle/>
+                    <a:p>
+                      <a:endParaRPr/>
+                    </a:p>
+                  </a:txBody>
+                </a:tc>
+                <a:tc>
+                  <a:txBody>
+                    <a:bodyPr/>
+                    <a:lstStyle/>
+                    <a:p>
+                      <a:pPr lvl="0" indent="0" marL="0" algn="ctr">
+                        <a:buNone/>
+                      </a:pPr>
+                      <a:r>
+                        <a:rPr/>
+                        <a:t>−238.508***</a:t>
+                      </a:r>
+                    </a:p>
+                  </a:txBody>
+                </a:tc>
+              </a:tr>
+              <a:tr h="0">
+                <a:tc>
+                  <a:txBody>
+                    <a:bodyPr/>
+                    <a:lstStyle/>
+                    <a:p>
+                      <a:endParaRPr/>
+                    </a:p>
+                  </a:txBody>
+                </a:tc>
+                <a:tc>
+                  <a:txBody>
+                    <a:bodyPr/>
+                    <a:lstStyle/>
+                    <a:p>
+                      <a:endParaRPr/>
+                    </a:p>
+                  </a:txBody>
+                </a:tc>
+                <a:tc>
+                  <a:txBody>
+                    <a:bodyPr/>
+                    <a:lstStyle/>
+                    <a:p>
+                      <a:pPr lvl="0" indent="0" marL="0" algn="ctr">
+                        <a:buNone/>
+                      </a:pPr>
+                      <a:r>
+                        <a:rPr/>
+                        <a:t>(7.040)</a:t>
+                      </a:r>
+                    </a:p>
+                  </a:txBody>
+                </a:tc>
+              </a:tr>
+              <a:tr h="0">
+                <a:tc>
+                  <a:txBody>
+                    <a:bodyPr/>
+                    <a:lstStyle/>
+                    <a:p>
+                      <a:pPr lvl="0" indent="0" marL="0" algn="l">
+                        <a:buNone/>
+                      </a:pPr>
+                      <a:r>
+                        <a:rPr/>
+                        <a:t>advanced_filtration</a:t>
+                      </a:r>
+                    </a:p>
+                  </a:txBody>
+                </a:tc>
+                <a:tc>
+                  <a:txBody>
+                    <a:bodyPr/>
+                    <a:lstStyle/>
+                    <a:p>
+                      <a:endParaRPr/>
+                    </a:p>
+                  </a:txBody>
+                </a:tc>
+                <a:tc>
+                  <a:txBody>
+                    <a:bodyPr/>
+                    <a:lstStyle/>
+                    <a:p>
+                      <a:pPr lvl="0" indent="0" marL="0" algn="ctr">
+                        <a:buNone/>
+                      </a:pPr>
+                      <a:r>
+                        <a:rPr/>
+                        <a:t>−323.317***</a:t>
+                      </a:r>
+                    </a:p>
+                  </a:txBody>
+                </a:tc>
+              </a:tr>
+              <a:tr h="0">
+                <a:tc>
+                  <a:txBody>
+                    <a:bodyPr/>
+                    <a:lstStyle/>
+                    <a:p>
+                      <a:endParaRPr/>
+                    </a:p>
+                  </a:txBody>
+                </a:tc>
+                <a:tc>
+                  <a:txBody>
+                    <a:bodyPr/>
+                    <a:lstStyle/>
+                    <a:p>
+                      <a:endParaRPr/>
+                    </a:p>
+                  </a:txBody>
+                </a:tc>
+                <a:tc>
+                  <a:txBody>
+                    <a:bodyPr/>
+                    <a:lstStyle/>
+                    <a:p>
+                      <a:pPr lvl="0" indent="0" marL="0" algn="ctr">
+                        <a:buNone/>
+                      </a:pPr>
+                      <a:r>
+                        <a:rPr/>
+                        <a:t>(31.162)</a:t>
+                      </a:r>
+                    </a:p>
+                  </a:txBody>
+                </a:tc>
+              </a:tr>
+              <a:tr h="0">
+                <a:tc>
+                  <a:txBody>
+                    <a:bodyPr/>
+                    <a:lstStyle/>
+                    <a:p>
+                      <a:pPr lvl="0" indent="0" marL="0" algn="l">
+                        <a:buNone/>
+                      </a:pPr>
+                      <a:r>
+                        <a:rPr/>
+                        <a:t>facility_area</a:t>
+                      </a:r>
+                    </a:p>
+                  </a:txBody>
+                </a:tc>
+                <a:tc>
+                  <a:txBody>
+                    <a:bodyPr/>
+                    <a:lstStyle/>
+                    <a:p>
+                      <a:endParaRPr/>
+                    </a:p>
+                  </a:txBody>
+                </a:tc>
+                <a:tc>
+                  <a:txBody>
+                    <a:bodyPr/>
+                    <a:lstStyle/>
+                    <a:p>
+                      <a:pPr lvl="0" indent="0" marL="0" algn="ctr">
+                        <a:buNone/>
+                      </a:pPr>
+                      <a:r>
+                        <a:rPr/>
+                        <a:t>15.568**</a:t>
+                      </a:r>
+                    </a:p>
+                  </a:txBody>
+                </a:tc>
+              </a:tr>
+              <a:tr h="0">
+                <a:tc>
+                  <a:txBody>
+                    <a:bodyPr/>
+                    <a:lstStyle/>
+                    <a:p>
+                      <a:endParaRPr/>
+                    </a:p>
+                  </a:txBody>
+                </a:tc>
+                <a:tc>
+                  <a:txBody>
+                    <a:bodyPr/>
+                    <a:lstStyle/>
+                    <a:p>
+                      <a:endParaRPr/>
+                    </a:p>
+                  </a:txBody>
+                </a:tc>
+                <a:tc>
+                  <a:txBody>
+                    <a:bodyPr/>
+                    <a:lstStyle/>
+                    <a:p>
+                      <a:pPr lvl="0" indent="0" marL="0" algn="ctr">
+                        <a:buNone/>
+                      </a:pPr>
+                      <a:r>
+                        <a:rPr/>
+                        <a:t>(4.790)</a:t>
+                      </a:r>
+                    </a:p>
+                  </a:txBody>
+                </a:tc>
+              </a:tr>
+              <a:tr h="0">
+                <a:tc>
+                  <a:txBody>
+                    <a:bodyPr/>
+                    <a:lstStyle/>
+                    <a:p>
+                      <a:pPr lvl="0" indent="0" marL="0" algn="l">
+                        <a:buNone/>
+                      </a:pPr>
+                      <a:r>
+                        <a:rPr/>
+                        <a:t>recycling_center_distance</a:t>
+                      </a:r>
+                    </a:p>
+                  </a:txBody>
+                </a:tc>
+                <a:tc>
+                  <a:txBody>
+                    <a:bodyPr/>
+                    <a:lstStyle/>
+                    <a:p>
+                      <a:endParaRPr/>
+                    </a:p>
+                  </a:txBody>
+                </a:tc>
+                <a:tc>
+                  <a:txBody>
+                    <a:bodyPr/>
+                    <a:lstStyle/>
+                    <a:p>
+                      <a:pPr lvl="0" indent="0" marL="0" algn="ctr">
+                        <a:buNone/>
+                      </a:pPr>
+                      <a:r>
+                        <a:rPr/>
+                        <a:t>−0.658</a:t>
+                      </a:r>
+                    </a:p>
+                  </a:txBody>
+                </a:tc>
+              </a:tr>
+              <a:tr h="0">
+                <a:tc>
+                  <a:txBody>
+                    <a:bodyPr/>
+                    <a:lstStyle/>
+                    <a:p>
+                      <a:endParaRPr/>
+                    </a:p>
+                  </a:txBody>
+                </a:tc>
+                <a:tc>
+                  <a:txBody>
+                    <a:bodyPr/>
+                    <a:lstStyle/>
+                    <a:p>
+                      <a:endParaRPr/>
+                    </a:p>
+                  </a:txBody>
+                </a:tc>
+                <a:tc>
+                  <a:txBody>
+                    <a:bodyPr/>
+                    <a:lstStyle/>
+                    <a:p>
+                      <a:pPr lvl="0" indent="0" marL="0" algn="ctr">
+                        <a:buNone/>
+                      </a:pPr>
+                      <a:r>
+                        <a:rPr/>
+                        <a:t>(0.526)</a:t>
+                      </a:r>
+                    </a:p>
+                  </a:txBody>
+                </a:tc>
+              </a:tr>
+              <a:tr h="0">
+                <a:tc>
+                  <a:txBody>
+                    <a:bodyPr/>
+                    <a:lstStyle/>
+                    <a:p>
+                      <a:pPr lvl="0" indent="0" marL="0" algn="l">
+                        <a:buNone/>
+                      </a:pPr>
+                      <a:r>
+                        <a:rPr/>
+                        <a:t>Num.Obs.</a:t>
+                      </a:r>
+                    </a:p>
+                  </a:txBody>
+                </a:tc>
+                <a:tc>
+                  <a:txBody>
+                    <a:bodyPr/>
+                    <a:lstStyle/>
+                    <a:p>
+                      <a:pPr lvl="0" indent="0" marL="0" algn="ctr">
+                        <a:buNone/>
+                      </a:pPr>
+                      <a:r>
+                        <a:rPr/>
+                        <a:t>9914</a:t>
+                      </a:r>
+                    </a:p>
+                  </a:txBody>
+                </a:tc>
+                <a:tc>
+                  <a:txBody>
+                    <a:bodyPr/>
+                    <a:lstStyle/>
+                    <a:p>
+                      <a:pPr lvl="0" indent="0" marL="0" algn="ctr">
+                        <a:buNone/>
+                      </a:pPr>
+                      <a:r>
+                        <a:rPr/>
+                        <a:t>9914</a:t>
+                      </a:r>
+                    </a:p>
+                  </a:txBody>
+                </a:tc>
+              </a:tr>
+              <a:tr h="0">
+                <a:tc>
+                  <a:txBody>
+                    <a:bodyPr/>
+                    <a:lstStyle/>
+                    <a:p>
+                      <a:pPr lvl="0" indent="0" marL="0" algn="l">
+                        <a:buNone/>
+                      </a:pPr>
+                      <a:r>
+                        <a:rPr/>
+                        <a:t>R2</a:t>
+                      </a:r>
+                    </a:p>
+                  </a:txBody>
+                </a:tc>
+                <a:tc>
+                  <a:txBody>
+                    <a:bodyPr/>
+                    <a:lstStyle/>
+                    <a:p>
+                      <a:pPr lvl="0" indent="0" marL="0" algn="ctr">
+                        <a:buNone/>
+                      </a:pPr>
+                      <a:r>
+                        <a:rPr/>
+                        <a:t>0.027</a:t>
+                      </a:r>
+                    </a:p>
+                  </a:txBody>
+                </a:tc>
+                <a:tc>
+                  <a:txBody>
+                    <a:bodyPr/>
+                    <a:lstStyle/>
+                    <a:p>
+                      <a:pPr lvl="0" indent="0" marL="0" algn="ctr">
+                        <a:buNone/>
+                      </a:pPr>
+                      <a:r>
+                        <a:rPr/>
+                        <a:t>0.304</a:t>
+                      </a:r>
+                    </a:p>
+                  </a:txBody>
+                </a:tc>
+              </a:tr>
+              <a:tr h="0">
+                <a:tc>
+                  <a:txBody>
+                    <a:bodyPr/>
+                    <a:lstStyle/>
+                    <a:p>
+                      <a:pPr lvl="0" indent="0" marL="0" algn="l">
+                        <a:buNone/>
+                      </a:pPr>
+                      <a:r>
+                        <a:rPr/>
+                        <a:t>R2 Adj.</a:t>
+                      </a:r>
+                    </a:p>
+                  </a:txBody>
+                </a:tc>
+                <a:tc>
+                  <a:txBody>
+                    <a:bodyPr/>
+                    <a:lstStyle/>
+                    <a:p>
+                      <a:pPr lvl="0" indent="0" marL="0" algn="ctr">
+                        <a:buNone/>
+                      </a:pPr>
+                      <a:r>
+                        <a:rPr/>
+                        <a:t>0.026</a:t>
+                      </a:r>
+                    </a:p>
+                  </a:txBody>
+                </a:tc>
+                <a:tc>
+                  <a:txBody>
+                    <a:bodyPr/>
+                    <a:lstStyle/>
+                    <a:p>
+                      <a:pPr lvl="0" indent="0" marL="0" algn="ctr">
+                        <a:buNone/>
+                      </a:pPr>
+                      <a:r>
+                        <a:rPr/>
+                        <a:t>0.304</a:t>
+                      </a:r>
+                    </a:p>
+                  </a:txBody>
+                </a:tc>
+              </a:tr>
+              <a:tr h="0">
+                <a:tc>
+                  <a:txBody>
+                    <a:bodyPr/>
+                    <a:lstStyle/>
+                    <a:p>
+                      <a:pPr lvl="0" indent="0" marL="0" algn="l">
+                        <a:buNone/>
+                      </a:pPr>
+                      <a:r>
+                        <a:rPr/>
+                        <a:t> + p &lt; 0.1, * p &lt; 0.05, ** p &lt; 0.01, *** p &lt; 0.001</a:t>
+                      </a:r>
+                    </a:p>
+                  </a:txBody>
+                </a:tc>
+                <a:tc>
+                  <a:txBody>
+                    <a:bodyPr/>
+                    <a:lstStyle/>
+                    <a:p>
+                      <a:endParaRPr/>
                     </a:p>
                   </a:txBody>
                 </a:tc>
@@ -7558,3956 +10737,6 @@
 </p:sld>
 </file>
 
-<file path=ppt/slides/slide6.xml><?xml version="1.0" encoding="utf-8"?>
-<p:sld xmlns:a="http://schemas.openxmlformats.org/drawingml/2006/main" xmlns:r="http://schemas.openxmlformats.org/officeDocument/2006/relationships" xmlns:p="http://schemas.openxmlformats.org/presentationml/2006/main">
-  <p:cSld>
-    <p:spTree>
-      <p:nvGrpSpPr>
-        <p:cNvPr id="1" name=""/>
-        <p:cNvGrpSpPr/>
-        <p:nvPr/>
-      </p:nvGrpSpPr>
-      <p:grpSpPr>
-        <a:xfrm>
-          <a:off x="0" y="0"/>
-          <a:ext cx="0" cy="0"/>
-          <a:chOff x="0" y="0"/>
-          <a:chExt cx="0" cy="0"/>
-        </a:xfrm>
-      </p:grpSpPr>
-      <p:sp>
-        <p:nvSpPr>
-          <p:cNvPr id="2" name="Title 1"/>
-          <p:cNvSpPr>
-            <a:spLocks noGrp="1"/>
-          </p:cNvSpPr>
-          <p:nvPr>
-            <p:ph type="title"/>
-          </p:nvPr>
-        </p:nvSpPr>
-        <p:spPr/>
-        <p:txBody>
-          <a:bodyPr/>
-          <a:lstStyle/>
-          <a:p>
-            <a:pPr lvl="0" indent="0" marL="0">
-              <a:buNone/>
-            </a:pPr>
-            <a:r>
-              <a:rPr/>
-              <a:t>2. Intention-to-Treat (ITT) Effect</a:t>
-            </a:r>
-          </a:p>
-        </p:txBody>
-      </p:sp>
-      <p:sp>
-        <p:nvSpPr>
-          <p:cNvPr id="3" name="Text Placeholder 2"/>
-          <p:cNvSpPr>
-            <a:spLocks noGrp="1"/>
-          </p:cNvSpPr>
-          <p:nvPr>
-            <p:ph idx="1" type="body"/>
-          </p:nvPr>
-        </p:nvSpPr>
-        <p:spPr/>
-        <p:txBody>
-          <a:bodyPr/>
-          <a:lstStyle/>
-          <a:p>
-            <a:pPr lvl="0" indent="0">
-              <a:buNone/>
-            </a:pPr>
-            <a:r>
-              <a:rPr>
-                <a:solidFill>
-                  <a:srgbClr val="5E5E5E"/>
-                </a:solidFill>
-                <a:latin typeface="Courier"/>
-              </a:rPr>
-              <a:t># Estimate ITT effect (reduced form)</a:t>
-            </a:r>
-            <a:br/>
-            <a:r>
-              <a:rPr>
-                <a:solidFill>
-                  <a:srgbClr val="003B4F"/>
-                </a:solidFill>
-                <a:latin typeface="Courier"/>
-              </a:rPr>
-              <a:t>m_itt &lt;- </a:t>
-            </a:r>
-            <a:r>
-              <a:rPr>
-                <a:solidFill>
-                  <a:srgbClr val="4758AB"/>
-                </a:solidFill>
-                <a:latin typeface="Courier"/>
-              </a:rPr>
-              <a:t>lm_robust</a:t>
-            </a:r>
-            <a:r>
-              <a:rPr>
-                <a:solidFill>
-                  <a:srgbClr val="003B4F"/>
-                </a:solidFill>
-                <a:latin typeface="Courier"/>
-              </a:rPr>
-              <a:t>(waste_management_costs </a:t>
-            </a:r>
-            <a:r>
-              <a:rPr>
-                <a:solidFill>
-                  <a:srgbClr val="5E5E5E"/>
-                </a:solidFill>
-                <a:latin typeface="Courier"/>
-              </a:rPr>
-              <a:t>~</a:t>
-            </a:r>
-            <a:r>
-              <a:rPr>
-                <a:solidFill>
-                  <a:srgbClr val="003B4F"/>
-                </a:solidFill>
-                <a:latin typeface="Courier"/>
-              </a:rPr>
-              <a:t> promotion_zone,</a:t>
-            </a:r>
-            <a:br/>
-            <a:r>
-              <a:rPr>
-                <a:solidFill>
-                  <a:srgbClr val="003B4F"/>
-                </a:solidFill>
-                <a:latin typeface="Courier"/>
-              </a:rPr>
-              <a:t>                   </a:t>
-            </a:r>
-            <a:r>
-              <a:rPr>
-                <a:solidFill>
-                  <a:srgbClr val="657422"/>
-                </a:solidFill>
-                <a:latin typeface="Courier"/>
-              </a:rPr>
-              <a:t>clusters =</a:t>
-            </a:r>
-            <a:r>
-              <a:rPr>
-                <a:solidFill>
-                  <a:srgbClr val="003B4F"/>
-                </a:solidFill>
-                <a:latin typeface="Courier"/>
-              </a:rPr>
-              <a:t> zone_identifier,</a:t>
-            </a:r>
-            <a:br/>
-            <a:r>
-              <a:rPr>
-                <a:solidFill>
-                  <a:srgbClr val="003B4F"/>
-                </a:solidFill>
-                <a:latin typeface="Courier"/>
-              </a:rPr>
-              <a:t>                   </a:t>
-            </a:r>
-            <a:r>
-              <a:rPr>
-                <a:solidFill>
-                  <a:srgbClr val="657422"/>
-                </a:solidFill>
-                <a:latin typeface="Courier"/>
-              </a:rPr>
-              <a:t>data =</a:t>
-            </a:r>
-            <a:r>
-              <a:rPr>
-                <a:solidFill>
-                  <a:srgbClr val="003B4F"/>
-                </a:solidFill>
-                <a:latin typeface="Courier"/>
-              </a:rPr>
-              <a:t> df </a:t>
-            </a:r>
-            <a:r>
-              <a:rPr>
-                <a:solidFill>
-                  <a:srgbClr val="5E5E5E"/>
-                </a:solidFill>
-                <a:latin typeface="Courier"/>
-              </a:rPr>
-              <a:t>%&gt;%</a:t>
-            </a:r>
-            <a:r>
-              <a:rPr>
-                <a:solidFill>
-                  <a:srgbClr val="003B4F"/>
-                </a:solidFill>
-                <a:latin typeface="Courier"/>
-              </a:rPr>
-              <a:t> </a:t>
-            </a:r>
-            <a:r>
-              <a:rPr>
-                <a:solidFill>
-                  <a:srgbClr val="4758AB"/>
-                </a:solidFill>
-                <a:latin typeface="Courier"/>
-              </a:rPr>
-              <a:t>filter</a:t>
-            </a:r>
-            <a:r>
-              <a:rPr>
-                <a:solidFill>
-                  <a:srgbClr val="003B4F"/>
-                </a:solidFill>
-                <a:latin typeface="Courier"/>
-              </a:rPr>
-              <a:t>(round </a:t>
-            </a:r>
-            <a:r>
-              <a:rPr>
-                <a:solidFill>
-                  <a:srgbClr val="5E5E5E"/>
-                </a:solidFill>
-                <a:latin typeface="Courier"/>
-              </a:rPr>
-              <a:t>==</a:t>
-            </a:r>
-            <a:r>
-              <a:rPr>
-                <a:solidFill>
-                  <a:srgbClr val="003B4F"/>
-                </a:solidFill>
-                <a:latin typeface="Courier"/>
-              </a:rPr>
-              <a:t> </a:t>
-            </a:r>
-            <a:r>
-              <a:rPr>
-                <a:solidFill>
-                  <a:srgbClr val="AD0000"/>
-                </a:solidFill>
-                <a:latin typeface="Courier"/>
-              </a:rPr>
-              <a:t>1</a:t>
-            </a:r>
-            <a:r>
-              <a:rPr>
-                <a:solidFill>
-                  <a:srgbClr val="003B4F"/>
-                </a:solidFill>
-                <a:latin typeface="Courier"/>
-              </a:rPr>
-              <a:t>))</a:t>
-            </a:r>
-            <a:br/>
-            <a:br/>
-            <a:r>
-              <a:rPr>
-                <a:solidFill>
-                  <a:srgbClr val="5E5E5E"/>
-                </a:solidFill>
-                <a:latin typeface="Courier"/>
-              </a:rPr>
-              <a:t># With covariate adjustment</a:t>
-            </a:r>
-            <a:br/>
-            <a:r>
-              <a:rPr>
-                <a:solidFill>
-                  <a:srgbClr val="003B4F"/>
-                </a:solidFill>
-                <a:latin typeface="Courier"/>
-              </a:rPr>
-              <a:t>m_itt_wcov &lt;- </a:t>
-            </a:r>
-            <a:r>
-              <a:rPr>
-                <a:solidFill>
-                  <a:srgbClr val="4758AB"/>
-                </a:solidFill>
-                <a:latin typeface="Courier"/>
-              </a:rPr>
-              <a:t>lm_robust</a:t>
-            </a:r>
-            <a:r>
-              <a:rPr>
-                <a:solidFill>
-                  <a:srgbClr val="003B4F"/>
-                </a:solidFill>
-                <a:latin typeface="Courier"/>
-              </a:rPr>
-              <a:t>(waste_management_costs </a:t>
-            </a:r>
-            <a:r>
-              <a:rPr>
-                <a:solidFill>
-                  <a:srgbClr val="5E5E5E"/>
-                </a:solidFill>
-                <a:latin typeface="Courier"/>
-              </a:rPr>
-              <a:t>~</a:t>
-            </a:r>
-            <a:r>
-              <a:rPr>
-                <a:solidFill>
-                  <a:srgbClr val="003B4F"/>
-                </a:solidFill>
-                <a:latin typeface="Courier"/>
-              </a:rPr>
-              <a:t> promotion_zone </a:t>
-            </a:r>
-            <a:r>
-              <a:rPr>
-                <a:solidFill>
-                  <a:srgbClr val="5E5E5E"/>
-                </a:solidFill>
-                <a:latin typeface="Courier"/>
-              </a:rPr>
-              <a:t>+</a:t>
-            </a:r>
-            <a:r>
-              <a:rPr>
-                <a:solidFill>
-                  <a:srgbClr val="003B4F"/>
-                </a:solidFill>
-                <a:latin typeface="Courier"/>
-              </a:rPr>
-              <a:t> </a:t>
-            </a:r>
-            <a:br/>
-            <a:r>
-              <a:rPr>
-                <a:solidFill>
-                  <a:srgbClr val="003B4F"/>
-                </a:solidFill>
-                <a:latin typeface="Courier"/>
-              </a:rPr>
-              <a:t>                        age_manager </a:t>
-            </a:r>
-            <a:r>
-              <a:rPr>
-                <a:solidFill>
-                  <a:srgbClr val="5E5E5E"/>
-                </a:solidFill>
-                <a:latin typeface="Courier"/>
-              </a:rPr>
-              <a:t>+</a:t>
-            </a:r>
-            <a:r>
-              <a:rPr>
-                <a:solidFill>
-                  <a:srgbClr val="003B4F"/>
-                </a:solidFill>
-                <a:latin typeface="Courier"/>
-              </a:rPr>
-              <a:t> age_deputy </a:t>
-            </a:r>
-            <a:r>
-              <a:rPr>
-                <a:solidFill>
-                  <a:srgbClr val="5E5E5E"/>
-                </a:solidFill>
-                <a:latin typeface="Courier"/>
-              </a:rPr>
-              <a:t>+</a:t>
-            </a:r>
-            <a:br/>
-            <a:r>
-              <a:rPr>
-                <a:solidFill>
-                  <a:srgbClr val="003B4F"/>
-                </a:solidFill>
-                <a:latin typeface="Courier"/>
-              </a:rPr>
-              <a:t>                        female_manager </a:t>
-            </a:r>
-            <a:r>
-              <a:rPr>
-                <a:solidFill>
-                  <a:srgbClr val="5E5E5E"/>
-                </a:solidFill>
-                <a:latin typeface="Courier"/>
-              </a:rPr>
-              <a:t>+</a:t>
-            </a:r>
-            <a:r>
-              <a:rPr>
-                <a:solidFill>
-                  <a:srgbClr val="003B4F"/>
-                </a:solidFill>
-                <a:latin typeface="Courier"/>
-              </a:rPr>
-              <a:t> foreign_owned </a:t>
-            </a:r>
-            <a:r>
-              <a:rPr>
-                <a:solidFill>
-                  <a:srgbClr val="5E5E5E"/>
-                </a:solidFill>
-                <a:latin typeface="Courier"/>
-              </a:rPr>
-              <a:t>+</a:t>
-            </a:r>
-            <a:r>
-              <a:rPr>
-                <a:solidFill>
-                  <a:srgbClr val="003B4F"/>
-                </a:solidFill>
-                <a:latin typeface="Courier"/>
-              </a:rPr>
-              <a:t> </a:t>
-            </a:r>
-            <a:br/>
-            <a:r>
-              <a:rPr>
-                <a:solidFill>
-                  <a:srgbClr val="003B4F"/>
-                </a:solidFill>
-                <a:latin typeface="Courier"/>
-              </a:rPr>
-              <a:t>                        staff_size </a:t>
-            </a:r>
-            <a:r>
-              <a:rPr>
-                <a:solidFill>
-                  <a:srgbClr val="5E5E5E"/>
-                </a:solidFill>
-                <a:latin typeface="Courier"/>
-              </a:rPr>
-              <a:t>+</a:t>
-            </a:r>
-            <a:br/>
-            <a:r>
-              <a:rPr>
-                <a:solidFill>
-                  <a:srgbClr val="003B4F"/>
-                </a:solidFill>
-                <a:latin typeface="Courier"/>
-              </a:rPr>
-              <a:t>                        advanced_filtration </a:t>
-            </a:r>
-            <a:r>
-              <a:rPr>
-                <a:solidFill>
-                  <a:srgbClr val="5E5E5E"/>
-                </a:solidFill>
-                <a:latin typeface="Courier"/>
-              </a:rPr>
-              <a:t>+</a:t>
-            </a:r>
-            <a:r>
-              <a:rPr>
-                <a:solidFill>
-                  <a:srgbClr val="003B4F"/>
-                </a:solidFill>
-                <a:latin typeface="Courier"/>
-              </a:rPr>
-              <a:t> </a:t>
-            </a:r>
-            <a:br/>
-            <a:r>
-              <a:rPr>
-                <a:solidFill>
-                  <a:srgbClr val="003B4F"/>
-                </a:solidFill>
-                <a:latin typeface="Courier"/>
-              </a:rPr>
-              <a:t>                        facility_area </a:t>
-            </a:r>
-            <a:r>
-              <a:rPr>
-                <a:solidFill>
-                  <a:srgbClr val="5E5E5E"/>
-                </a:solidFill>
-                <a:latin typeface="Courier"/>
-              </a:rPr>
-              <a:t>+</a:t>
-            </a:r>
-            <a:br/>
-            <a:r>
-              <a:rPr>
-                <a:solidFill>
-                  <a:srgbClr val="003B4F"/>
-                </a:solidFill>
-                <a:latin typeface="Courier"/>
-              </a:rPr>
-              <a:t>                        recycling_center_distance,</a:t>
-            </a:r>
-            <a:br/>
-            <a:r>
-              <a:rPr>
-                <a:solidFill>
-                  <a:srgbClr val="003B4F"/>
-                </a:solidFill>
-                <a:latin typeface="Courier"/>
-              </a:rPr>
-              <a:t>                        </a:t>
-            </a:r>
-            <a:r>
-              <a:rPr>
-                <a:solidFill>
-                  <a:srgbClr val="657422"/>
-                </a:solidFill>
-                <a:latin typeface="Courier"/>
-              </a:rPr>
-              <a:t>clusters =</a:t>
-            </a:r>
-            <a:r>
-              <a:rPr>
-                <a:solidFill>
-                  <a:srgbClr val="003B4F"/>
-                </a:solidFill>
-                <a:latin typeface="Courier"/>
-              </a:rPr>
-              <a:t> zone_identifier,</a:t>
-            </a:r>
-            <a:br/>
-            <a:r>
-              <a:rPr>
-                <a:solidFill>
-                  <a:srgbClr val="003B4F"/>
-                </a:solidFill>
-                <a:latin typeface="Courier"/>
-              </a:rPr>
-              <a:t>                        </a:t>
-            </a:r>
-            <a:r>
-              <a:rPr>
-                <a:solidFill>
-                  <a:srgbClr val="657422"/>
-                </a:solidFill>
-                <a:latin typeface="Courier"/>
-              </a:rPr>
-              <a:t>data =</a:t>
-            </a:r>
-            <a:r>
-              <a:rPr>
-                <a:solidFill>
-                  <a:srgbClr val="003B4F"/>
-                </a:solidFill>
-                <a:latin typeface="Courier"/>
-              </a:rPr>
-              <a:t> df </a:t>
-            </a:r>
-            <a:r>
-              <a:rPr>
-                <a:solidFill>
-                  <a:srgbClr val="5E5E5E"/>
-                </a:solidFill>
-                <a:latin typeface="Courier"/>
-              </a:rPr>
-              <a:t>%&gt;%</a:t>
-            </a:r>
-            <a:r>
-              <a:rPr>
-                <a:solidFill>
-                  <a:srgbClr val="003B4F"/>
-                </a:solidFill>
-                <a:latin typeface="Courier"/>
-              </a:rPr>
-              <a:t> </a:t>
-            </a:r>
-            <a:r>
-              <a:rPr>
-                <a:solidFill>
-                  <a:srgbClr val="4758AB"/>
-                </a:solidFill>
-                <a:latin typeface="Courier"/>
-              </a:rPr>
-              <a:t>filter</a:t>
-            </a:r>
-            <a:r>
-              <a:rPr>
-                <a:solidFill>
-                  <a:srgbClr val="003B4F"/>
-                </a:solidFill>
-                <a:latin typeface="Courier"/>
-              </a:rPr>
-              <a:t>(round </a:t>
-            </a:r>
-            <a:r>
-              <a:rPr>
-                <a:solidFill>
-                  <a:srgbClr val="5E5E5E"/>
-                </a:solidFill>
-                <a:latin typeface="Courier"/>
-              </a:rPr>
-              <a:t>==</a:t>
-            </a:r>
-            <a:r>
-              <a:rPr>
-                <a:solidFill>
-                  <a:srgbClr val="003B4F"/>
-                </a:solidFill>
-                <a:latin typeface="Courier"/>
-              </a:rPr>
-              <a:t> </a:t>
-            </a:r>
-            <a:r>
-              <a:rPr>
-                <a:solidFill>
-                  <a:srgbClr val="AD0000"/>
-                </a:solidFill>
-                <a:latin typeface="Courier"/>
-              </a:rPr>
-              <a:t>1</a:t>
-            </a:r>
-            <a:r>
-              <a:rPr>
-                <a:solidFill>
-                  <a:srgbClr val="003B4F"/>
-                </a:solidFill>
-                <a:latin typeface="Courier"/>
-              </a:rPr>
-              <a:t>))</a:t>
-            </a:r>
-          </a:p>
-          <a:p>
-            <a:pPr lvl="0" indent="0" marL="0">
-              <a:buNone/>
-            </a:pPr>
-            <a:r>
-              <a:rPr b="1"/>
-              <a:t>ITT Results</a:t>
-            </a:r>
-            <a:r>
-              <a:rPr/>
-              <a:t>:</a:t>
-            </a:r>
-          </a:p>
-          <a:p>
-            <a:pPr lvl="0"/>
-            <a:r>
-              <a:rPr/>
-              <a:t>Promotion directly reduces waste management costs by -3874 units</a:t>
-            </a:r>
-          </a:p>
-          <a:p>
-            <a:pPr lvl="0"/>
-            <a:r>
-              <a:rPr/>
-              <a:t>Promotion directly reduces waste management costs</a:t>
-            </a:r>
-          </a:p>
-          <a:p>
-            <a:pPr lvl="0"/>
-            <a:r>
-              <a:rPr/>
-              <a:t>This is the policy-relevant effect of offering promotion</a:t>
-            </a:r>
-          </a:p>
-          <a:p>
-            <a:pPr lvl="0"/>
-            <a:r>
-              <a:rPr/>
-              <a:t>But this underestimates the effect on those who actually enroll</a:t>
-            </a:r>
-          </a:p>
-        </p:txBody>
-      </p:sp>
-      <p:graphicFrame>
-        <p:nvGraphicFramePr>
-          <p:cNvPr id="6" name="Content Placeholder 5"/>
-          <p:cNvGraphicFramePr>
-            <a:graphicFrameLocks noGrp="1"/>
-          </p:cNvGraphicFramePr>
-          <p:nvPr>
-            <p:ph idx="1"/>
-          </p:nvPr>
-        </p:nvGraphicFramePr>
-        <p:xfrm>
-          <a:off x="4635500" y="1625600"/>
-          <a:ext cx="4038600" cy="2959100"/>
-        </p:xfrm>
-        <a:graphic>
-          <a:graphicData uri="http://schemas.openxmlformats.org/drawingml/2006/table">
-            <a:tbl>
-              <a:tblPr firstRow="1" bandRow="1">
-                <a:tableStyleId>{5C22544A-7EE6-4342-B048-85BDC9FD1C3A}</a:tableStyleId>
-              </a:tblPr>
-              <a:tblGrid>
-                <a:gridCol w="1346200"/>
-                <a:gridCol w="1346200"/>
-                <a:gridCol w="1346200"/>
-              </a:tblGrid>
-              <a:tr h="0">
-                <a:tc>
-                  <a:txBody>
-                    <a:bodyPr/>
-                    <a:lstStyle/>
-                    <a:p>
-                      <a:endParaRPr/>
-                    </a:p>
-                  </a:txBody>
-                  <a:tcPr/>
-                </a:tc>
-                <a:tc>
-                  <a:txBody>
-                    <a:bodyPr/>
-                    <a:lstStyle/>
-                    <a:p>
-                      <a:pPr lvl="0" indent="0" marL="0" algn="ctr">
-                        <a:buNone/>
-                      </a:pPr>
-                      <a:r>
-                        <a:rPr/>
-                        <a:t>No covariate adj.</a:t>
-                      </a:r>
-                    </a:p>
-                  </a:txBody>
-                  <a:tcPr/>
-                </a:tc>
-                <a:tc>
-                  <a:txBody>
-                    <a:bodyPr/>
-                    <a:lstStyle/>
-                    <a:p>
-                      <a:pPr lvl="0" indent="0" marL="0" algn="ctr">
-                        <a:buNone/>
-                      </a:pPr>
-                      <a:r>
-                        <a:rPr/>
-                        <a:t>With covariate adj.</a:t>
-                      </a:r>
-                    </a:p>
-                  </a:txBody>
-                  <a:tcPr/>
-                </a:tc>
-              </a:tr>
-              <a:tr h="0">
-                <a:tc>
-                  <a:txBody>
-                    <a:bodyPr/>
-                    <a:lstStyle/>
-                    <a:p>
-                      <a:pPr lvl="0" indent="0" marL="0" algn="l">
-                        <a:buNone/>
-                      </a:pPr>
-                      <a:r>
-                        <a:rPr/>
-                        <a:t>(Intercept)</a:t>
-                      </a:r>
-                    </a:p>
-                  </a:txBody>
-                </a:tc>
-                <a:tc>
-                  <a:txBody>
-                    <a:bodyPr/>
-                    <a:lstStyle/>
-                    <a:p>
-                      <a:pPr lvl="0" indent="0" marL="0" algn="ctr">
-                        <a:buNone/>
-                      </a:pPr>
-                      <a:r>
-                        <a:rPr/>
-                        <a:t>18845.381***</a:t>
-                      </a:r>
-                    </a:p>
-                  </a:txBody>
-                </a:tc>
-                <a:tc>
-                  <a:txBody>
-                    <a:bodyPr/>
-                    <a:lstStyle/>
-                    <a:p>
-                      <a:pPr lvl="0" indent="0" marL="0" algn="ctr">
-                        <a:buNone/>
-                      </a:pPr>
-                      <a:r>
-                        <a:rPr/>
-                        <a:t>29480.538***</a:t>
-                      </a:r>
-                    </a:p>
-                  </a:txBody>
-                </a:tc>
-              </a:tr>
-              <a:tr h="0">
-                <a:tc>
-                  <a:txBody>
-                    <a:bodyPr/>
-                    <a:lstStyle/>
-                    <a:p>
-                      <a:endParaRPr/>
-                    </a:p>
-                  </a:txBody>
-                </a:tc>
-                <a:tc>
-                  <a:txBody>
-                    <a:bodyPr/>
-                    <a:lstStyle/>
-                    <a:p>
-                      <a:pPr lvl="0" indent="0" marL="0" algn="ctr">
-                        <a:buNone/>
-                      </a:pPr>
-                      <a:r>
-                        <a:rPr/>
-                        <a:t>(483.823)</a:t>
-                      </a:r>
-                    </a:p>
-                  </a:txBody>
-                </a:tc>
-                <a:tc>
-                  <a:txBody>
-                    <a:bodyPr/>
-                    <a:lstStyle/>
-                    <a:p>
-                      <a:pPr lvl="0" indent="0" marL="0" algn="ctr">
-                        <a:buNone/>
-                      </a:pPr>
-                      <a:r>
-                        <a:rPr/>
-                        <a:t>(714.386)</a:t>
-                      </a:r>
-                    </a:p>
-                  </a:txBody>
-                </a:tc>
-              </a:tr>
-              <a:tr h="0">
-                <a:tc>
-                  <a:txBody>
-                    <a:bodyPr/>
-                    <a:lstStyle/>
-                    <a:p>
-                      <a:pPr lvl="0" indent="0" marL="0" algn="l">
-                        <a:buNone/>
-                      </a:pPr>
-                      <a:r>
-                        <a:rPr/>
-                        <a:t>promotion_zone</a:t>
-                      </a:r>
-                    </a:p>
-                  </a:txBody>
-                </a:tc>
-                <a:tc>
-                  <a:txBody>
-                    <a:bodyPr/>
-                    <a:lstStyle/>
-                    <a:p>
-                      <a:pPr lvl="0" indent="0" marL="0" algn="ctr">
-                        <a:buNone/>
-                      </a:pPr>
-                      <a:r>
-                        <a:rPr/>
-                        <a:t>−3873.860***</a:t>
-                      </a:r>
-                    </a:p>
-                  </a:txBody>
-                </a:tc>
-                <a:tc>
-                  <a:txBody>
-                    <a:bodyPr/>
-                    <a:lstStyle/>
-                    <a:p>
-                      <a:pPr lvl="0" indent="0" marL="0" algn="ctr">
-                        <a:buNone/>
-                      </a:pPr>
-                      <a:r>
-                        <a:rPr/>
-                        <a:t>−4025.088***</a:t>
-                      </a:r>
-                    </a:p>
-                  </a:txBody>
-                </a:tc>
-              </a:tr>
-              <a:tr h="0">
-                <a:tc>
-                  <a:txBody>
-                    <a:bodyPr/>
-                    <a:lstStyle/>
-                    <a:p>
-                      <a:endParaRPr/>
-                    </a:p>
-                  </a:txBody>
-                </a:tc>
-                <a:tc>
-                  <a:txBody>
-                    <a:bodyPr/>
-                    <a:lstStyle/>
-                    <a:p>
-                      <a:pPr lvl="0" indent="0" marL="0" algn="ctr">
-                        <a:buNone/>
-                      </a:pPr>
-                      <a:r>
-                        <a:rPr/>
-                        <a:t>(637.332)</a:t>
-                      </a:r>
-                    </a:p>
-                  </a:txBody>
-                </a:tc>
-                <a:tc>
-                  <a:txBody>
-                    <a:bodyPr/>
-                    <a:lstStyle/>
-                    <a:p>
-                      <a:pPr lvl="0" indent="0" marL="0" algn="ctr">
-                        <a:buNone/>
-                      </a:pPr>
-                      <a:r>
-                        <a:rPr/>
-                        <a:t>(522.531)</a:t>
-                      </a:r>
-                    </a:p>
-                  </a:txBody>
-                </a:tc>
-              </a:tr>
-              <a:tr h="0">
-                <a:tc>
-                  <a:txBody>
-                    <a:bodyPr/>
-                    <a:lstStyle/>
-                    <a:p>
-                      <a:pPr lvl="0" indent="0" marL="0" algn="l">
-                        <a:buNone/>
-                      </a:pPr>
-                      <a:r>
-                        <a:rPr/>
-                        <a:t>age_manager</a:t>
-                      </a:r>
-                    </a:p>
-                  </a:txBody>
-                </a:tc>
-                <a:tc>
-                  <a:txBody>
-                    <a:bodyPr/>
-                    <a:lstStyle/>
-                    <a:p>
-                      <a:endParaRPr/>
-                    </a:p>
-                  </a:txBody>
-                </a:tc>
-                <a:tc>
-                  <a:txBody>
-                    <a:bodyPr/>
-                    <a:lstStyle/>
-                    <a:p>
-                      <a:pPr lvl="0" indent="0" marL="0" algn="ctr">
-                        <a:buNone/>
-                      </a:pPr>
-                      <a:r>
-                        <a:rPr/>
-                        <a:t>105.055***</a:t>
-                      </a:r>
-                    </a:p>
-                  </a:txBody>
-                </a:tc>
-              </a:tr>
-              <a:tr h="0">
-                <a:tc>
-                  <a:txBody>
-                    <a:bodyPr/>
-                    <a:lstStyle/>
-                    <a:p>
-                      <a:endParaRPr/>
-                    </a:p>
-                  </a:txBody>
-                </a:tc>
-                <a:tc>
-                  <a:txBody>
-                    <a:bodyPr/>
-                    <a:lstStyle/>
-                    <a:p>
-                      <a:endParaRPr/>
-                    </a:p>
-                  </a:txBody>
-                </a:tc>
-                <a:tc>
-                  <a:txBody>
-                    <a:bodyPr/>
-                    <a:lstStyle/>
-                    <a:p>
-                      <a:pPr lvl="0" indent="0" marL="0" algn="ctr">
-                        <a:buNone/>
-                      </a:pPr>
-                      <a:r>
-                        <a:rPr/>
-                        <a:t>(15.353)</a:t>
-                      </a:r>
-                    </a:p>
-                  </a:txBody>
-                </a:tc>
-              </a:tr>
-              <a:tr h="0">
-                <a:tc>
-                  <a:txBody>
-                    <a:bodyPr/>
-                    <a:lstStyle/>
-                    <a:p>
-                      <a:pPr lvl="0" indent="0" marL="0" algn="l">
-                        <a:buNone/>
-                      </a:pPr>
-                      <a:r>
-                        <a:rPr/>
-                        <a:t>age_deputy</a:t>
-                      </a:r>
-                    </a:p>
-                  </a:txBody>
-                </a:tc>
-                <a:tc>
-                  <a:txBody>
-                    <a:bodyPr/>
-                    <a:lstStyle/>
-                    <a:p>
-                      <a:endParaRPr/>
-                    </a:p>
-                  </a:txBody>
-                </a:tc>
-                <a:tc>
-                  <a:txBody>
-                    <a:bodyPr/>
-                    <a:lstStyle/>
-                    <a:p>
-                      <a:pPr lvl="0" indent="0" marL="0" algn="ctr">
-                        <a:buNone/>
-                      </a:pPr>
-                      <a:r>
-                        <a:rPr/>
-                        <a:t>4.606</a:t>
-                      </a:r>
-                    </a:p>
-                  </a:txBody>
-                </a:tc>
-              </a:tr>
-              <a:tr h="0">
-                <a:tc>
-                  <a:txBody>
-                    <a:bodyPr/>
-                    <a:lstStyle/>
-                    <a:p>
-                      <a:endParaRPr/>
-                    </a:p>
-                  </a:txBody>
-                </a:tc>
-                <a:tc>
-                  <a:txBody>
-                    <a:bodyPr/>
-                    <a:lstStyle/>
-                    <a:p>
-                      <a:endParaRPr/>
-                    </a:p>
-                  </a:txBody>
-                </a:tc>
-                <a:tc>
-                  <a:txBody>
-                    <a:bodyPr/>
-                    <a:lstStyle/>
-                    <a:p>
-                      <a:pPr lvl="0" indent="0" marL="0" algn="ctr">
-                        <a:buNone/>
-                      </a:pPr>
-                      <a:r>
-                        <a:rPr/>
-                        <a:t>(16.912)</a:t>
-                      </a:r>
-                    </a:p>
-                  </a:txBody>
-                </a:tc>
-              </a:tr>
-              <a:tr h="0">
-                <a:tc>
-                  <a:txBody>
-                    <a:bodyPr/>
-                    <a:lstStyle/>
-                    <a:p>
-                      <a:pPr lvl="0" indent="0" marL="0" algn="l">
-                        <a:buNone/>
-                      </a:pPr>
-                      <a:r>
-                        <a:rPr/>
-                        <a:t>female_manager</a:t>
-                      </a:r>
-                    </a:p>
-                  </a:txBody>
-                </a:tc>
-                <a:tc>
-                  <a:txBody>
-                    <a:bodyPr/>
-                    <a:lstStyle/>
-                    <a:p>
-                      <a:endParaRPr/>
-                    </a:p>
-                  </a:txBody>
-                </a:tc>
-                <a:tc>
-                  <a:txBody>
-                    <a:bodyPr/>
-                    <a:lstStyle/>
-                    <a:p>
-                      <a:pPr lvl="0" indent="0" marL="0" algn="ctr">
-                        <a:buNone/>
-                      </a:pPr>
-                      <a:r>
-                        <a:rPr/>
-                        <a:t>929.526+</a:t>
-                      </a:r>
-                    </a:p>
-                  </a:txBody>
-                </a:tc>
-              </a:tr>
-              <a:tr h="0">
-                <a:tc>
-                  <a:txBody>
-                    <a:bodyPr/>
-                    <a:lstStyle/>
-                    <a:p>
-                      <a:endParaRPr/>
-                    </a:p>
-                  </a:txBody>
-                </a:tc>
-                <a:tc>
-                  <a:txBody>
-                    <a:bodyPr/>
-                    <a:lstStyle/>
-                    <a:p>
-                      <a:endParaRPr/>
-                    </a:p>
-                  </a:txBody>
-                </a:tc>
-                <a:tc>
-                  <a:txBody>
-                    <a:bodyPr/>
-                    <a:lstStyle/>
-                    <a:p>
-                      <a:pPr lvl="0" indent="0" marL="0" algn="ctr">
-                        <a:buNone/>
-                      </a:pPr>
-                      <a:r>
-                        <a:rPr/>
-                        <a:t>(489.650)</a:t>
-                      </a:r>
-                    </a:p>
-                  </a:txBody>
-                </a:tc>
-              </a:tr>
-              <a:tr h="0">
-                <a:tc>
-                  <a:txBody>
-                    <a:bodyPr/>
-                    <a:lstStyle/>
-                    <a:p>
-                      <a:pPr lvl="0" indent="0" marL="0" algn="l">
-                        <a:buNone/>
-                      </a:pPr>
-                      <a:r>
-                        <a:rPr/>
-                        <a:t>foreign_owned</a:t>
-                      </a:r>
-                    </a:p>
-                  </a:txBody>
-                </a:tc>
-                <a:tc>
-                  <a:txBody>
-                    <a:bodyPr/>
-                    <a:lstStyle/>
-                    <a:p>
-                      <a:endParaRPr/>
-                    </a:p>
-                  </a:txBody>
-                </a:tc>
-                <a:tc>
-                  <a:txBody>
-                    <a:bodyPr/>
-                    <a:lstStyle/>
-                    <a:p>
-                      <a:pPr lvl="0" indent="0" marL="0" algn="ctr">
-                        <a:buNone/>
-                      </a:pPr>
-                      <a:r>
-                        <a:rPr/>
-                        <a:t>−3177.705***</a:t>
-                      </a:r>
-                    </a:p>
-                  </a:txBody>
-                </a:tc>
-              </a:tr>
-              <a:tr h="0">
-                <a:tc>
-                  <a:txBody>
-                    <a:bodyPr/>
-                    <a:lstStyle/>
-                    <a:p>
-                      <a:endParaRPr/>
-                    </a:p>
-                  </a:txBody>
-                </a:tc>
-                <a:tc>
-                  <a:txBody>
-                    <a:bodyPr/>
-                    <a:lstStyle/>
-                    <a:p>
-                      <a:endParaRPr/>
-                    </a:p>
-                  </a:txBody>
-                </a:tc>
-                <a:tc>
-                  <a:txBody>
-                    <a:bodyPr/>
-                    <a:lstStyle/>
-                    <a:p>
-                      <a:pPr lvl="0" indent="0" marL="0" algn="ctr">
-                        <a:buNone/>
-                      </a:pPr>
-                      <a:r>
-                        <a:rPr/>
-                        <a:t>(473.076)</a:t>
-                      </a:r>
-                    </a:p>
-                  </a:txBody>
-                </a:tc>
-              </a:tr>
-              <a:tr h="0">
-                <a:tc>
-                  <a:txBody>
-                    <a:bodyPr/>
-                    <a:lstStyle/>
-                    <a:p>
-                      <a:pPr lvl="0" indent="0" marL="0" algn="l">
-                        <a:buNone/>
-                      </a:pPr>
-                      <a:r>
-                        <a:rPr/>
-                        <a:t>staff_size</a:t>
-                      </a:r>
-                    </a:p>
-                  </a:txBody>
-                </a:tc>
-                <a:tc>
-                  <a:txBody>
-                    <a:bodyPr/>
-                    <a:lstStyle/>
-                    <a:p>
-                      <a:endParaRPr/>
-                    </a:p>
-                  </a:txBody>
-                </a:tc>
-                <a:tc>
-                  <a:txBody>
-                    <a:bodyPr/>
-                    <a:lstStyle/>
-                    <a:p>
-                      <a:pPr lvl="0" indent="0" marL="0" algn="ctr">
-                        <a:buNone/>
-                      </a:pPr>
-                      <a:r>
-                        <a:rPr/>
-                        <a:t>−2385.077***</a:t>
-                      </a:r>
-                    </a:p>
-                  </a:txBody>
-                </a:tc>
-              </a:tr>
-              <a:tr h="0">
-                <a:tc>
-                  <a:txBody>
-                    <a:bodyPr/>
-                    <a:lstStyle/>
-                    <a:p>
-                      <a:endParaRPr/>
-                    </a:p>
-                  </a:txBody>
-                </a:tc>
-                <a:tc>
-                  <a:txBody>
-                    <a:bodyPr/>
-                    <a:lstStyle/>
-                    <a:p>
-                      <a:endParaRPr/>
-                    </a:p>
-                  </a:txBody>
-                </a:tc>
-                <a:tc>
-                  <a:txBody>
-                    <a:bodyPr/>
-                    <a:lstStyle/>
-                    <a:p>
-                      <a:pPr lvl="0" indent="0" marL="0" algn="ctr">
-                        <a:buNone/>
-                      </a:pPr>
-                      <a:r>
-                        <a:rPr/>
-                        <a:t>(70.400)</a:t>
-                      </a:r>
-                    </a:p>
-                  </a:txBody>
-                </a:tc>
-              </a:tr>
-              <a:tr h="0">
-                <a:tc>
-                  <a:txBody>
-                    <a:bodyPr/>
-                    <a:lstStyle/>
-                    <a:p>
-                      <a:pPr lvl="0" indent="0" marL="0" algn="l">
-                        <a:buNone/>
-                      </a:pPr>
-                      <a:r>
-                        <a:rPr/>
-                        <a:t>advanced_filtration</a:t>
-                      </a:r>
-                    </a:p>
-                  </a:txBody>
-                </a:tc>
-                <a:tc>
-                  <a:txBody>
-                    <a:bodyPr/>
-                    <a:lstStyle/>
-                    <a:p>
-                      <a:endParaRPr/>
-                    </a:p>
-                  </a:txBody>
-                </a:tc>
-                <a:tc>
-                  <a:txBody>
-                    <a:bodyPr/>
-                    <a:lstStyle/>
-                    <a:p>
-                      <a:pPr lvl="0" indent="0" marL="0" algn="ctr">
-                        <a:buNone/>
-                      </a:pPr>
-                      <a:r>
-                        <a:rPr/>
-                        <a:t>−3233.169***</a:t>
-                      </a:r>
-                    </a:p>
-                  </a:txBody>
-                </a:tc>
-              </a:tr>
-              <a:tr h="0">
-                <a:tc>
-                  <a:txBody>
-                    <a:bodyPr/>
-                    <a:lstStyle/>
-                    <a:p>
-                      <a:endParaRPr/>
-                    </a:p>
-                  </a:txBody>
-                </a:tc>
-                <a:tc>
-                  <a:txBody>
-                    <a:bodyPr/>
-                    <a:lstStyle/>
-                    <a:p>
-                      <a:endParaRPr/>
-                    </a:p>
-                  </a:txBody>
-                </a:tc>
-                <a:tc>
-                  <a:txBody>
-                    <a:bodyPr/>
-                    <a:lstStyle/>
-                    <a:p>
-                      <a:pPr lvl="0" indent="0" marL="0" algn="ctr">
-                        <a:buNone/>
-                      </a:pPr>
-                      <a:r>
-                        <a:rPr/>
-                        <a:t>(311.621)</a:t>
-                      </a:r>
-                    </a:p>
-                  </a:txBody>
-                </a:tc>
-              </a:tr>
-              <a:tr h="0">
-                <a:tc>
-                  <a:txBody>
-                    <a:bodyPr/>
-                    <a:lstStyle/>
-                    <a:p>
-                      <a:pPr lvl="0" indent="0" marL="0" algn="l">
-                        <a:buNone/>
-                      </a:pPr>
-                      <a:r>
-                        <a:rPr/>
-                        <a:t>facility_area</a:t>
-                      </a:r>
-                    </a:p>
-                  </a:txBody>
-                </a:tc>
-                <a:tc>
-                  <a:txBody>
-                    <a:bodyPr/>
-                    <a:lstStyle/>
-                    <a:p>
-                      <a:endParaRPr/>
-                    </a:p>
-                  </a:txBody>
-                </a:tc>
-                <a:tc>
-                  <a:txBody>
-                    <a:bodyPr/>
-                    <a:lstStyle/>
-                    <a:p>
-                      <a:pPr lvl="0" indent="0" marL="0" algn="ctr">
-                        <a:buNone/>
-                      </a:pPr>
-                      <a:r>
-                        <a:rPr/>
-                        <a:t>155.682**</a:t>
-                      </a:r>
-                    </a:p>
-                  </a:txBody>
-                </a:tc>
-              </a:tr>
-              <a:tr h="0">
-                <a:tc>
-                  <a:txBody>
-                    <a:bodyPr/>
-                    <a:lstStyle/>
-                    <a:p>
-                      <a:endParaRPr/>
-                    </a:p>
-                  </a:txBody>
-                </a:tc>
-                <a:tc>
-                  <a:txBody>
-                    <a:bodyPr/>
-                    <a:lstStyle/>
-                    <a:p>
-                      <a:endParaRPr/>
-                    </a:p>
-                  </a:txBody>
-                </a:tc>
-                <a:tc>
-                  <a:txBody>
-                    <a:bodyPr/>
-                    <a:lstStyle/>
-                    <a:p>
-                      <a:pPr lvl="0" indent="0" marL="0" algn="ctr">
-                        <a:buNone/>
-                      </a:pPr>
-                      <a:r>
-                        <a:rPr/>
-                        <a:t>(47.898)</a:t>
-                      </a:r>
-                    </a:p>
-                  </a:txBody>
-                </a:tc>
-              </a:tr>
-              <a:tr h="0">
-                <a:tc>
-                  <a:txBody>
-                    <a:bodyPr/>
-                    <a:lstStyle/>
-                    <a:p>
-                      <a:pPr lvl="0" indent="0" marL="0" algn="l">
-                        <a:buNone/>
-                      </a:pPr>
-                      <a:r>
-                        <a:rPr/>
-                        <a:t>recycling_center_distance</a:t>
-                      </a:r>
-                    </a:p>
-                  </a:txBody>
-                </a:tc>
-                <a:tc>
-                  <a:txBody>
-                    <a:bodyPr/>
-                    <a:lstStyle/>
-                    <a:p>
-                      <a:endParaRPr/>
-                    </a:p>
-                  </a:txBody>
-                </a:tc>
-                <a:tc>
-                  <a:txBody>
-                    <a:bodyPr/>
-                    <a:lstStyle/>
-                    <a:p>
-                      <a:pPr lvl="0" indent="0" marL="0" algn="ctr">
-                        <a:buNone/>
-                      </a:pPr>
-                      <a:r>
-                        <a:rPr/>
-                        <a:t>−6.575</a:t>
-                      </a:r>
-                    </a:p>
-                  </a:txBody>
-                </a:tc>
-              </a:tr>
-              <a:tr h="0">
-                <a:tc>
-                  <a:txBody>
-                    <a:bodyPr/>
-                    <a:lstStyle/>
-                    <a:p>
-                      <a:endParaRPr/>
-                    </a:p>
-                  </a:txBody>
-                </a:tc>
-                <a:tc>
-                  <a:txBody>
-                    <a:bodyPr/>
-                    <a:lstStyle/>
-                    <a:p>
-                      <a:endParaRPr/>
-                    </a:p>
-                  </a:txBody>
-                </a:tc>
-                <a:tc>
-                  <a:txBody>
-                    <a:bodyPr/>
-                    <a:lstStyle/>
-                    <a:p>
-                      <a:pPr lvl="0" indent="0" marL="0" algn="ctr">
-                        <a:buNone/>
-                      </a:pPr>
-                      <a:r>
-                        <a:rPr/>
-                        <a:t>(5.258)</a:t>
-                      </a:r>
-                    </a:p>
-                  </a:txBody>
-                </a:tc>
-              </a:tr>
-              <a:tr h="0">
-                <a:tc>
-                  <a:txBody>
-                    <a:bodyPr/>
-                    <a:lstStyle/>
-                    <a:p>
-                      <a:pPr lvl="0" indent="0" marL="0" algn="l">
-                        <a:buNone/>
-                      </a:pPr>
-                      <a:r>
-                        <a:rPr/>
-                        <a:t>Num.Obs.</a:t>
-                      </a:r>
-                    </a:p>
-                  </a:txBody>
-                </a:tc>
-                <a:tc>
-                  <a:txBody>
-                    <a:bodyPr/>
-                    <a:lstStyle/>
-                    <a:p>
-                      <a:pPr lvl="0" indent="0" marL="0" algn="ctr">
-                        <a:buNone/>
-                      </a:pPr>
-                      <a:r>
-                        <a:rPr/>
-                        <a:t>9914</a:t>
-                      </a:r>
-                    </a:p>
-                  </a:txBody>
-                </a:tc>
-                <a:tc>
-                  <a:txBody>
-                    <a:bodyPr/>
-                    <a:lstStyle/>
-                    <a:p>
-                      <a:pPr lvl="0" indent="0" marL="0" algn="ctr">
-                        <a:buNone/>
-                      </a:pPr>
-                      <a:r>
-                        <a:rPr/>
-                        <a:t>9914</a:t>
-                      </a:r>
-                    </a:p>
-                  </a:txBody>
-                </a:tc>
-              </a:tr>
-              <a:tr h="0">
-                <a:tc>
-                  <a:txBody>
-                    <a:bodyPr/>
-                    <a:lstStyle/>
-                    <a:p>
-                      <a:pPr lvl="0" indent="0" marL="0" algn="l">
-                        <a:buNone/>
-                      </a:pPr>
-                      <a:r>
-                        <a:rPr/>
-                        <a:t>R2</a:t>
-                      </a:r>
-                    </a:p>
-                  </a:txBody>
-                </a:tc>
-                <a:tc>
-                  <a:txBody>
-                    <a:bodyPr/>
-                    <a:lstStyle/>
-                    <a:p>
-                      <a:pPr lvl="0" indent="0" marL="0" algn="ctr">
-                        <a:buNone/>
-                      </a:pPr>
-                      <a:r>
-                        <a:rPr/>
-                        <a:t>0.027</a:t>
-                      </a:r>
-                    </a:p>
-                  </a:txBody>
-                </a:tc>
-                <a:tc>
-                  <a:txBody>
-                    <a:bodyPr/>
-                    <a:lstStyle/>
-                    <a:p>
-                      <a:pPr lvl="0" indent="0" marL="0" algn="ctr">
-                        <a:buNone/>
-                      </a:pPr>
-                      <a:r>
-                        <a:rPr/>
-                        <a:t>0.304</a:t>
-                      </a:r>
-                    </a:p>
-                  </a:txBody>
-                </a:tc>
-              </a:tr>
-              <a:tr h="0">
-                <a:tc>
-                  <a:txBody>
-                    <a:bodyPr/>
-                    <a:lstStyle/>
-                    <a:p>
-                      <a:pPr lvl="0" indent="0" marL="0" algn="l">
-                        <a:buNone/>
-                      </a:pPr>
-                      <a:r>
-                        <a:rPr/>
-                        <a:t>R2 Adj.</a:t>
-                      </a:r>
-                    </a:p>
-                  </a:txBody>
-                </a:tc>
-                <a:tc>
-                  <a:txBody>
-                    <a:bodyPr/>
-                    <a:lstStyle/>
-                    <a:p>
-                      <a:pPr lvl="0" indent="0" marL="0" algn="ctr">
-                        <a:buNone/>
-                      </a:pPr>
-                      <a:r>
-                        <a:rPr/>
-                        <a:t>0.026</a:t>
-                      </a:r>
-                    </a:p>
-                  </a:txBody>
-                </a:tc>
-                <a:tc>
-                  <a:txBody>
-                    <a:bodyPr/>
-                    <a:lstStyle/>
-                    <a:p>
-                      <a:pPr lvl="0" indent="0" marL="0" algn="ctr">
-                        <a:buNone/>
-                      </a:pPr>
-                      <a:r>
-                        <a:rPr/>
-                        <a:t>0.304</a:t>
-                      </a:r>
-                    </a:p>
-                  </a:txBody>
-                </a:tc>
-              </a:tr>
-              <a:tr h="0">
-                <a:tc>
-                  <a:txBody>
-                    <a:bodyPr/>
-                    <a:lstStyle/>
-                    <a:p>
-                      <a:pPr lvl="0" indent="0" marL="0" algn="l">
-                        <a:buNone/>
-                      </a:pPr>
-                      <a:r>
-                        <a:rPr/>
-                        <a:t> + p &lt; 0.1, * p &lt; 0.05, ** p &lt; 0.01, *** p &lt; 0.001</a:t>
-                      </a:r>
-                    </a:p>
-                  </a:txBody>
-                </a:tc>
-                <a:tc>
-                  <a:txBody>
-                    <a:bodyPr/>
-                    <a:lstStyle/>
-                    <a:p>
-                      <a:endParaRPr/>
-                    </a:p>
-                  </a:txBody>
-                </a:tc>
-                <a:tc>
-                  <a:txBody>
-                    <a:bodyPr/>
-                    <a:lstStyle/>
-                    <a:p>
-                      <a:endParaRPr/>
-                    </a:p>
-                  </a:txBody>
-                </a:tc>
-              </a:tr>
-            </a:tbl>
-          </a:graphicData>
-        </a:graphic>
-      </p:graphicFrame>
-    </p:spTree>
-  </p:cSld>
-  <p:timing>
-    <p:tnLst>
-      <p:par>
-        <p:cTn id="1" dur="indefinite" restart="never" nodeType="tmRoot">
-          <p:childTnLst>
-            <p:seq concurrent="1" nextAc="seek">
-              <p:cTn id="2" dur="indefinite" nodeType="mainSeq">
-                <p:childTnLst>
-                  <p:par>
-                    <p:cTn id="3" fill="hold">
-                      <p:stCondLst>
-                        <p:cond delay="indefinite"/>
-                      </p:stCondLst>
-                      <p:childTnLst>
-                        <p:par>
-                          <p:cTn id="4" fill="hold">
-                            <p:stCondLst>
-                              <p:cond delay="0"/>
-                            </p:stCondLst>
-                            <p:childTnLst>
-                              <p:par>
-                                <p:cTn id="5" presetID="1" presetClass="entr" presetSubtype="0" fill="hold" grpId="0" nodeType="clickEffect">
-                                  <p:stCondLst>
-                                    <p:cond delay="0"/>
-                                  </p:stCondLst>
-                                  <p:childTnLst>
-                                    <p:set>
-                                      <p:cBhvr>
-                                        <p:cTn id="6" dur="1" fill="hold">
-                                          <p:stCondLst>
-                                            <p:cond delay="0"/>
-                                          </p:stCondLst>
-                                        </p:cTn>
-                                        <p:tgtEl>
-                                          <p:spTgt spid="3">
-                                            <p:txEl>
-                                              <p:pRg st="2" end="2"/>
-                                            </p:txEl>
-                                          </p:spTgt>
-                                        </p:tgtEl>
-                                        <p:attrNameLst>
-                                          <p:attrName>style.visibility</p:attrName>
-                                        </p:attrNameLst>
-                                      </p:cBhvr>
-                                      <p:to>
-                                        <p:strVal val="visible"/>
-                                      </p:to>
-                                    </p:set>
-                                  </p:childTnLst>
-                                </p:cTn>
-                              </p:par>
-                            </p:childTnLst>
-                          </p:cTn>
-                        </p:par>
-                      </p:childTnLst>
-                    </p:cTn>
-                  </p:par>
-                  <p:par>
-                    <p:cTn id="7" fill="hold">
-                      <p:stCondLst>
-                        <p:cond delay="indefinite"/>
-                      </p:stCondLst>
-                      <p:childTnLst>
-                        <p:par>
-                          <p:cTn id="8" fill="hold">
-                            <p:stCondLst>
-                              <p:cond delay="0"/>
-                            </p:stCondLst>
-                            <p:childTnLst>
-                              <p:par>
-                                <p:cTn id="9" presetID="1" presetClass="entr" presetSubtype="0" fill="hold" grpId="0" nodeType="clickEffect">
-                                  <p:stCondLst>
-                                    <p:cond delay="0"/>
-                                  </p:stCondLst>
-                                  <p:childTnLst>
-                                    <p:set>
-                                      <p:cBhvr>
-                                        <p:cTn id="10" dur="1" fill="hold">
-                                          <p:stCondLst>
-                                            <p:cond delay="0"/>
-                                          </p:stCondLst>
-                                        </p:cTn>
-                                        <p:tgtEl>
-                                          <p:spTgt spid="3">
-                                            <p:txEl>
-                                              <p:pRg st="3" end="3"/>
-                                            </p:txEl>
-                                          </p:spTgt>
-                                        </p:tgtEl>
-                                        <p:attrNameLst>
-                                          <p:attrName>style.visibility</p:attrName>
-                                        </p:attrNameLst>
-                                      </p:cBhvr>
-                                      <p:to>
-                                        <p:strVal val="visible"/>
-                                      </p:to>
-                                    </p:set>
-                                  </p:childTnLst>
-                                </p:cTn>
-                              </p:par>
-                            </p:childTnLst>
-                          </p:cTn>
-                        </p:par>
-                      </p:childTnLst>
-                    </p:cTn>
-                  </p:par>
-                  <p:par>
-                    <p:cTn id="11" fill="hold">
-                      <p:stCondLst>
-                        <p:cond delay="indefinite"/>
-                      </p:stCondLst>
-                      <p:childTnLst>
-                        <p:par>
-                          <p:cTn id="12" fill="hold">
-                            <p:stCondLst>
-                              <p:cond delay="0"/>
-                            </p:stCondLst>
-                            <p:childTnLst>
-                              <p:par>
-                                <p:cTn id="13" presetID="1" presetClass="entr" presetSubtype="0" fill="hold" grpId="0" nodeType="clickEffect">
-                                  <p:stCondLst>
-                                    <p:cond delay="0"/>
-                                  </p:stCondLst>
-                                  <p:childTnLst>
-                                    <p:set>
-                                      <p:cBhvr>
-                                        <p:cTn id="14" dur="1" fill="hold">
-                                          <p:stCondLst>
-                                            <p:cond delay="0"/>
-                                          </p:stCondLst>
-                                        </p:cTn>
-                                        <p:tgtEl>
-                                          <p:spTgt spid="3">
-                                            <p:txEl>
-                                              <p:pRg st="4" end="4"/>
-                                            </p:txEl>
-                                          </p:spTgt>
-                                        </p:tgtEl>
-                                        <p:attrNameLst>
-                                          <p:attrName>style.visibility</p:attrName>
-                                        </p:attrNameLst>
-                                      </p:cBhvr>
-                                      <p:to>
-                                        <p:strVal val="visible"/>
-                                      </p:to>
-                                    </p:set>
-                                  </p:childTnLst>
-                                </p:cTn>
-                              </p:par>
-                            </p:childTnLst>
-                          </p:cTn>
-                        </p:par>
-                      </p:childTnLst>
-                    </p:cTn>
-                  </p:par>
-                  <p:par>
-                    <p:cTn id="15" fill="hold">
-                      <p:stCondLst>
-                        <p:cond delay="indefinite"/>
-                      </p:stCondLst>
-                      <p:childTnLst>
-                        <p:par>
-                          <p:cTn id="16" fill="hold">
-                            <p:stCondLst>
-                              <p:cond delay="0"/>
-                            </p:stCondLst>
-                            <p:childTnLst>
-                              <p:par>
-                                <p:cTn id="17" presetID="1" presetClass="entr" presetSubtype="0" fill="hold" grpId="0" nodeType="clickEffect">
-                                  <p:stCondLst>
-                                    <p:cond delay="0"/>
-                                  </p:stCondLst>
-                                  <p:childTnLst>
-                                    <p:set>
-                                      <p:cBhvr>
-                                        <p:cTn id="18" dur="1" fill="hold">
-                                          <p:stCondLst>
-                                            <p:cond delay="0"/>
-                                          </p:stCondLst>
-                                        </p:cTn>
-                                        <p:tgtEl>
-                                          <p:spTgt spid="3">
-                                            <p:txEl>
-                                              <p:pRg st="5" end="5"/>
-                                            </p:txEl>
-                                          </p:spTgt>
-                                        </p:tgtEl>
-                                        <p:attrNameLst>
-                                          <p:attrName>style.visibility</p:attrName>
-                                        </p:attrNameLst>
-                                      </p:cBhvr>
-                                      <p:to>
-                                        <p:strVal val="visible"/>
-                                      </p:to>
-                                    </p:set>
-                                  </p:childTnLst>
-                                </p:cTn>
-                              </p:par>
-                            </p:childTnLst>
-                          </p:cTn>
-                        </p:par>
-                      </p:childTnLst>
-                    </p:cTn>
-                  </p:par>
-                </p:childTnLst>
-              </p:cTn>
-              <p:prevCondLst>
-                <p:cond evt="onPrev" delay="0">
-                  <p:tgtEl>
-                    <p:sldTgt/>
-                  </p:tgtEl>
-                </p:cond>
-              </p:prevCondLst>
-              <p:nextCondLst>
-                <p:cond evt="onNext" delay="0">
-                  <p:tgtEl>
-                    <p:sldTgt/>
-                  </p:tgtEl>
-                </p:cond>
-              </p:nextCondLst>
-            </p:seq>
-          </p:childTnLst>
-        </p:cTn>
-      </p:par>
-    </p:tnLst>
-    <p:bldLst>
-      <p:bldP spid="3" grpId="0" uiExpand="1" build="p"/>
-    </p:bldLst>
-  </p:timing>
-</p:sld>
-</file>
-
-<file path=ppt/slides/slide7.xml><?xml version="1.0" encoding="utf-8"?>
-<p:sld xmlns:a="http://schemas.openxmlformats.org/drawingml/2006/main" xmlns:r="http://schemas.openxmlformats.org/officeDocument/2006/relationships" xmlns:p="http://schemas.openxmlformats.org/presentationml/2006/main">
-  <p:cSld>
-    <p:spTree>
-      <p:nvGrpSpPr>
-        <p:cNvPr id="1" name=""/>
-        <p:cNvGrpSpPr/>
-        <p:nvPr/>
-      </p:nvGrpSpPr>
-      <p:grpSpPr>
-        <a:xfrm>
-          <a:off x="0" y="0"/>
-          <a:ext cx="0" cy="0"/>
-          <a:chOff x="0" y="0"/>
-          <a:chExt cx="0" cy="0"/>
-        </a:xfrm>
-      </p:grpSpPr>
-      <p:sp>
-        <p:nvSpPr>
-          <p:cNvPr id="2" name="Title 1"/>
-          <p:cNvSpPr>
-            <a:spLocks noGrp="1"/>
-          </p:cNvSpPr>
-          <p:nvPr>
-            <p:ph type="title"/>
-          </p:nvPr>
-        </p:nvSpPr>
-        <p:spPr/>
-        <p:txBody>
-          <a:bodyPr/>
-          <a:lstStyle/>
-          <a:p>
-            <a:pPr lvl="0" indent="0" marL="0">
-              <a:buNone/>
-            </a:pPr>
-            <a:r>
-              <a:rPr/>
-              <a:t>3. Local Average Treatment Effect (LATE)</a:t>
-            </a:r>
-          </a:p>
-        </p:txBody>
-      </p:sp>
-      <p:sp>
-        <p:nvSpPr>
-          <p:cNvPr id="3" name="Text Placeholder 2"/>
-          <p:cNvSpPr>
-            <a:spLocks noGrp="1"/>
-          </p:cNvSpPr>
-          <p:nvPr>
-            <p:ph idx="1" type="body"/>
-          </p:nvPr>
-        </p:nvSpPr>
-        <p:spPr/>
-        <p:txBody>
-          <a:bodyPr/>
-          <a:lstStyle/>
-          <a:p>
-            <a:pPr lvl="0" indent="0">
-              <a:buNone/>
-            </a:pPr>
-            <a:r>
-              <a:rPr>
-                <a:solidFill>
-                  <a:srgbClr val="5E5E5E"/>
-                </a:solidFill>
-                <a:latin typeface="Courier"/>
-              </a:rPr>
-              <a:t># Estimate LATE using IV regression (2SLS)</a:t>
-            </a:r>
-            <a:br/>
-            <a:r>
-              <a:rPr>
-                <a:solidFill>
-                  <a:srgbClr val="003B4F"/>
-                </a:solidFill>
-                <a:latin typeface="Courier"/>
-              </a:rPr>
-              <a:t>m_late &lt;- </a:t>
-            </a:r>
-            <a:r>
-              <a:rPr>
-                <a:solidFill>
-                  <a:srgbClr val="4758AB"/>
-                </a:solidFill>
-                <a:latin typeface="Courier"/>
-              </a:rPr>
-              <a:t>iv_robust</a:t>
-            </a:r>
-            <a:r>
-              <a:rPr>
-                <a:solidFill>
-                  <a:srgbClr val="003B4F"/>
-                </a:solidFill>
-                <a:latin typeface="Courier"/>
-              </a:rPr>
-              <a:t>(waste_management_costs </a:t>
-            </a:r>
-            <a:r>
-              <a:rPr>
-                <a:solidFill>
-                  <a:srgbClr val="5E5E5E"/>
-                </a:solidFill>
-                <a:latin typeface="Courier"/>
-              </a:rPr>
-              <a:t>~</a:t>
-            </a:r>
-            <a:r>
-              <a:rPr>
-                <a:solidFill>
-                  <a:srgbClr val="003B4F"/>
-                </a:solidFill>
-                <a:latin typeface="Courier"/>
-              </a:rPr>
-              <a:t> enrolled_rp </a:t>
-            </a:r>
-            <a:r>
-              <a:rPr>
-                <a:solidFill>
-                  <a:srgbClr val="5E5E5E"/>
-                </a:solidFill>
-                <a:latin typeface="Courier"/>
-              </a:rPr>
-              <a:t>|</a:t>
-            </a:r>
-            <a:br/>
-            <a:r>
-              <a:rPr>
-                <a:solidFill>
-                  <a:srgbClr val="003B4F"/>
-                </a:solidFill>
-                <a:latin typeface="Courier"/>
-              </a:rPr>
-              <a:t>                     promotion_zone,</a:t>
-            </a:r>
-            <a:br/>
-            <a:r>
-              <a:rPr>
-                <a:solidFill>
-                  <a:srgbClr val="003B4F"/>
-                </a:solidFill>
-                <a:latin typeface="Courier"/>
-              </a:rPr>
-              <a:t>                   </a:t>
-            </a:r>
-            <a:r>
-              <a:rPr>
-                <a:solidFill>
-                  <a:srgbClr val="657422"/>
-                </a:solidFill>
-                <a:latin typeface="Courier"/>
-              </a:rPr>
-              <a:t>clusters =</a:t>
-            </a:r>
-            <a:r>
-              <a:rPr>
-                <a:solidFill>
-                  <a:srgbClr val="003B4F"/>
-                </a:solidFill>
-                <a:latin typeface="Courier"/>
-              </a:rPr>
-              <a:t> zone_identifier,</a:t>
-            </a:r>
-            <a:br/>
-            <a:r>
-              <a:rPr>
-                <a:solidFill>
-                  <a:srgbClr val="003B4F"/>
-                </a:solidFill>
-                <a:latin typeface="Courier"/>
-              </a:rPr>
-              <a:t>                   </a:t>
-            </a:r>
-            <a:r>
-              <a:rPr>
-                <a:solidFill>
-                  <a:srgbClr val="657422"/>
-                </a:solidFill>
-                <a:latin typeface="Courier"/>
-              </a:rPr>
-              <a:t>data =</a:t>
-            </a:r>
-            <a:r>
-              <a:rPr>
-                <a:solidFill>
-                  <a:srgbClr val="003B4F"/>
-                </a:solidFill>
-                <a:latin typeface="Courier"/>
-              </a:rPr>
-              <a:t> df </a:t>
-            </a:r>
-            <a:r>
-              <a:rPr>
-                <a:solidFill>
-                  <a:srgbClr val="5E5E5E"/>
-                </a:solidFill>
-                <a:latin typeface="Courier"/>
-              </a:rPr>
-              <a:t>%&gt;%</a:t>
-            </a:r>
-            <a:r>
-              <a:rPr>
-                <a:solidFill>
-                  <a:srgbClr val="003B4F"/>
-                </a:solidFill>
-                <a:latin typeface="Courier"/>
-              </a:rPr>
-              <a:t> </a:t>
-            </a:r>
-            <a:r>
-              <a:rPr>
-                <a:solidFill>
-                  <a:srgbClr val="4758AB"/>
-                </a:solidFill>
-                <a:latin typeface="Courier"/>
-              </a:rPr>
-              <a:t>filter</a:t>
-            </a:r>
-            <a:r>
-              <a:rPr>
-                <a:solidFill>
-                  <a:srgbClr val="003B4F"/>
-                </a:solidFill>
-                <a:latin typeface="Courier"/>
-              </a:rPr>
-              <a:t>(round </a:t>
-            </a:r>
-            <a:r>
-              <a:rPr>
-                <a:solidFill>
-                  <a:srgbClr val="5E5E5E"/>
-                </a:solidFill>
-                <a:latin typeface="Courier"/>
-              </a:rPr>
-              <a:t>==</a:t>
-            </a:r>
-            <a:r>
-              <a:rPr>
-                <a:solidFill>
-                  <a:srgbClr val="003B4F"/>
-                </a:solidFill>
-                <a:latin typeface="Courier"/>
-              </a:rPr>
-              <a:t> </a:t>
-            </a:r>
-            <a:r>
-              <a:rPr>
-                <a:solidFill>
-                  <a:srgbClr val="AD0000"/>
-                </a:solidFill>
-                <a:latin typeface="Courier"/>
-              </a:rPr>
-              <a:t>1</a:t>
-            </a:r>
-            <a:r>
-              <a:rPr>
-                <a:solidFill>
-                  <a:srgbClr val="003B4F"/>
-                </a:solidFill>
-                <a:latin typeface="Courier"/>
-              </a:rPr>
-              <a:t>))</a:t>
-            </a:r>
-            <a:br/>
-            <a:br/>
-            <a:r>
-              <a:rPr>
-                <a:solidFill>
-                  <a:srgbClr val="5E5E5E"/>
-                </a:solidFill>
-                <a:latin typeface="Courier"/>
-              </a:rPr>
-              <a:t># With covariate adjustment</a:t>
-            </a:r>
-            <a:br/>
-            <a:r>
-              <a:rPr>
-                <a:solidFill>
-                  <a:srgbClr val="003B4F"/>
-                </a:solidFill>
-                <a:latin typeface="Courier"/>
-              </a:rPr>
-              <a:t>m_late_wcov &lt;- </a:t>
-            </a:r>
-            <a:r>
-              <a:rPr>
-                <a:solidFill>
-                  <a:srgbClr val="4758AB"/>
-                </a:solidFill>
-                <a:latin typeface="Courier"/>
-              </a:rPr>
-              <a:t>iv_robust</a:t>
-            </a:r>
-            <a:r>
-              <a:rPr>
-                <a:solidFill>
-                  <a:srgbClr val="003B4F"/>
-                </a:solidFill>
-                <a:latin typeface="Courier"/>
-              </a:rPr>
-              <a:t>(waste_management_costs </a:t>
-            </a:r>
-            <a:r>
-              <a:rPr>
-                <a:solidFill>
-                  <a:srgbClr val="5E5E5E"/>
-                </a:solidFill>
-                <a:latin typeface="Courier"/>
-              </a:rPr>
-              <a:t>~</a:t>
-            </a:r>
-            <a:r>
-              <a:rPr>
-                <a:solidFill>
-                  <a:srgbClr val="003B4F"/>
-                </a:solidFill>
-                <a:latin typeface="Courier"/>
-              </a:rPr>
-              <a:t> enrolled_rp </a:t>
-            </a:r>
-            <a:r>
-              <a:rPr>
-                <a:solidFill>
-                  <a:srgbClr val="5E5E5E"/>
-                </a:solidFill>
-                <a:latin typeface="Courier"/>
-              </a:rPr>
-              <a:t>+</a:t>
-            </a:r>
-            <a:r>
-              <a:rPr>
-                <a:solidFill>
-                  <a:srgbClr val="003B4F"/>
-                </a:solidFill>
-                <a:latin typeface="Courier"/>
-              </a:rPr>
-              <a:t> </a:t>
-            </a:r>
-            <a:br/>
-            <a:r>
-              <a:rPr>
-                <a:solidFill>
-                  <a:srgbClr val="003B4F"/>
-                </a:solidFill>
-                <a:latin typeface="Courier"/>
-              </a:rPr>
-              <a:t>                         age_manager </a:t>
-            </a:r>
-            <a:r>
-              <a:rPr>
-                <a:solidFill>
-                  <a:srgbClr val="5E5E5E"/>
-                </a:solidFill>
-                <a:latin typeface="Courier"/>
-              </a:rPr>
-              <a:t>+</a:t>
-            </a:r>
-            <a:r>
-              <a:rPr>
-                <a:solidFill>
-                  <a:srgbClr val="003B4F"/>
-                </a:solidFill>
-                <a:latin typeface="Courier"/>
-              </a:rPr>
-              <a:t> age_deputy </a:t>
-            </a:r>
-            <a:r>
-              <a:rPr>
-                <a:solidFill>
-                  <a:srgbClr val="5E5E5E"/>
-                </a:solidFill>
-                <a:latin typeface="Courier"/>
-              </a:rPr>
-              <a:t>+</a:t>
-            </a:r>
-            <a:br/>
-            <a:r>
-              <a:rPr>
-                <a:solidFill>
-                  <a:srgbClr val="003B4F"/>
-                </a:solidFill>
-                <a:latin typeface="Courier"/>
-              </a:rPr>
-              <a:t>                         female_manager </a:t>
-            </a:r>
-            <a:r>
-              <a:rPr>
-                <a:solidFill>
-                  <a:srgbClr val="5E5E5E"/>
-                </a:solidFill>
-                <a:latin typeface="Courier"/>
-              </a:rPr>
-              <a:t>+</a:t>
-            </a:r>
-            <a:r>
-              <a:rPr>
-                <a:solidFill>
-                  <a:srgbClr val="003B4F"/>
-                </a:solidFill>
-                <a:latin typeface="Courier"/>
-              </a:rPr>
-              <a:t> foreign_owned </a:t>
-            </a:r>
-            <a:r>
-              <a:rPr>
-                <a:solidFill>
-                  <a:srgbClr val="5E5E5E"/>
-                </a:solidFill>
-                <a:latin typeface="Courier"/>
-              </a:rPr>
-              <a:t>+</a:t>
-            </a:r>
-            <a:r>
-              <a:rPr>
-                <a:solidFill>
-                  <a:srgbClr val="003B4F"/>
-                </a:solidFill>
-                <a:latin typeface="Courier"/>
-              </a:rPr>
-              <a:t> </a:t>
-            </a:r>
-            <a:br/>
-            <a:r>
-              <a:rPr>
-                <a:solidFill>
-                  <a:srgbClr val="003B4F"/>
-                </a:solidFill>
-                <a:latin typeface="Courier"/>
-              </a:rPr>
-              <a:t>                         staff_size </a:t>
-            </a:r>
-            <a:r>
-              <a:rPr>
-                <a:solidFill>
-                  <a:srgbClr val="5E5E5E"/>
-                </a:solidFill>
-                <a:latin typeface="Courier"/>
-              </a:rPr>
-              <a:t>+</a:t>
-            </a:r>
-            <a:br/>
-            <a:r>
-              <a:rPr>
-                <a:solidFill>
-                  <a:srgbClr val="003B4F"/>
-                </a:solidFill>
-                <a:latin typeface="Courier"/>
-              </a:rPr>
-              <a:t>                         advanced_filtration </a:t>
-            </a:r>
-            <a:r>
-              <a:rPr>
-                <a:solidFill>
-                  <a:srgbClr val="5E5E5E"/>
-                </a:solidFill>
-                <a:latin typeface="Courier"/>
-              </a:rPr>
-              <a:t>+</a:t>
-            </a:r>
-            <a:r>
-              <a:rPr>
-                <a:solidFill>
-                  <a:srgbClr val="003B4F"/>
-                </a:solidFill>
-                <a:latin typeface="Courier"/>
-              </a:rPr>
-              <a:t> </a:t>
-            </a:r>
-            <a:br/>
-            <a:r>
-              <a:rPr>
-                <a:solidFill>
-                  <a:srgbClr val="003B4F"/>
-                </a:solidFill>
-                <a:latin typeface="Courier"/>
-              </a:rPr>
-              <a:t>                         facility_area </a:t>
-            </a:r>
-            <a:r>
-              <a:rPr>
-                <a:solidFill>
-                  <a:srgbClr val="5E5E5E"/>
-                </a:solidFill>
-                <a:latin typeface="Courier"/>
-              </a:rPr>
-              <a:t>+</a:t>
-            </a:r>
-            <a:br/>
-            <a:r>
-              <a:rPr>
-                <a:solidFill>
-                  <a:srgbClr val="003B4F"/>
-                </a:solidFill>
-                <a:latin typeface="Courier"/>
-              </a:rPr>
-              <a:t>                         recycling_center_distance </a:t>
-            </a:r>
-            <a:r>
-              <a:rPr>
-                <a:solidFill>
-                  <a:srgbClr val="5E5E5E"/>
-                </a:solidFill>
-                <a:latin typeface="Courier"/>
-              </a:rPr>
-              <a:t>|</a:t>
-            </a:r>
-            <a:r>
-              <a:rPr>
-                <a:solidFill>
-                  <a:srgbClr val="003B4F"/>
-                </a:solidFill>
-                <a:latin typeface="Courier"/>
-              </a:rPr>
-              <a:t> </a:t>
-            </a:r>
-            <a:br/>
-            <a:r>
-              <a:rPr>
-                <a:solidFill>
-                  <a:srgbClr val="003B4F"/>
-                </a:solidFill>
-                <a:latin typeface="Courier"/>
-              </a:rPr>
-              <a:t>                         promotion_zone </a:t>
-            </a:r>
-            <a:r>
-              <a:rPr>
-                <a:solidFill>
-                  <a:srgbClr val="5E5E5E"/>
-                </a:solidFill>
-                <a:latin typeface="Courier"/>
-              </a:rPr>
-              <a:t>+</a:t>
-            </a:r>
-            <a:r>
-              <a:rPr>
-                <a:solidFill>
-                  <a:srgbClr val="003B4F"/>
-                </a:solidFill>
-                <a:latin typeface="Courier"/>
-              </a:rPr>
-              <a:t> </a:t>
-            </a:r>
-            <a:br/>
-            <a:r>
-              <a:rPr>
-                <a:solidFill>
-                  <a:srgbClr val="003B4F"/>
-                </a:solidFill>
-                <a:latin typeface="Courier"/>
-              </a:rPr>
-              <a:t>                         age_manager </a:t>
-            </a:r>
-            <a:r>
-              <a:rPr>
-                <a:solidFill>
-                  <a:srgbClr val="5E5E5E"/>
-                </a:solidFill>
-                <a:latin typeface="Courier"/>
-              </a:rPr>
-              <a:t>+</a:t>
-            </a:r>
-            <a:r>
-              <a:rPr>
-                <a:solidFill>
-                  <a:srgbClr val="003B4F"/>
-                </a:solidFill>
-                <a:latin typeface="Courier"/>
-              </a:rPr>
-              <a:t> age_deputy </a:t>
-            </a:r>
-            <a:r>
-              <a:rPr>
-                <a:solidFill>
-                  <a:srgbClr val="5E5E5E"/>
-                </a:solidFill>
-                <a:latin typeface="Courier"/>
-              </a:rPr>
-              <a:t>+</a:t>
-            </a:r>
-            <a:br/>
-            <a:r>
-              <a:rPr>
-                <a:solidFill>
-                  <a:srgbClr val="003B4F"/>
-                </a:solidFill>
-                <a:latin typeface="Courier"/>
-              </a:rPr>
-              <a:t>                         female_manager </a:t>
-            </a:r>
-            <a:r>
-              <a:rPr>
-                <a:solidFill>
-                  <a:srgbClr val="5E5E5E"/>
-                </a:solidFill>
-                <a:latin typeface="Courier"/>
-              </a:rPr>
-              <a:t>+</a:t>
-            </a:r>
-            <a:r>
-              <a:rPr>
-                <a:solidFill>
-                  <a:srgbClr val="003B4F"/>
-                </a:solidFill>
-                <a:latin typeface="Courier"/>
-              </a:rPr>
-              <a:t> foreign_owned </a:t>
-            </a:r>
-            <a:r>
-              <a:rPr>
-                <a:solidFill>
-                  <a:srgbClr val="5E5E5E"/>
-                </a:solidFill>
-                <a:latin typeface="Courier"/>
-              </a:rPr>
-              <a:t>+</a:t>
-            </a:r>
-            <a:r>
-              <a:rPr>
-                <a:solidFill>
-                  <a:srgbClr val="003B4F"/>
-                </a:solidFill>
-                <a:latin typeface="Courier"/>
-              </a:rPr>
-              <a:t> </a:t>
-            </a:r>
-            <a:br/>
-            <a:r>
-              <a:rPr>
-                <a:solidFill>
-                  <a:srgbClr val="003B4F"/>
-                </a:solidFill>
-                <a:latin typeface="Courier"/>
-              </a:rPr>
-              <a:t>                         staff_size </a:t>
-            </a:r>
-            <a:r>
-              <a:rPr>
-                <a:solidFill>
-                  <a:srgbClr val="5E5E5E"/>
-                </a:solidFill>
-                <a:latin typeface="Courier"/>
-              </a:rPr>
-              <a:t>+</a:t>
-            </a:r>
-            <a:br/>
-            <a:r>
-              <a:rPr>
-                <a:solidFill>
-                  <a:srgbClr val="003B4F"/>
-                </a:solidFill>
-                <a:latin typeface="Courier"/>
-              </a:rPr>
-              <a:t>                         advanced_filtration </a:t>
-            </a:r>
-            <a:r>
-              <a:rPr>
-                <a:solidFill>
-                  <a:srgbClr val="5E5E5E"/>
-                </a:solidFill>
-                <a:latin typeface="Courier"/>
-              </a:rPr>
-              <a:t>+</a:t>
-            </a:r>
-            <a:r>
-              <a:rPr>
-                <a:solidFill>
-                  <a:srgbClr val="003B4F"/>
-                </a:solidFill>
-                <a:latin typeface="Courier"/>
-              </a:rPr>
-              <a:t> facility_area </a:t>
-            </a:r>
-            <a:r>
-              <a:rPr>
-                <a:solidFill>
-                  <a:srgbClr val="5E5E5E"/>
-                </a:solidFill>
-                <a:latin typeface="Courier"/>
-              </a:rPr>
-              <a:t>+</a:t>
-            </a:r>
-            <a:br/>
-            <a:r>
-              <a:rPr>
-                <a:solidFill>
-                  <a:srgbClr val="003B4F"/>
-                </a:solidFill>
-                <a:latin typeface="Courier"/>
-              </a:rPr>
-              <a:t>                         recycling_center_distance,</a:t>
-            </a:r>
-            <a:br/>
-            <a:r>
-              <a:rPr>
-                <a:solidFill>
-                  <a:srgbClr val="003B4F"/>
-                </a:solidFill>
-                <a:latin typeface="Courier"/>
-              </a:rPr>
-              <a:t>                         </a:t>
-            </a:r>
-            <a:r>
-              <a:rPr>
-                <a:solidFill>
-                  <a:srgbClr val="657422"/>
-                </a:solidFill>
-                <a:latin typeface="Courier"/>
-              </a:rPr>
-              <a:t>clusters =</a:t>
-            </a:r>
-            <a:r>
-              <a:rPr>
-                <a:solidFill>
-                  <a:srgbClr val="003B4F"/>
-                </a:solidFill>
-                <a:latin typeface="Courier"/>
-              </a:rPr>
-              <a:t> zone_identifier,</a:t>
-            </a:r>
-            <a:br/>
-            <a:r>
-              <a:rPr>
-                <a:solidFill>
-                  <a:srgbClr val="003B4F"/>
-                </a:solidFill>
-                <a:latin typeface="Courier"/>
-              </a:rPr>
-              <a:t>                         </a:t>
-            </a:r>
-            <a:r>
-              <a:rPr>
-                <a:solidFill>
-                  <a:srgbClr val="657422"/>
-                </a:solidFill>
-                <a:latin typeface="Courier"/>
-              </a:rPr>
-              <a:t>data =</a:t>
-            </a:r>
-            <a:r>
-              <a:rPr>
-                <a:solidFill>
-                  <a:srgbClr val="003B4F"/>
-                </a:solidFill>
-                <a:latin typeface="Courier"/>
-              </a:rPr>
-              <a:t> df </a:t>
-            </a:r>
-            <a:r>
-              <a:rPr>
-                <a:solidFill>
-                  <a:srgbClr val="5E5E5E"/>
-                </a:solidFill>
-                <a:latin typeface="Courier"/>
-              </a:rPr>
-              <a:t>%&gt;%</a:t>
-            </a:r>
-            <a:r>
-              <a:rPr>
-                <a:solidFill>
-                  <a:srgbClr val="003B4F"/>
-                </a:solidFill>
-                <a:latin typeface="Courier"/>
-              </a:rPr>
-              <a:t> </a:t>
-            </a:r>
-            <a:r>
-              <a:rPr>
-                <a:solidFill>
-                  <a:srgbClr val="4758AB"/>
-                </a:solidFill>
-                <a:latin typeface="Courier"/>
-              </a:rPr>
-              <a:t>filter</a:t>
-            </a:r>
-            <a:r>
-              <a:rPr>
-                <a:solidFill>
-                  <a:srgbClr val="003B4F"/>
-                </a:solidFill>
-                <a:latin typeface="Courier"/>
-              </a:rPr>
-              <a:t>(round </a:t>
-            </a:r>
-            <a:r>
-              <a:rPr>
-                <a:solidFill>
-                  <a:srgbClr val="5E5E5E"/>
-                </a:solidFill>
-                <a:latin typeface="Courier"/>
-              </a:rPr>
-              <a:t>==</a:t>
-            </a:r>
-            <a:r>
-              <a:rPr>
-                <a:solidFill>
-                  <a:srgbClr val="003B4F"/>
-                </a:solidFill>
-                <a:latin typeface="Courier"/>
-              </a:rPr>
-              <a:t> </a:t>
-            </a:r>
-            <a:r>
-              <a:rPr>
-                <a:solidFill>
-                  <a:srgbClr val="AD0000"/>
-                </a:solidFill>
-                <a:latin typeface="Courier"/>
-              </a:rPr>
-              <a:t>1</a:t>
-            </a:r>
-            <a:r>
-              <a:rPr>
-                <a:solidFill>
-                  <a:srgbClr val="003B4F"/>
-                </a:solidFill>
-                <a:latin typeface="Courier"/>
-              </a:rPr>
-              <a:t>))</a:t>
-            </a:r>
-          </a:p>
-        </p:txBody>
-      </p:sp>
-      <p:graphicFrame>
-        <p:nvGraphicFramePr>
-          <p:cNvPr id="6" name="Content Placeholder 5"/>
-          <p:cNvGraphicFramePr>
-            <a:graphicFrameLocks noGrp="1"/>
-          </p:cNvGraphicFramePr>
-          <p:nvPr>
-            <p:ph idx="1"/>
-          </p:nvPr>
-        </p:nvGraphicFramePr>
-        <p:xfrm>
-          <a:off x="4635500" y="1625600"/>
-          <a:ext cx="4038600" cy="2959100"/>
-        </p:xfrm>
-        <a:graphic>
-          <a:graphicData uri="http://schemas.openxmlformats.org/drawingml/2006/table">
-            <a:tbl>
-              <a:tblPr firstRow="1" bandRow="1">
-                <a:tableStyleId>{5C22544A-7EE6-4342-B048-85BDC9FD1C3A}</a:tableStyleId>
-              </a:tblPr>
-              <a:tblGrid>
-                <a:gridCol w="1346200"/>
-                <a:gridCol w="1346200"/>
-                <a:gridCol w="1346200"/>
-              </a:tblGrid>
-              <a:tr h="0">
-                <a:tc>
-                  <a:txBody>
-                    <a:bodyPr/>
-                    <a:lstStyle/>
-                    <a:p>
-                      <a:endParaRPr/>
-                    </a:p>
-                  </a:txBody>
-                  <a:tcPr/>
-                </a:tc>
-                <a:tc>
-                  <a:txBody>
-                    <a:bodyPr/>
-                    <a:lstStyle/>
-                    <a:p>
-                      <a:pPr lvl="0" indent="0" marL="0" algn="ctr">
-                        <a:buNone/>
-                      </a:pPr>
-                      <a:r>
-                        <a:rPr/>
-                        <a:t>No covariate adj.</a:t>
-                      </a:r>
-                    </a:p>
-                  </a:txBody>
-                  <a:tcPr/>
-                </a:tc>
-                <a:tc>
-                  <a:txBody>
-                    <a:bodyPr/>
-                    <a:lstStyle/>
-                    <a:p>
-                      <a:pPr lvl="0" indent="0" marL="0" algn="ctr">
-                        <a:buNone/>
-                      </a:pPr>
-                      <a:r>
-                        <a:rPr/>
-                        <a:t>With covariate adj.</a:t>
-                      </a:r>
-                    </a:p>
-                  </a:txBody>
-                  <a:tcPr/>
-                </a:tc>
-              </a:tr>
-              <a:tr h="0">
-                <a:tc>
-                  <a:txBody>
-                    <a:bodyPr/>
-                    <a:lstStyle/>
-                    <a:p>
-                      <a:pPr lvl="0" indent="0" marL="0" algn="l">
-                        <a:buNone/>
-                      </a:pPr>
-                      <a:r>
-                        <a:rPr/>
-                        <a:t>(Intercept)</a:t>
-                      </a:r>
-                    </a:p>
-                  </a:txBody>
-                </a:tc>
-                <a:tc>
-                  <a:txBody>
-                    <a:bodyPr/>
-                    <a:lstStyle/>
-                    <a:p>
-                      <a:pPr lvl="0" indent="0" marL="0" algn="ctr">
-                        <a:buNone/>
-                      </a:pPr>
-                      <a:r>
-                        <a:rPr/>
-                        <a:t>19645.713***</a:t>
-                      </a:r>
-                    </a:p>
-                  </a:txBody>
-                </a:tc>
-                <a:tc>
-                  <a:txBody>
-                    <a:bodyPr/>
-                    <a:lstStyle/>
-                    <a:p>
-                      <a:pPr lvl="0" indent="0" marL="0" algn="ctr">
-                        <a:buNone/>
-                      </a:pPr>
-                      <a:r>
-                        <a:rPr/>
-                        <a:t>29385.742***</a:t>
-                      </a:r>
-                    </a:p>
-                  </a:txBody>
-                </a:tc>
-              </a:tr>
-              <a:tr h="0">
-                <a:tc>
-                  <a:txBody>
-                    <a:bodyPr/>
-                    <a:lstStyle/>
-                    <a:p>
-                      <a:endParaRPr/>
-                    </a:p>
-                  </a:txBody>
-                </a:tc>
-                <a:tc>
-                  <a:txBody>
-                    <a:bodyPr/>
-                    <a:lstStyle/>
-                    <a:p>
-                      <a:pPr lvl="0" indent="0" marL="0" algn="ctr">
-                        <a:buNone/>
-                      </a:pPr>
-                      <a:r>
-                        <a:rPr/>
-                        <a:t>(470.093)</a:t>
-                      </a:r>
-                    </a:p>
-                  </a:txBody>
-                </a:tc>
-                <a:tc>
-                  <a:txBody>
-                    <a:bodyPr/>
-                    <a:lstStyle/>
-                    <a:p>
-                      <a:pPr lvl="0" indent="0" marL="0" algn="ctr">
-                        <a:buNone/>
-                      </a:pPr>
-                      <a:r>
-                        <a:rPr/>
-                        <a:t>(671.841)</a:t>
-                      </a:r>
-                    </a:p>
-                  </a:txBody>
-                </a:tc>
-              </a:tr>
-              <a:tr h="0">
-                <a:tc>
-                  <a:txBody>
-                    <a:bodyPr/>
-                    <a:lstStyle/>
-                    <a:p>
-                      <a:pPr lvl="0" indent="0" marL="0" algn="l">
-                        <a:buNone/>
-                      </a:pPr>
-                      <a:r>
-                        <a:rPr/>
-                        <a:t>enrolled_rp</a:t>
-                      </a:r>
-                    </a:p>
-                  </a:txBody>
-                </a:tc>
-                <a:tc>
-                  <a:txBody>
-                    <a:bodyPr/>
-                    <a:lstStyle/>
-                    <a:p>
-                      <a:pPr lvl="0" indent="0" marL="0" algn="ctr">
-                        <a:buNone/>
-                      </a:pPr>
-                      <a:r>
-                        <a:rPr/>
-                        <a:t>−9499.769***</a:t>
-                      </a:r>
-                    </a:p>
-                  </a:txBody>
-                </a:tc>
-                <a:tc>
-                  <a:txBody>
-                    <a:bodyPr/>
-                    <a:lstStyle/>
-                    <a:p>
-                      <a:pPr lvl="0" indent="0" marL="0" algn="ctr">
-                        <a:buNone/>
-                      </a:pPr>
-                      <a:r>
-                        <a:rPr/>
-                        <a:t>−9828.779***</a:t>
-                      </a:r>
-                    </a:p>
-                  </a:txBody>
-                </a:tc>
-              </a:tr>
-              <a:tr h="0">
-                <a:tc>
-                  <a:txBody>
-                    <a:bodyPr/>
-                    <a:lstStyle/>
-                    <a:p>
-                      <a:endParaRPr/>
-                    </a:p>
-                  </a:txBody>
-                </a:tc>
-                <a:tc>
-                  <a:txBody>
-                    <a:bodyPr/>
-                    <a:lstStyle/>
-                    <a:p>
-                      <a:pPr lvl="0" indent="0" marL="0" algn="ctr">
-                        <a:buNone/>
-                      </a:pPr>
-                      <a:r>
-                        <a:rPr/>
-                        <a:t>(1142.234)</a:t>
-                      </a:r>
-                    </a:p>
-                  </a:txBody>
-                </a:tc>
-                <a:tc>
-                  <a:txBody>
-                    <a:bodyPr/>
-                    <a:lstStyle/>
-                    <a:p>
-                      <a:pPr lvl="0" indent="0" marL="0" algn="ctr">
-                        <a:buNone/>
-                      </a:pPr>
-                      <a:r>
-                        <a:rPr/>
-                        <a:t>(946.697)</a:t>
-                      </a:r>
-                    </a:p>
-                  </a:txBody>
-                </a:tc>
-              </a:tr>
-              <a:tr h="0">
-                <a:tc>
-                  <a:txBody>
-                    <a:bodyPr/>
-                    <a:lstStyle/>
-                    <a:p>
-                      <a:pPr lvl="0" indent="0" marL="0" algn="l">
-                        <a:buNone/>
-                      </a:pPr>
-                      <a:r>
-                        <a:rPr/>
-                        <a:t>age_manager</a:t>
-                      </a:r>
-                    </a:p>
-                  </a:txBody>
-                </a:tc>
-                <a:tc>
-                  <a:txBody>
-                    <a:bodyPr/>
-                    <a:lstStyle/>
-                    <a:p>
-                      <a:endParaRPr/>
-                    </a:p>
-                  </a:txBody>
-                </a:tc>
-                <a:tc>
-                  <a:txBody>
-                    <a:bodyPr/>
-                    <a:lstStyle/>
-                    <a:p>
-                      <a:pPr lvl="0" indent="0" marL="0" algn="ctr">
-                        <a:buNone/>
-                      </a:pPr>
-                      <a:r>
-                        <a:rPr/>
-                        <a:t>73.042***</a:t>
-                      </a:r>
-                    </a:p>
-                  </a:txBody>
-                </a:tc>
-              </a:tr>
-              <a:tr h="0">
-                <a:tc>
-                  <a:txBody>
-                    <a:bodyPr/>
-                    <a:lstStyle/>
-                    <a:p>
-                      <a:endParaRPr/>
-                    </a:p>
-                  </a:txBody>
-                </a:tc>
-                <a:tc>
-                  <a:txBody>
-                    <a:bodyPr/>
-                    <a:lstStyle/>
-                    <a:p>
-                      <a:endParaRPr/>
-                    </a:p>
-                  </a:txBody>
-                </a:tc>
-                <a:tc>
-                  <a:txBody>
-                    <a:bodyPr/>
-                    <a:lstStyle/>
-                    <a:p>
-                      <a:pPr lvl="0" indent="0" marL="0" algn="ctr">
-                        <a:buNone/>
-                      </a:pPr>
-                      <a:r>
-                        <a:rPr/>
-                        <a:t>(14.061)</a:t>
-                      </a:r>
-                    </a:p>
-                  </a:txBody>
-                </a:tc>
-              </a:tr>
-              <a:tr h="0">
-                <a:tc>
-                  <a:txBody>
-                    <a:bodyPr/>
-                    <a:lstStyle/>
-                    <a:p>
-                      <a:pPr lvl="0" indent="0" marL="0" algn="l">
-                        <a:buNone/>
-                      </a:pPr>
-                      <a:r>
-                        <a:rPr/>
-                        <a:t>age_deputy</a:t>
-                      </a:r>
-                    </a:p>
-                  </a:txBody>
-                </a:tc>
-                <a:tc>
-                  <a:txBody>
-                    <a:bodyPr/>
-                    <a:lstStyle/>
-                    <a:p>
-                      <a:endParaRPr/>
-                    </a:p>
-                  </a:txBody>
-                </a:tc>
-                <a:tc>
-                  <a:txBody>
-                    <a:bodyPr/>
-                    <a:lstStyle/>
-                    <a:p>
-                      <a:pPr lvl="0" indent="0" marL="0" algn="ctr">
-                        <a:buNone/>
-                      </a:pPr>
-                      <a:r>
-                        <a:rPr/>
-                        <a:t>−10.314</a:t>
-                      </a:r>
-                    </a:p>
-                  </a:txBody>
-                </a:tc>
-              </a:tr>
-              <a:tr h="0">
-                <a:tc>
-                  <a:txBody>
-                    <a:bodyPr/>
-                    <a:lstStyle/>
-                    <a:p>
-                      <a:endParaRPr/>
-                    </a:p>
-                  </a:txBody>
-                </a:tc>
-                <a:tc>
-                  <a:txBody>
-                    <a:bodyPr/>
-                    <a:lstStyle/>
-                    <a:p>
-                      <a:endParaRPr/>
-                    </a:p>
-                  </a:txBody>
-                </a:tc>
-                <a:tc>
-                  <a:txBody>
-                    <a:bodyPr/>
-                    <a:lstStyle/>
-                    <a:p>
-                      <a:pPr lvl="0" indent="0" marL="0" algn="ctr">
-                        <a:buNone/>
-                      </a:pPr>
-                      <a:r>
-                        <a:rPr/>
-                        <a:t>(16.713)</a:t>
-                      </a:r>
-                    </a:p>
-                  </a:txBody>
-                </a:tc>
-              </a:tr>
-              <a:tr h="0">
-                <a:tc>
-                  <a:txBody>
-                    <a:bodyPr/>
-                    <a:lstStyle/>
-                    <a:p>
-                      <a:pPr lvl="0" indent="0" marL="0" algn="l">
-                        <a:buNone/>
-                      </a:pPr>
-                      <a:r>
-                        <a:rPr/>
-                        <a:t>female_manager</a:t>
-                      </a:r>
-                    </a:p>
-                  </a:txBody>
-                </a:tc>
-                <a:tc>
-                  <a:txBody>
-                    <a:bodyPr/>
-                    <a:lstStyle/>
-                    <a:p>
-                      <a:endParaRPr/>
-                    </a:p>
-                  </a:txBody>
-                </a:tc>
-                <a:tc>
-                  <a:txBody>
-                    <a:bodyPr/>
-                    <a:lstStyle/>
-                    <a:p>
-                      <a:pPr lvl="0" indent="0" marL="0" algn="ctr">
-                        <a:buNone/>
-                      </a:pPr>
-                      <a:r>
-                        <a:rPr/>
-                        <a:t>972.575*</a:t>
-                      </a:r>
-                    </a:p>
-                  </a:txBody>
-                </a:tc>
-              </a:tr>
-              <a:tr h="0">
-                <a:tc>
-                  <a:txBody>
-                    <a:bodyPr/>
-                    <a:lstStyle/>
-                    <a:p>
-                      <a:endParaRPr/>
-                    </a:p>
-                  </a:txBody>
-                </a:tc>
-                <a:tc>
-                  <a:txBody>
-                    <a:bodyPr/>
-                    <a:lstStyle/>
-                    <a:p>
-                      <a:endParaRPr/>
-                    </a:p>
-                  </a:txBody>
-                </a:tc>
-                <a:tc>
-                  <a:txBody>
-                    <a:bodyPr/>
-                    <a:lstStyle/>
-                    <a:p>
-                      <a:pPr lvl="0" indent="0" marL="0" algn="ctr">
-                        <a:buNone/>
-                      </a:pPr>
-                      <a:r>
-                        <a:rPr/>
-                        <a:t>(457.095)</a:t>
-                      </a:r>
-                    </a:p>
-                  </a:txBody>
-                </a:tc>
-              </a:tr>
-              <a:tr h="0">
-                <a:tc>
-                  <a:txBody>
-                    <a:bodyPr/>
-                    <a:lstStyle/>
-                    <a:p>
-                      <a:pPr lvl="0" indent="0" marL="0" algn="l">
-                        <a:buNone/>
-                      </a:pPr>
-                      <a:r>
-                        <a:rPr/>
-                        <a:t>foreign_owned</a:t>
-                      </a:r>
-                    </a:p>
-                  </a:txBody>
-                </a:tc>
-                <a:tc>
-                  <a:txBody>
-                    <a:bodyPr/>
-                    <a:lstStyle/>
-                    <a:p>
-                      <a:endParaRPr/>
-                    </a:p>
-                  </a:txBody>
-                </a:tc>
-                <a:tc>
-                  <a:txBody>
-                    <a:bodyPr/>
-                    <a:lstStyle/>
-                    <a:p>
-                      <a:pPr lvl="0" indent="0" marL="0" algn="ctr">
-                        <a:buNone/>
-                      </a:pPr>
-                      <a:r>
-                        <a:rPr/>
-                        <a:t>−2277.024***</a:t>
-                      </a:r>
-                    </a:p>
-                  </a:txBody>
-                </a:tc>
-              </a:tr>
-              <a:tr h="0">
-                <a:tc>
-                  <a:txBody>
-                    <a:bodyPr/>
-                    <a:lstStyle/>
-                    <a:p>
-                      <a:endParaRPr/>
-                    </a:p>
-                  </a:txBody>
-                </a:tc>
-                <a:tc>
-                  <a:txBody>
-                    <a:bodyPr/>
-                    <a:lstStyle/>
-                    <a:p>
-                      <a:endParaRPr/>
-                    </a:p>
-                  </a:txBody>
-                </a:tc>
-                <a:tc>
-                  <a:txBody>
-                    <a:bodyPr/>
-                    <a:lstStyle/>
-                    <a:p>
-                      <a:pPr lvl="0" indent="0" marL="0" algn="ctr">
-                        <a:buNone/>
-                      </a:pPr>
-                      <a:r>
-                        <a:rPr/>
-                        <a:t>(387.516)</a:t>
-                      </a:r>
-                    </a:p>
-                  </a:txBody>
-                </a:tc>
-              </a:tr>
-              <a:tr h="0">
-                <a:tc>
-                  <a:txBody>
-                    <a:bodyPr/>
-                    <a:lstStyle/>
-                    <a:p>
-                      <a:pPr lvl="0" indent="0" marL="0" algn="l">
-                        <a:buNone/>
-                      </a:pPr>
-                      <a:r>
-                        <a:rPr/>
-                        <a:t>staff_size</a:t>
-                      </a:r>
-                    </a:p>
-                  </a:txBody>
-                </a:tc>
-                <a:tc>
-                  <a:txBody>
-                    <a:bodyPr/>
-                    <a:lstStyle/>
-                    <a:p>
-                      <a:endParaRPr/>
-                    </a:p>
-                  </a:txBody>
-                </a:tc>
-                <a:tc>
-                  <a:txBody>
-                    <a:bodyPr/>
-                    <a:lstStyle/>
-                    <a:p>
-                      <a:pPr lvl="0" indent="0" marL="0" algn="ctr">
-                        <a:buNone/>
-                      </a:pPr>
-                      <a:r>
-                        <a:rPr/>
-                        <a:t>−2029.566***</a:t>
-                      </a:r>
-                    </a:p>
-                  </a:txBody>
-                </a:tc>
-              </a:tr>
-              <a:tr h="0">
-                <a:tc>
-                  <a:txBody>
-                    <a:bodyPr/>
-                    <a:lstStyle/>
-                    <a:p>
-                      <a:endParaRPr/>
-                    </a:p>
-                  </a:txBody>
-                </a:tc>
-                <a:tc>
-                  <a:txBody>
-                    <a:bodyPr/>
-                    <a:lstStyle/>
-                    <a:p>
-                      <a:endParaRPr/>
-                    </a:p>
-                  </a:txBody>
-                </a:tc>
-                <a:tc>
-                  <a:txBody>
-                    <a:bodyPr/>
-                    <a:lstStyle/>
-                    <a:p>
-                      <a:pPr lvl="0" indent="0" marL="0" algn="ctr">
-                        <a:buNone/>
-                      </a:pPr>
-                      <a:r>
-                        <a:rPr/>
-                        <a:t>(67.079)</a:t>
-                      </a:r>
-                    </a:p>
-                  </a:txBody>
-                </a:tc>
-              </a:tr>
-              <a:tr h="0">
-                <a:tc>
-                  <a:txBody>
-                    <a:bodyPr/>
-                    <a:lstStyle/>
-                    <a:p>
-                      <a:pPr lvl="0" indent="0" marL="0" algn="l">
-                        <a:buNone/>
-                      </a:pPr>
-                      <a:r>
-                        <a:rPr/>
-                        <a:t>advanced_filtration</a:t>
-                      </a:r>
-                    </a:p>
-                  </a:txBody>
-                </a:tc>
-                <a:tc>
-                  <a:txBody>
-                    <a:bodyPr/>
-                    <a:lstStyle/>
-                    <a:p>
-                      <a:endParaRPr/>
-                    </a:p>
-                  </a:txBody>
-                </a:tc>
-                <a:tc>
-                  <a:txBody>
-                    <a:bodyPr/>
-                    <a:lstStyle/>
-                    <a:p>
-                      <a:pPr lvl="0" indent="0" marL="0" algn="ctr">
-                        <a:buNone/>
-                      </a:pPr>
-                      <a:r>
-                        <a:rPr/>
-                        <a:t>−2166.238***</a:t>
-                      </a:r>
-                    </a:p>
-                  </a:txBody>
-                </a:tc>
-              </a:tr>
-              <a:tr h="0">
-                <a:tc>
-                  <a:txBody>
-                    <a:bodyPr/>
-                    <a:lstStyle/>
-                    <a:p>
-                      <a:endParaRPr/>
-                    </a:p>
-                  </a:txBody>
-                </a:tc>
-                <a:tc>
-                  <a:txBody>
-                    <a:bodyPr/>
-                    <a:lstStyle/>
-                    <a:p>
-                      <a:endParaRPr/>
-                    </a:p>
-                  </a:txBody>
-                </a:tc>
-                <a:tc>
-                  <a:txBody>
-                    <a:bodyPr/>
-                    <a:lstStyle/>
-                    <a:p>
-                      <a:pPr lvl="0" indent="0" marL="0" algn="ctr">
-                        <a:buNone/>
-                      </a:pPr>
-                      <a:r>
-                        <a:rPr/>
-                        <a:t>(263.325)</a:t>
-                      </a:r>
-                    </a:p>
-                  </a:txBody>
-                </a:tc>
-              </a:tr>
-              <a:tr h="0">
-                <a:tc>
-                  <a:txBody>
-                    <a:bodyPr/>
-                    <a:lstStyle/>
-                    <a:p>
-                      <a:pPr lvl="0" indent="0" marL="0" algn="l">
-                        <a:buNone/>
-                      </a:pPr>
-                      <a:r>
-                        <a:rPr/>
-                        <a:t>facility_area</a:t>
-                      </a:r>
-                    </a:p>
-                  </a:txBody>
-                </a:tc>
-                <a:tc>
-                  <a:txBody>
-                    <a:bodyPr/>
-                    <a:lstStyle/>
-                    <a:p>
-                      <a:endParaRPr/>
-                    </a:p>
-                  </a:txBody>
-                </a:tc>
-                <a:tc>
-                  <a:txBody>
-                    <a:bodyPr/>
-                    <a:lstStyle/>
-                    <a:p>
-                      <a:pPr lvl="0" indent="0" marL="0" algn="ctr">
-                        <a:buNone/>
-                      </a:pPr>
-                      <a:r>
-                        <a:rPr/>
-                        <a:t>102.324*</a:t>
-                      </a:r>
-                    </a:p>
-                  </a:txBody>
-                </a:tc>
-              </a:tr>
-              <a:tr h="0">
-                <a:tc>
-                  <a:txBody>
-                    <a:bodyPr/>
-                    <a:lstStyle/>
-                    <a:p>
-                      <a:endParaRPr/>
-                    </a:p>
-                  </a:txBody>
-                </a:tc>
-                <a:tc>
-                  <a:txBody>
-                    <a:bodyPr/>
-                    <a:lstStyle/>
-                    <a:p>
-                      <a:endParaRPr/>
-                    </a:p>
-                  </a:txBody>
-                </a:tc>
-                <a:tc>
-                  <a:txBody>
-                    <a:bodyPr/>
-                    <a:lstStyle/>
-                    <a:p>
-                      <a:pPr lvl="0" indent="0" marL="0" algn="ctr">
-                        <a:buNone/>
-                      </a:pPr>
-                      <a:r>
-                        <a:rPr/>
-                        <a:t>(45.673)</a:t>
-                      </a:r>
-                    </a:p>
-                  </a:txBody>
-                </a:tc>
-              </a:tr>
-              <a:tr h="0">
-                <a:tc>
-                  <a:txBody>
-                    <a:bodyPr/>
-                    <a:lstStyle/>
-                    <a:p>
-                      <a:pPr lvl="0" indent="0" marL="0" algn="l">
-                        <a:buNone/>
-                      </a:pPr>
-                      <a:r>
-                        <a:rPr/>
-                        <a:t>recycling_center_distance</a:t>
-                      </a:r>
-                    </a:p>
-                  </a:txBody>
-                </a:tc>
-                <a:tc>
-                  <a:txBody>
-                    <a:bodyPr/>
-                    <a:lstStyle/>
-                    <a:p>
-                      <a:endParaRPr/>
-                    </a:p>
-                  </a:txBody>
-                </a:tc>
-                <a:tc>
-                  <a:txBody>
-                    <a:bodyPr/>
-                    <a:lstStyle/>
-                    <a:p>
-                      <a:pPr lvl="0" indent="0" marL="0" algn="ctr">
-                        <a:buNone/>
-                      </a:pPr>
-                      <a:r>
-                        <a:rPr/>
-                        <a:t>−3.355</a:t>
-                      </a:r>
-                    </a:p>
-                  </a:txBody>
-                </a:tc>
-              </a:tr>
-              <a:tr h="0">
-                <a:tc>
-                  <a:txBody>
-                    <a:bodyPr/>
-                    <a:lstStyle/>
-                    <a:p>
-                      <a:endParaRPr/>
-                    </a:p>
-                  </a:txBody>
-                </a:tc>
-                <a:tc>
-                  <a:txBody>
-                    <a:bodyPr/>
-                    <a:lstStyle/>
-                    <a:p>
-                      <a:endParaRPr/>
-                    </a:p>
-                  </a:txBody>
-                </a:tc>
-                <a:tc>
-                  <a:txBody>
-                    <a:bodyPr/>
-                    <a:lstStyle/>
-                    <a:p>
-                      <a:pPr lvl="0" indent="0" marL="0" algn="ctr">
-                        <a:buNone/>
-                      </a:pPr>
-                      <a:r>
-                        <a:rPr/>
-                        <a:t>(4.678)</a:t>
-                      </a:r>
-                    </a:p>
-                  </a:txBody>
-                </a:tc>
-              </a:tr>
-              <a:tr h="0">
-                <a:tc>
-                  <a:txBody>
-                    <a:bodyPr/>
-                    <a:lstStyle/>
-                    <a:p>
-                      <a:pPr lvl="0" indent="0" marL="0" algn="l">
-                        <a:buNone/>
-                      </a:pPr>
-                      <a:r>
-                        <a:rPr/>
-                        <a:t>Num.Obs.</a:t>
-                      </a:r>
-                    </a:p>
-                  </a:txBody>
-                </a:tc>
-                <a:tc>
-                  <a:txBody>
-                    <a:bodyPr/>
-                    <a:lstStyle/>
-                    <a:p>
-                      <a:pPr lvl="0" indent="0" marL="0" algn="ctr">
-                        <a:buNone/>
-                      </a:pPr>
-                      <a:r>
-                        <a:rPr/>
-                        <a:t>9914</a:t>
-                      </a:r>
-                    </a:p>
-                  </a:txBody>
-                </a:tc>
-                <a:tc>
-                  <a:txBody>
-                    <a:bodyPr/>
-                    <a:lstStyle/>
-                    <a:p>
-                      <a:pPr lvl="0" indent="0" marL="0" algn="ctr">
-                        <a:buNone/>
-                      </a:pPr>
-                      <a:r>
-                        <a:rPr/>
-                        <a:t>9914</a:t>
-                      </a:r>
-                    </a:p>
-                  </a:txBody>
-                </a:tc>
-              </a:tr>
-              <a:tr h="0">
-                <a:tc>
-                  <a:txBody>
-                    <a:bodyPr/>
-                    <a:lstStyle/>
-                    <a:p>
-                      <a:pPr lvl="0" indent="0" marL="0" algn="l">
-                        <a:buNone/>
-                      </a:pPr>
-                      <a:r>
-                        <a:rPr/>
-                        <a:t>R2</a:t>
-                      </a:r>
-                    </a:p>
-                  </a:txBody>
-                </a:tc>
-                <a:tc>
-                  <a:txBody>
-                    <a:bodyPr/>
-                    <a:lstStyle/>
-                    <a:p>
-                      <a:pPr lvl="0" indent="0" marL="0" algn="ctr">
-                        <a:buNone/>
-                      </a:pPr>
-                      <a:r>
-                        <a:rPr/>
-                        <a:t>0.222</a:t>
-                      </a:r>
-                    </a:p>
-                  </a:txBody>
-                </a:tc>
-                <a:tc>
-                  <a:txBody>
-                    <a:bodyPr/>
-                    <a:lstStyle/>
-                    <a:p>
-                      <a:pPr lvl="0" indent="0" marL="0" algn="ctr">
-                        <a:buNone/>
-                      </a:pPr>
-                      <a:r>
-                        <a:rPr/>
-                        <a:t>0.405</a:t>
-                      </a:r>
-                    </a:p>
-                  </a:txBody>
-                </a:tc>
-              </a:tr>
-              <a:tr h="0">
-                <a:tc>
-                  <a:txBody>
-                    <a:bodyPr/>
-                    <a:lstStyle/>
-                    <a:p>
-                      <a:pPr lvl="0" indent="0" marL="0" algn="l">
-                        <a:buNone/>
-                      </a:pPr>
-                      <a:r>
-                        <a:rPr/>
-                        <a:t>R2 Adj.</a:t>
-                      </a:r>
-                    </a:p>
-                  </a:txBody>
-                </a:tc>
-                <a:tc>
-                  <a:txBody>
-                    <a:bodyPr/>
-                    <a:lstStyle/>
-                    <a:p>
-                      <a:pPr lvl="0" indent="0" marL="0" algn="ctr">
-                        <a:buNone/>
-                      </a:pPr>
-                      <a:r>
-                        <a:rPr/>
-                        <a:t>0.222</a:t>
-                      </a:r>
-                    </a:p>
-                  </a:txBody>
-                </a:tc>
-                <a:tc>
-                  <a:txBody>
-                    <a:bodyPr/>
-                    <a:lstStyle/>
-                    <a:p>
-                      <a:pPr lvl="0" indent="0" marL="0" algn="ctr">
-                        <a:buNone/>
-                      </a:pPr>
-                      <a:r>
-                        <a:rPr/>
-                        <a:t>0.404</a:t>
-                      </a:r>
-                    </a:p>
-                  </a:txBody>
-                </a:tc>
-              </a:tr>
-              <a:tr h="0">
-                <a:tc>
-                  <a:txBody>
-                    <a:bodyPr/>
-                    <a:lstStyle/>
-                    <a:p>
-                      <a:pPr lvl="0" indent="0" marL="0" algn="l">
-                        <a:buNone/>
-                      </a:pPr>
-                      <a:r>
-                        <a:rPr/>
-                        <a:t> + p &lt; 0.1, * p &lt; 0.05, ** p &lt; 0.01, *** p &lt; 0.001</a:t>
-                      </a:r>
-                    </a:p>
-                  </a:txBody>
-                </a:tc>
-                <a:tc>
-                  <a:txBody>
-                    <a:bodyPr/>
-                    <a:lstStyle/>
-                    <a:p>
-                      <a:endParaRPr/>
-                    </a:p>
-                  </a:txBody>
-                </a:tc>
-                <a:tc>
-                  <a:txBody>
-                    <a:bodyPr/>
-                    <a:lstStyle/>
-                    <a:p>
-                      <a:endParaRPr/>
-                    </a:p>
-                  </a:txBody>
-                </a:tc>
-              </a:tr>
-            </a:tbl>
-          </a:graphicData>
-        </a:graphic>
-      </p:graphicFrame>
-      <p:sp>
-        <p:nvSpPr>
-          <p:cNvPr id="6" name="Content Placeholder 5"/>
-          <p:cNvSpPr>
-            <a:spLocks noGrp="1"/>
-          </p:cNvSpPr>
-          <p:nvPr>
-            <p:ph idx="4" sz="quarter"/>
-          </p:nvPr>
-        </p:nvSpPr>
-        <p:spPr/>
-        <p:txBody>
-          <a:bodyPr/>
-          <a:lstStyle/>
-          <a:p>
-            <a:pPr lvl="0" indent="0" marL="0">
-              <a:buNone/>
-            </a:pPr>
-            <a:r>
-              <a:rPr b="1"/>
-              <a:t>LATE Explanation</a:t>
-            </a:r>
-            <a:r>
-              <a:rPr/>
-              <a:t>:</a:t>
-            </a:r>
-          </a:p>
-          <a:p>
-            <a:pPr lvl="0"/>
-            <a:r>
-              <a:rPr/>
-              <a:t>Another way of calculating is: LATE = ITT / First Stage = -3874 / 0.408 = -9500</a:t>
-            </a:r>
-          </a:p>
-          <a:p>
-            <a:pPr lvl="0"/>
-            <a:r>
-              <a:rPr/>
-              <a:t>This estimates the effect for “compliers”: industries that enrolled because of the promotion but would not have enrolled otherwise</a:t>
-            </a:r>
-          </a:p>
-        </p:txBody>
-      </p:sp>
-    </p:spTree>
-  </p:cSld>
-  <p:timing>
-    <p:tnLst>
-      <p:par>
-        <p:cTn id="1" dur="indefinite" restart="never" nodeType="tmRoot">
-          <p:childTnLst>
-            <p:seq concurrent="1" nextAc="seek">
-              <p:cTn id="2" dur="indefinite" nodeType="mainSeq">
-                <p:childTnLst>
-                  <p:par>
-                    <p:cTn id="3" fill="hold">
-                      <p:stCondLst>
-                        <p:cond delay="indefinite"/>
-                      </p:stCondLst>
-                      <p:childTnLst>
-                        <p:par>
-                          <p:cTn id="4" fill="hold">
-                            <p:stCondLst>
-                              <p:cond delay="0"/>
-                            </p:stCondLst>
-                            <p:childTnLst>
-                              <p:par>
-                                <p:cTn id="5" presetID="1" presetClass="entr" presetSubtype="0" fill="hold" grpId="0" nodeType="clickEffect">
-                                  <p:stCondLst>
-                                    <p:cond delay="0"/>
-                                  </p:stCondLst>
-                                  <p:childTnLst>
-                                    <p:set>
-                                      <p:cBhvr>
-                                        <p:cTn id="6" dur="1" fill="hold">
-                                          <p:stCondLst>
-                                            <p:cond delay="0"/>
-                                          </p:stCondLst>
-                                        </p:cTn>
-                                        <p:tgtEl>
-                                          <p:spTgt spid="6">
-                                            <p:txEl>
-                                              <p:pRg st="1" end="1"/>
-                                            </p:txEl>
-                                          </p:spTgt>
-                                        </p:tgtEl>
-                                        <p:attrNameLst>
-                                          <p:attrName>style.visibility</p:attrName>
-                                        </p:attrNameLst>
-                                      </p:cBhvr>
-                                      <p:to>
-                                        <p:strVal val="visible"/>
-                                      </p:to>
-                                    </p:set>
-                                  </p:childTnLst>
-                                </p:cTn>
-                              </p:par>
-                            </p:childTnLst>
-                          </p:cTn>
-                        </p:par>
-                      </p:childTnLst>
-                    </p:cTn>
-                  </p:par>
-                  <p:par>
-                    <p:cTn id="7" fill="hold">
-                      <p:stCondLst>
-                        <p:cond delay="indefinite"/>
-                      </p:stCondLst>
-                      <p:childTnLst>
-                        <p:par>
-                          <p:cTn id="8" fill="hold">
-                            <p:stCondLst>
-                              <p:cond delay="0"/>
-                            </p:stCondLst>
-                            <p:childTnLst>
-                              <p:par>
-                                <p:cTn id="9" presetID="1" presetClass="entr" presetSubtype="0" fill="hold" grpId="0" nodeType="clickEffect">
-                                  <p:stCondLst>
-                                    <p:cond delay="0"/>
-                                  </p:stCondLst>
-                                  <p:childTnLst>
-                                    <p:set>
-                                      <p:cBhvr>
-                                        <p:cTn id="10" dur="1" fill="hold">
-                                          <p:stCondLst>
-                                            <p:cond delay="0"/>
-                                          </p:stCondLst>
-                                        </p:cTn>
-                                        <p:tgtEl>
-                                          <p:spTgt spid="6">
-                                            <p:txEl>
-                                              <p:pRg st="2" end="2"/>
-                                            </p:txEl>
-                                          </p:spTgt>
-                                        </p:tgtEl>
-                                        <p:attrNameLst>
-                                          <p:attrName>style.visibility</p:attrName>
-                                        </p:attrNameLst>
-                                      </p:cBhvr>
-                                      <p:to>
-                                        <p:strVal val="visible"/>
-                                      </p:to>
-                                    </p:set>
-                                  </p:childTnLst>
-                                </p:cTn>
-                              </p:par>
-                            </p:childTnLst>
-                          </p:cTn>
-                        </p:par>
-                      </p:childTnLst>
-                    </p:cTn>
-                  </p:par>
-                </p:childTnLst>
-              </p:cTn>
-              <p:prevCondLst>
-                <p:cond evt="onPrev" delay="0">
-                  <p:tgtEl>
-                    <p:sldTgt/>
-                  </p:tgtEl>
-                </p:cond>
-              </p:prevCondLst>
-              <p:nextCondLst>
-                <p:cond evt="onNext" delay="0">
-                  <p:tgtEl>
-                    <p:sldTgt/>
-                  </p:tgtEl>
-                </p:cond>
-              </p:nextCondLst>
-            </p:seq>
-          </p:childTnLst>
-        </p:cTn>
-      </p:par>
-    </p:tnLst>
-    <p:bldLst>
-      <p:bldP spid="6" grpId="0" uiExpand="1" build="p"/>
-    </p:bldLst>
-  </p:timing>
-</p:sld>
-</file>
-
 <file path=ppt/slides/slide8.xml><?xml version="1.0" encoding="utf-8"?>
 <p:sld xmlns:a="http://schemas.openxmlformats.org/drawingml/2006/main" xmlns:r="http://schemas.openxmlformats.org/officeDocument/2006/relationships" xmlns:p="http://schemas.openxmlformats.org/presentationml/2006/main">
   <p:cSld>
@@ -11545,7 +10774,7 @@
             </a:pPr>
             <a:r>
               <a:rPr/>
-              <a:t>Understanding LATE: The Complier Effect</a:t>
+              <a:t>3. Local Average Treatment Effect (LATE)</a:t>
             </a:r>
           </a:p>
         </p:txBody>
@@ -11570,7 +10799,7 @@
             </a:pPr>
             <a:r>
               <a:rPr/>
-              <a:t>The IV estimate (LATE) applies to compliers only:</a:t>
+              <a:t>We still don’t know the effect of the participation on outcomes, which is what we want. To get the estimate of interest (effect of participation on outcomes), we need to divide the “reduced form” (the effect of encouragement on outcomes) by the first stage (effect of encouragement on participation).</a:t>
             </a:r>
           </a:p>
         </p:txBody>
@@ -11612,469 +10841,1806 @@
           <a:bodyPr/>
           <a:lstStyle/>
           <a:p>
-            <a:pPr lvl="0" indent="0" marL="0">
+            <a:pPr lvl="0" indent="0">
               <a:buNone/>
             </a:pPr>
             <a:r>
-              <a:rPr b="1"/>
-              <a:t>Types of industries:</a:t>
-            </a:r>
-          </a:p>
-          <a:p>
-            <a:pPr lvl="0"/>
-            <a:r>
-              <a:rPr/>
-              <a:t>Always-takers: Enroll regardless of promotion (8%)</a:t>
-            </a:r>
-          </a:p>
-          <a:p>
-            <a:pPr lvl="0"/>
-            <a:r>
-              <a:rPr/>
-              <a:t>Compliers: Enroll only with promotion (41%)</a:t>
-            </a:r>
-          </a:p>
-          <a:p>
-            <a:pPr lvl="0"/>
-            <a:r>
-              <a:rPr/>
-              <a:t>Never-takers: Don’t enroll regardless of promotion (51%)</a:t>
-            </a:r>
-          </a:p>
-          <a:p>
-            <a:pPr lvl="0"/>
-            <a:r>
-              <a:rPr/>
-              <a:t>Defiers: Enroll only without promotion (0% by assumption)</a:t>
+              <a:rPr>
+                <a:solidFill>
+                  <a:srgbClr val="5E5E5E"/>
+                </a:solidFill>
+                <a:latin typeface="Courier"/>
+              </a:rPr>
+              <a:t># Estimate LATE using IV regression (2SLS)</a:t>
+            </a:r>
+            <a:br/>
+            <a:r>
+              <a:rPr>
+                <a:solidFill>
+                  <a:srgbClr val="003B4F"/>
+                </a:solidFill>
+                <a:latin typeface="Courier"/>
+              </a:rPr>
+              <a:t>m_late &lt;- </a:t>
+            </a:r>
+            <a:r>
+              <a:rPr>
+                <a:solidFill>
+                  <a:srgbClr val="4758AB"/>
+                </a:solidFill>
+                <a:latin typeface="Courier"/>
+              </a:rPr>
+              <a:t>iv_robust</a:t>
+            </a:r>
+            <a:r>
+              <a:rPr>
+                <a:solidFill>
+                  <a:srgbClr val="003B4F"/>
+                </a:solidFill>
+                <a:latin typeface="Courier"/>
+              </a:rPr>
+              <a:t>(waste_management_costs </a:t>
+            </a:r>
+            <a:r>
+              <a:rPr>
+                <a:solidFill>
+                  <a:srgbClr val="5E5E5E"/>
+                </a:solidFill>
+                <a:latin typeface="Courier"/>
+              </a:rPr>
+              <a:t>~</a:t>
+            </a:r>
+            <a:r>
+              <a:rPr>
+                <a:solidFill>
+                  <a:srgbClr val="003B4F"/>
+                </a:solidFill>
+                <a:latin typeface="Courier"/>
+              </a:rPr>
+              <a:t> enrolled_rp </a:t>
+            </a:r>
+            <a:r>
+              <a:rPr>
+                <a:solidFill>
+                  <a:srgbClr val="5E5E5E"/>
+                </a:solidFill>
+                <a:latin typeface="Courier"/>
+              </a:rPr>
+              <a:t>|</a:t>
+            </a:r>
+            <a:br/>
+            <a:r>
+              <a:rPr>
+                <a:solidFill>
+                  <a:srgbClr val="003B4F"/>
+                </a:solidFill>
+                <a:latin typeface="Courier"/>
+              </a:rPr>
+              <a:t>                     promotion_zone,</a:t>
+            </a:r>
+            <a:br/>
+            <a:r>
+              <a:rPr>
+                <a:solidFill>
+                  <a:srgbClr val="003B4F"/>
+                </a:solidFill>
+                <a:latin typeface="Courier"/>
+              </a:rPr>
+              <a:t>                   </a:t>
+            </a:r>
+            <a:r>
+              <a:rPr>
+                <a:solidFill>
+                  <a:srgbClr val="657422"/>
+                </a:solidFill>
+                <a:latin typeface="Courier"/>
+              </a:rPr>
+              <a:t>clusters =</a:t>
+            </a:r>
+            <a:r>
+              <a:rPr>
+                <a:solidFill>
+                  <a:srgbClr val="003B4F"/>
+                </a:solidFill>
+                <a:latin typeface="Courier"/>
+              </a:rPr>
+              <a:t> zone_identifier,</a:t>
+            </a:r>
+            <a:br/>
+            <a:r>
+              <a:rPr>
+                <a:solidFill>
+                  <a:srgbClr val="003B4F"/>
+                </a:solidFill>
+                <a:latin typeface="Courier"/>
+              </a:rPr>
+              <a:t>                   </a:t>
+            </a:r>
+            <a:r>
+              <a:rPr>
+                <a:solidFill>
+                  <a:srgbClr val="657422"/>
+                </a:solidFill>
+                <a:latin typeface="Courier"/>
+              </a:rPr>
+              <a:t>data =</a:t>
+            </a:r>
+            <a:r>
+              <a:rPr>
+                <a:solidFill>
+                  <a:srgbClr val="003B4F"/>
+                </a:solidFill>
+                <a:latin typeface="Courier"/>
+              </a:rPr>
+              <a:t> df </a:t>
+            </a:r>
+            <a:r>
+              <a:rPr>
+                <a:solidFill>
+                  <a:srgbClr val="5E5E5E"/>
+                </a:solidFill>
+                <a:latin typeface="Courier"/>
+              </a:rPr>
+              <a:t>%&gt;%</a:t>
+            </a:r>
+            <a:r>
+              <a:rPr>
+                <a:solidFill>
+                  <a:srgbClr val="003B4F"/>
+                </a:solidFill>
+                <a:latin typeface="Courier"/>
+              </a:rPr>
+              <a:t> </a:t>
+            </a:r>
+            <a:r>
+              <a:rPr>
+                <a:solidFill>
+                  <a:srgbClr val="4758AB"/>
+                </a:solidFill>
+                <a:latin typeface="Courier"/>
+              </a:rPr>
+              <a:t>filter</a:t>
+            </a:r>
+            <a:r>
+              <a:rPr>
+                <a:solidFill>
+                  <a:srgbClr val="003B4F"/>
+                </a:solidFill>
+                <a:latin typeface="Courier"/>
+              </a:rPr>
+              <a:t>(round </a:t>
+            </a:r>
+            <a:r>
+              <a:rPr>
+                <a:solidFill>
+                  <a:srgbClr val="5E5E5E"/>
+                </a:solidFill>
+                <a:latin typeface="Courier"/>
+              </a:rPr>
+              <a:t>==</a:t>
+            </a:r>
+            <a:r>
+              <a:rPr>
+                <a:solidFill>
+                  <a:srgbClr val="003B4F"/>
+                </a:solidFill>
+                <a:latin typeface="Courier"/>
+              </a:rPr>
+              <a:t> </a:t>
+            </a:r>
+            <a:r>
+              <a:rPr>
+                <a:solidFill>
+                  <a:srgbClr val="AD0000"/>
+                </a:solidFill>
+                <a:latin typeface="Courier"/>
+              </a:rPr>
+              <a:t>1</a:t>
+            </a:r>
+            <a:r>
+              <a:rPr>
+                <a:solidFill>
+                  <a:srgbClr val="003B4F"/>
+                </a:solidFill>
+                <a:latin typeface="Courier"/>
+              </a:rPr>
+              <a:t>))</a:t>
+            </a:r>
+            <a:br/>
+            <a:br/>
+            <a:r>
+              <a:rPr>
+                <a:solidFill>
+                  <a:srgbClr val="5E5E5E"/>
+                </a:solidFill>
+                <a:latin typeface="Courier"/>
+              </a:rPr>
+              <a:t># With covariate adjustment</a:t>
+            </a:r>
+            <a:br/>
+            <a:r>
+              <a:rPr>
+                <a:solidFill>
+                  <a:srgbClr val="003B4F"/>
+                </a:solidFill>
+                <a:latin typeface="Courier"/>
+              </a:rPr>
+              <a:t>m_late_wcov &lt;- </a:t>
+            </a:r>
+            <a:r>
+              <a:rPr>
+                <a:solidFill>
+                  <a:srgbClr val="4758AB"/>
+                </a:solidFill>
+                <a:latin typeface="Courier"/>
+              </a:rPr>
+              <a:t>iv_robust</a:t>
+            </a:r>
+            <a:r>
+              <a:rPr>
+                <a:solidFill>
+                  <a:srgbClr val="003B4F"/>
+                </a:solidFill>
+                <a:latin typeface="Courier"/>
+              </a:rPr>
+              <a:t>(waste_management_costs </a:t>
+            </a:r>
+            <a:r>
+              <a:rPr>
+                <a:solidFill>
+                  <a:srgbClr val="5E5E5E"/>
+                </a:solidFill>
+                <a:latin typeface="Courier"/>
+              </a:rPr>
+              <a:t>~</a:t>
+            </a:r>
+            <a:r>
+              <a:rPr>
+                <a:solidFill>
+                  <a:srgbClr val="003B4F"/>
+                </a:solidFill>
+                <a:latin typeface="Courier"/>
+              </a:rPr>
+              <a:t> enrolled_rp </a:t>
+            </a:r>
+            <a:r>
+              <a:rPr>
+                <a:solidFill>
+                  <a:srgbClr val="5E5E5E"/>
+                </a:solidFill>
+                <a:latin typeface="Courier"/>
+              </a:rPr>
+              <a:t>+</a:t>
+            </a:r>
+            <a:r>
+              <a:rPr>
+                <a:solidFill>
+                  <a:srgbClr val="003B4F"/>
+                </a:solidFill>
+                <a:latin typeface="Courier"/>
+              </a:rPr>
+              <a:t> </a:t>
+            </a:r>
+            <a:br/>
+            <a:r>
+              <a:rPr>
+                <a:solidFill>
+                  <a:srgbClr val="003B4F"/>
+                </a:solidFill>
+                <a:latin typeface="Courier"/>
+              </a:rPr>
+              <a:t>                         age_manager </a:t>
+            </a:r>
+            <a:r>
+              <a:rPr>
+                <a:solidFill>
+                  <a:srgbClr val="5E5E5E"/>
+                </a:solidFill>
+                <a:latin typeface="Courier"/>
+              </a:rPr>
+              <a:t>+</a:t>
+            </a:r>
+            <a:r>
+              <a:rPr>
+                <a:solidFill>
+                  <a:srgbClr val="003B4F"/>
+                </a:solidFill>
+                <a:latin typeface="Courier"/>
+              </a:rPr>
+              <a:t> age_deputy </a:t>
+            </a:r>
+            <a:r>
+              <a:rPr>
+                <a:solidFill>
+                  <a:srgbClr val="5E5E5E"/>
+                </a:solidFill>
+                <a:latin typeface="Courier"/>
+              </a:rPr>
+              <a:t>+</a:t>
+            </a:r>
+            <a:br/>
+            <a:r>
+              <a:rPr>
+                <a:solidFill>
+                  <a:srgbClr val="003B4F"/>
+                </a:solidFill>
+                <a:latin typeface="Courier"/>
+              </a:rPr>
+              <a:t>                         female_manager </a:t>
+            </a:r>
+            <a:r>
+              <a:rPr>
+                <a:solidFill>
+                  <a:srgbClr val="5E5E5E"/>
+                </a:solidFill>
+                <a:latin typeface="Courier"/>
+              </a:rPr>
+              <a:t>+</a:t>
+            </a:r>
+            <a:r>
+              <a:rPr>
+                <a:solidFill>
+                  <a:srgbClr val="003B4F"/>
+                </a:solidFill>
+                <a:latin typeface="Courier"/>
+              </a:rPr>
+              <a:t> foreign_owned </a:t>
+            </a:r>
+            <a:r>
+              <a:rPr>
+                <a:solidFill>
+                  <a:srgbClr val="5E5E5E"/>
+                </a:solidFill>
+                <a:latin typeface="Courier"/>
+              </a:rPr>
+              <a:t>+</a:t>
+            </a:r>
+            <a:r>
+              <a:rPr>
+                <a:solidFill>
+                  <a:srgbClr val="003B4F"/>
+                </a:solidFill>
+                <a:latin typeface="Courier"/>
+              </a:rPr>
+              <a:t> </a:t>
+            </a:r>
+            <a:br/>
+            <a:r>
+              <a:rPr>
+                <a:solidFill>
+                  <a:srgbClr val="003B4F"/>
+                </a:solidFill>
+                <a:latin typeface="Courier"/>
+              </a:rPr>
+              <a:t>                         staff_size </a:t>
+            </a:r>
+            <a:r>
+              <a:rPr>
+                <a:solidFill>
+                  <a:srgbClr val="5E5E5E"/>
+                </a:solidFill>
+                <a:latin typeface="Courier"/>
+              </a:rPr>
+              <a:t>+</a:t>
+            </a:r>
+            <a:br/>
+            <a:r>
+              <a:rPr>
+                <a:solidFill>
+                  <a:srgbClr val="003B4F"/>
+                </a:solidFill>
+                <a:latin typeface="Courier"/>
+              </a:rPr>
+              <a:t>                         advanced_filtration </a:t>
+            </a:r>
+            <a:r>
+              <a:rPr>
+                <a:solidFill>
+                  <a:srgbClr val="5E5E5E"/>
+                </a:solidFill>
+                <a:latin typeface="Courier"/>
+              </a:rPr>
+              <a:t>+</a:t>
+            </a:r>
+            <a:r>
+              <a:rPr>
+                <a:solidFill>
+                  <a:srgbClr val="003B4F"/>
+                </a:solidFill>
+                <a:latin typeface="Courier"/>
+              </a:rPr>
+              <a:t> </a:t>
+            </a:r>
+            <a:br/>
+            <a:r>
+              <a:rPr>
+                <a:solidFill>
+                  <a:srgbClr val="003B4F"/>
+                </a:solidFill>
+                <a:latin typeface="Courier"/>
+              </a:rPr>
+              <a:t>                         facility_area </a:t>
+            </a:r>
+            <a:r>
+              <a:rPr>
+                <a:solidFill>
+                  <a:srgbClr val="5E5E5E"/>
+                </a:solidFill>
+                <a:latin typeface="Courier"/>
+              </a:rPr>
+              <a:t>+</a:t>
+            </a:r>
+            <a:br/>
+            <a:r>
+              <a:rPr>
+                <a:solidFill>
+                  <a:srgbClr val="003B4F"/>
+                </a:solidFill>
+                <a:latin typeface="Courier"/>
+              </a:rPr>
+              <a:t>                         recycling_center_distance </a:t>
+            </a:r>
+            <a:r>
+              <a:rPr>
+                <a:solidFill>
+                  <a:srgbClr val="5E5E5E"/>
+                </a:solidFill>
+                <a:latin typeface="Courier"/>
+              </a:rPr>
+              <a:t>|</a:t>
+            </a:r>
+            <a:r>
+              <a:rPr>
+                <a:solidFill>
+                  <a:srgbClr val="003B4F"/>
+                </a:solidFill>
+                <a:latin typeface="Courier"/>
+              </a:rPr>
+              <a:t> </a:t>
+            </a:r>
+            <a:br/>
+            <a:r>
+              <a:rPr>
+                <a:solidFill>
+                  <a:srgbClr val="003B4F"/>
+                </a:solidFill>
+                <a:latin typeface="Courier"/>
+              </a:rPr>
+              <a:t>                         promotion_zone </a:t>
+            </a:r>
+            <a:r>
+              <a:rPr>
+                <a:solidFill>
+                  <a:srgbClr val="5E5E5E"/>
+                </a:solidFill>
+                <a:latin typeface="Courier"/>
+              </a:rPr>
+              <a:t>+</a:t>
+            </a:r>
+            <a:r>
+              <a:rPr>
+                <a:solidFill>
+                  <a:srgbClr val="003B4F"/>
+                </a:solidFill>
+                <a:latin typeface="Courier"/>
+              </a:rPr>
+              <a:t> </a:t>
+            </a:r>
+            <a:br/>
+            <a:r>
+              <a:rPr>
+                <a:solidFill>
+                  <a:srgbClr val="003B4F"/>
+                </a:solidFill>
+                <a:latin typeface="Courier"/>
+              </a:rPr>
+              <a:t>                         age_manager </a:t>
+            </a:r>
+            <a:r>
+              <a:rPr>
+                <a:solidFill>
+                  <a:srgbClr val="5E5E5E"/>
+                </a:solidFill>
+                <a:latin typeface="Courier"/>
+              </a:rPr>
+              <a:t>+</a:t>
+            </a:r>
+            <a:r>
+              <a:rPr>
+                <a:solidFill>
+                  <a:srgbClr val="003B4F"/>
+                </a:solidFill>
+                <a:latin typeface="Courier"/>
+              </a:rPr>
+              <a:t> age_deputy </a:t>
+            </a:r>
+            <a:r>
+              <a:rPr>
+                <a:solidFill>
+                  <a:srgbClr val="5E5E5E"/>
+                </a:solidFill>
+                <a:latin typeface="Courier"/>
+              </a:rPr>
+              <a:t>+</a:t>
+            </a:r>
+            <a:br/>
+            <a:r>
+              <a:rPr>
+                <a:solidFill>
+                  <a:srgbClr val="003B4F"/>
+                </a:solidFill>
+                <a:latin typeface="Courier"/>
+              </a:rPr>
+              <a:t>                         female_manager </a:t>
+            </a:r>
+            <a:r>
+              <a:rPr>
+                <a:solidFill>
+                  <a:srgbClr val="5E5E5E"/>
+                </a:solidFill>
+                <a:latin typeface="Courier"/>
+              </a:rPr>
+              <a:t>+</a:t>
+            </a:r>
+            <a:r>
+              <a:rPr>
+                <a:solidFill>
+                  <a:srgbClr val="003B4F"/>
+                </a:solidFill>
+                <a:latin typeface="Courier"/>
+              </a:rPr>
+              <a:t> foreign_owned </a:t>
+            </a:r>
+            <a:r>
+              <a:rPr>
+                <a:solidFill>
+                  <a:srgbClr val="5E5E5E"/>
+                </a:solidFill>
+                <a:latin typeface="Courier"/>
+              </a:rPr>
+              <a:t>+</a:t>
+            </a:r>
+            <a:r>
+              <a:rPr>
+                <a:solidFill>
+                  <a:srgbClr val="003B4F"/>
+                </a:solidFill>
+                <a:latin typeface="Courier"/>
+              </a:rPr>
+              <a:t> </a:t>
+            </a:r>
+            <a:br/>
+            <a:r>
+              <a:rPr>
+                <a:solidFill>
+                  <a:srgbClr val="003B4F"/>
+                </a:solidFill>
+                <a:latin typeface="Courier"/>
+              </a:rPr>
+              <a:t>                         staff_size </a:t>
+            </a:r>
+            <a:r>
+              <a:rPr>
+                <a:solidFill>
+                  <a:srgbClr val="5E5E5E"/>
+                </a:solidFill>
+                <a:latin typeface="Courier"/>
+              </a:rPr>
+              <a:t>+</a:t>
+            </a:r>
+            <a:br/>
+            <a:r>
+              <a:rPr>
+                <a:solidFill>
+                  <a:srgbClr val="003B4F"/>
+                </a:solidFill>
+                <a:latin typeface="Courier"/>
+              </a:rPr>
+              <a:t>                         advanced_filtration </a:t>
+            </a:r>
+            <a:r>
+              <a:rPr>
+                <a:solidFill>
+                  <a:srgbClr val="5E5E5E"/>
+                </a:solidFill>
+                <a:latin typeface="Courier"/>
+              </a:rPr>
+              <a:t>+</a:t>
+            </a:r>
+            <a:r>
+              <a:rPr>
+                <a:solidFill>
+                  <a:srgbClr val="003B4F"/>
+                </a:solidFill>
+                <a:latin typeface="Courier"/>
+              </a:rPr>
+              <a:t> facility_area </a:t>
+            </a:r>
+            <a:r>
+              <a:rPr>
+                <a:solidFill>
+                  <a:srgbClr val="5E5E5E"/>
+                </a:solidFill>
+                <a:latin typeface="Courier"/>
+              </a:rPr>
+              <a:t>+</a:t>
+            </a:r>
+            <a:br/>
+            <a:r>
+              <a:rPr>
+                <a:solidFill>
+                  <a:srgbClr val="003B4F"/>
+                </a:solidFill>
+                <a:latin typeface="Courier"/>
+              </a:rPr>
+              <a:t>                         recycling_center_distance,</a:t>
+            </a:r>
+            <a:br/>
+            <a:r>
+              <a:rPr>
+                <a:solidFill>
+                  <a:srgbClr val="003B4F"/>
+                </a:solidFill>
+                <a:latin typeface="Courier"/>
+              </a:rPr>
+              <a:t>                         </a:t>
+            </a:r>
+            <a:r>
+              <a:rPr>
+                <a:solidFill>
+                  <a:srgbClr val="657422"/>
+                </a:solidFill>
+                <a:latin typeface="Courier"/>
+              </a:rPr>
+              <a:t>clusters =</a:t>
+            </a:r>
+            <a:r>
+              <a:rPr>
+                <a:solidFill>
+                  <a:srgbClr val="003B4F"/>
+                </a:solidFill>
+                <a:latin typeface="Courier"/>
+              </a:rPr>
+              <a:t> zone_identifier,</a:t>
+            </a:r>
+            <a:br/>
+            <a:r>
+              <a:rPr>
+                <a:solidFill>
+                  <a:srgbClr val="003B4F"/>
+                </a:solidFill>
+                <a:latin typeface="Courier"/>
+              </a:rPr>
+              <a:t>                         </a:t>
+            </a:r>
+            <a:r>
+              <a:rPr>
+                <a:solidFill>
+                  <a:srgbClr val="657422"/>
+                </a:solidFill>
+                <a:latin typeface="Courier"/>
+              </a:rPr>
+              <a:t>data =</a:t>
+            </a:r>
+            <a:r>
+              <a:rPr>
+                <a:solidFill>
+                  <a:srgbClr val="003B4F"/>
+                </a:solidFill>
+                <a:latin typeface="Courier"/>
+              </a:rPr>
+              <a:t> df </a:t>
+            </a:r>
+            <a:r>
+              <a:rPr>
+                <a:solidFill>
+                  <a:srgbClr val="5E5E5E"/>
+                </a:solidFill>
+                <a:latin typeface="Courier"/>
+              </a:rPr>
+              <a:t>%&gt;%</a:t>
+            </a:r>
+            <a:r>
+              <a:rPr>
+                <a:solidFill>
+                  <a:srgbClr val="003B4F"/>
+                </a:solidFill>
+                <a:latin typeface="Courier"/>
+              </a:rPr>
+              <a:t> </a:t>
+            </a:r>
+            <a:r>
+              <a:rPr>
+                <a:solidFill>
+                  <a:srgbClr val="4758AB"/>
+                </a:solidFill>
+                <a:latin typeface="Courier"/>
+              </a:rPr>
+              <a:t>filter</a:t>
+            </a:r>
+            <a:r>
+              <a:rPr>
+                <a:solidFill>
+                  <a:srgbClr val="003B4F"/>
+                </a:solidFill>
+                <a:latin typeface="Courier"/>
+              </a:rPr>
+              <a:t>(round </a:t>
+            </a:r>
+            <a:r>
+              <a:rPr>
+                <a:solidFill>
+                  <a:srgbClr val="5E5E5E"/>
+                </a:solidFill>
+                <a:latin typeface="Courier"/>
+              </a:rPr>
+              <a:t>==</a:t>
+            </a:r>
+            <a:r>
+              <a:rPr>
+                <a:solidFill>
+                  <a:srgbClr val="003B4F"/>
+                </a:solidFill>
+                <a:latin typeface="Courier"/>
+              </a:rPr>
+              <a:t> </a:t>
+            </a:r>
+            <a:r>
+              <a:rPr>
+                <a:solidFill>
+                  <a:srgbClr val="AD0000"/>
+                </a:solidFill>
+                <a:latin typeface="Courier"/>
+              </a:rPr>
+              <a:t>1</a:t>
+            </a:r>
+            <a:r>
+              <a:rPr>
+                <a:solidFill>
+                  <a:srgbClr val="003B4F"/>
+                </a:solidFill>
+                <a:latin typeface="Courier"/>
+              </a:rPr>
+              <a:t>))</a:t>
             </a:r>
           </a:p>
         </p:txBody>
       </p:sp>
-      <p:sp>
-        <p:nvSpPr>
-          <p:cNvPr id="4" name="Content Placeholder 3"/>
-          <p:cNvSpPr>
-            <a:spLocks noGrp="1"/>
-          </p:cNvSpPr>
+      <p:graphicFrame>
+        <p:nvGraphicFramePr>
+          <p:cNvPr id="6" name="Content Placeholder 5"/>
+          <p:cNvGraphicFramePr>
+            <a:graphicFrameLocks noGrp="1"/>
+          </p:cNvGraphicFramePr>
           <p:nvPr>
-            <p:ph idx="2" sz="half"/>
+            <p:ph idx="1"/>
           </p:nvPr>
-        </p:nvSpPr>
-        <p:spPr/>
-        <p:txBody>
-          <a:bodyPr/>
-          <a:lstStyle/>
-          <a:p>
-            <a:pPr lvl="0" indent="0" marL="0">
-              <a:buNone/>
-            </a:pPr>
-            <a:r>
-              <a:rPr b="1"/>
-              <a:t>Implications:</a:t>
-            </a:r>
-          </a:p>
-          <a:p>
-            <a:pPr lvl="0"/>
-            <a:r>
-              <a:rPr/>
-              <a:t>If treatment effects vary, LATE may not generalize</a:t>
-            </a:r>
-          </a:p>
-          <a:p>
-            <a:pPr lvl="0"/>
-            <a:r>
-              <a:rPr/>
-              <a:t>External validity depends on how representative compliers are</a:t>
-            </a:r>
-          </a:p>
-          <a:p>
-            <a:pPr lvl="0"/>
-            <a:r>
-              <a:rPr/>
-              <a:t>Policy relevant if we care about those influenced by promotion</a:t>
-            </a:r>
-          </a:p>
-        </p:txBody>
-      </p:sp>
+        </p:nvGraphicFramePr>
+        <p:xfrm>
+          <a:off x="4648200" y="1193800"/>
+          <a:ext cx="4038600" cy="3390900"/>
+        </p:xfrm>
+        <a:graphic>
+          <a:graphicData uri="http://schemas.openxmlformats.org/drawingml/2006/table">
+            <a:tbl>
+              <a:tblPr firstRow="1" bandRow="1">
+                <a:tableStyleId>{5C22544A-7EE6-4342-B048-85BDC9FD1C3A}</a:tableStyleId>
+              </a:tblPr>
+              <a:tblGrid>
+                <a:gridCol w="1346200"/>
+                <a:gridCol w="1346200"/>
+                <a:gridCol w="1346200"/>
+              </a:tblGrid>
+              <a:tr h="0">
+                <a:tc>
+                  <a:txBody>
+                    <a:bodyPr/>
+                    <a:lstStyle/>
+                    <a:p>
+                      <a:endParaRPr/>
+                    </a:p>
+                  </a:txBody>
+                  <a:tcPr/>
+                </a:tc>
+                <a:tc>
+                  <a:txBody>
+                    <a:bodyPr/>
+                    <a:lstStyle/>
+                    <a:p>
+                      <a:pPr lvl="0" indent="0" marL="0" algn="ctr">
+                        <a:buNone/>
+                      </a:pPr>
+                      <a:r>
+                        <a:rPr/>
+                        <a:t>No covariate adj.</a:t>
+                      </a:r>
+                    </a:p>
+                  </a:txBody>
+                  <a:tcPr/>
+                </a:tc>
+                <a:tc>
+                  <a:txBody>
+                    <a:bodyPr/>
+                    <a:lstStyle/>
+                    <a:p>
+                      <a:pPr lvl="0" indent="0" marL="0" algn="ctr">
+                        <a:buNone/>
+                      </a:pPr>
+                      <a:r>
+                        <a:rPr/>
+                        <a:t>With covariate adj.</a:t>
+                      </a:r>
+                    </a:p>
+                  </a:txBody>
+                  <a:tcPr/>
+                </a:tc>
+              </a:tr>
+              <a:tr h="0">
+                <a:tc>
+                  <a:txBody>
+                    <a:bodyPr/>
+                    <a:lstStyle/>
+                    <a:p>
+                      <a:pPr lvl="0" indent="0" marL="0" algn="l">
+                        <a:buNone/>
+                      </a:pPr>
+                      <a:r>
+                        <a:rPr/>
+                        <a:t>(Intercept)</a:t>
+                      </a:r>
+                    </a:p>
+                  </a:txBody>
+                </a:tc>
+                <a:tc>
+                  <a:txBody>
+                    <a:bodyPr/>
+                    <a:lstStyle/>
+                    <a:p>
+                      <a:pPr lvl="0" indent="0" marL="0" algn="ctr">
+                        <a:buNone/>
+                      </a:pPr>
+                      <a:r>
+                        <a:rPr/>
+                        <a:t>1964.571***</a:t>
+                      </a:r>
+                    </a:p>
+                  </a:txBody>
+                </a:tc>
+                <a:tc>
+                  <a:txBody>
+                    <a:bodyPr/>
+                    <a:lstStyle/>
+                    <a:p>
+                      <a:pPr lvl="0" indent="0" marL="0" algn="ctr">
+                        <a:buNone/>
+                      </a:pPr>
+                      <a:r>
+                        <a:rPr/>
+                        <a:t>2938.574***</a:t>
+                      </a:r>
+                    </a:p>
+                  </a:txBody>
+                </a:tc>
+              </a:tr>
+              <a:tr h="0">
+                <a:tc>
+                  <a:txBody>
+                    <a:bodyPr/>
+                    <a:lstStyle/>
+                    <a:p>
+                      <a:endParaRPr/>
+                    </a:p>
+                  </a:txBody>
+                </a:tc>
+                <a:tc>
+                  <a:txBody>
+                    <a:bodyPr/>
+                    <a:lstStyle/>
+                    <a:p>
+                      <a:pPr lvl="0" indent="0" marL="0" algn="ctr">
+                        <a:buNone/>
+                      </a:pPr>
+                      <a:r>
+                        <a:rPr/>
+                        <a:t>(47.009)</a:t>
+                      </a:r>
+                    </a:p>
+                  </a:txBody>
+                </a:tc>
+                <a:tc>
+                  <a:txBody>
+                    <a:bodyPr/>
+                    <a:lstStyle/>
+                    <a:p>
+                      <a:pPr lvl="0" indent="0" marL="0" algn="ctr">
+                        <a:buNone/>
+                      </a:pPr>
+                      <a:r>
+                        <a:rPr/>
+                        <a:t>(67.184)</a:t>
+                      </a:r>
+                    </a:p>
+                  </a:txBody>
+                </a:tc>
+              </a:tr>
+              <a:tr h="0">
+                <a:tc>
+                  <a:txBody>
+                    <a:bodyPr/>
+                    <a:lstStyle/>
+                    <a:p>
+                      <a:pPr lvl="0" indent="0" marL="0" algn="l">
+                        <a:buNone/>
+                      </a:pPr>
+                      <a:r>
+                        <a:rPr/>
+                        <a:t>enrolled_rp</a:t>
+                      </a:r>
+                    </a:p>
+                  </a:txBody>
+                </a:tc>
+                <a:tc>
+                  <a:txBody>
+                    <a:bodyPr/>
+                    <a:lstStyle/>
+                    <a:p>
+                      <a:pPr lvl="0" indent="0" marL="0" algn="ctr">
+                        <a:buNone/>
+                      </a:pPr>
+                      <a:r>
+                        <a:rPr/>
+                        <a:t>−949.977***</a:t>
+                      </a:r>
+                    </a:p>
+                  </a:txBody>
+                </a:tc>
+                <a:tc>
+                  <a:txBody>
+                    <a:bodyPr/>
+                    <a:lstStyle/>
+                    <a:p>
+                      <a:pPr lvl="0" indent="0" marL="0" algn="ctr">
+                        <a:buNone/>
+                      </a:pPr>
+                      <a:r>
+                        <a:rPr/>
+                        <a:t>−982.878***</a:t>
+                      </a:r>
+                    </a:p>
+                  </a:txBody>
+                </a:tc>
+              </a:tr>
+              <a:tr h="0">
+                <a:tc>
+                  <a:txBody>
+                    <a:bodyPr/>
+                    <a:lstStyle/>
+                    <a:p>
+                      <a:endParaRPr/>
+                    </a:p>
+                  </a:txBody>
+                </a:tc>
+                <a:tc>
+                  <a:txBody>
+                    <a:bodyPr/>
+                    <a:lstStyle/>
+                    <a:p>
+                      <a:pPr lvl="0" indent="0" marL="0" algn="ctr">
+                        <a:buNone/>
+                      </a:pPr>
+                      <a:r>
+                        <a:rPr/>
+                        <a:t>(114.223)</a:t>
+                      </a:r>
+                    </a:p>
+                  </a:txBody>
+                </a:tc>
+                <a:tc>
+                  <a:txBody>
+                    <a:bodyPr/>
+                    <a:lstStyle/>
+                    <a:p>
+                      <a:pPr lvl="0" indent="0" marL="0" algn="ctr">
+                        <a:buNone/>
+                      </a:pPr>
+                      <a:r>
+                        <a:rPr/>
+                        <a:t>(94.670)</a:t>
+                      </a:r>
+                    </a:p>
+                  </a:txBody>
+                </a:tc>
+              </a:tr>
+              <a:tr h="0">
+                <a:tc>
+                  <a:txBody>
+                    <a:bodyPr/>
+                    <a:lstStyle/>
+                    <a:p>
+                      <a:pPr lvl="0" indent="0" marL="0" algn="l">
+                        <a:buNone/>
+                      </a:pPr>
+                      <a:r>
+                        <a:rPr/>
+                        <a:t>age_manager</a:t>
+                      </a:r>
+                    </a:p>
+                  </a:txBody>
+                </a:tc>
+                <a:tc>
+                  <a:txBody>
+                    <a:bodyPr/>
+                    <a:lstStyle/>
+                    <a:p>
+                      <a:endParaRPr/>
+                    </a:p>
+                  </a:txBody>
+                </a:tc>
+                <a:tc>
+                  <a:txBody>
+                    <a:bodyPr/>
+                    <a:lstStyle/>
+                    <a:p>
+                      <a:pPr lvl="0" indent="0" marL="0" algn="ctr">
+                        <a:buNone/>
+                      </a:pPr>
+                      <a:r>
+                        <a:rPr/>
+                        <a:t>7.304***</a:t>
+                      </a:r>
+                    </a:p>
+                  </a:txBody>
+                </a:tc>
+              </a:tr>
+              <a:tr h="0">
+                <a:tc>
+                  <a:txBody>
+                    <a:bodyPr/>
+                    <a:lstStyle/>
+                    <a:p>
+                      <a:endParaRPr/>
+                    </a:p>
+                  </a:txBody>
+                </a:tc>
+                <a:tc>
+                  <a:txBody>
+                    <a:bodyPr/>
+                    <a:lstStyle/>
+                    <a:p>
+                      <a:endParaRPr/>
+                    </a:p>
+                  </a:txBody>
+                </a:tc>
+                <a:tc>
+                  <a:txBody>
+                    <a:bodyPr/>
+                    <a:lstStyle/>
+                    <a:p>
+                      <a:pPr lvl="0" indent="0" marL="0" algn="ctr">
+                        <a:buNone/>
+                      </a:pPr>
+                      <a:r>
+                        <a:rPr/>
+                        <a:t>(1.406)</a:t>
+                      </a:r>
+                    </a:p>
+                  </a:txBody>
+                </a:tc>
+              </a:tr>
+              <a:tr h="0">
+                <a:tc>
+                  <a:txBody>
+                    <a:bodyPr/>
+                    <a:lstStyle/>
+                    <a:p>
+                      <a:pPr lvl="0" indent="0" marL="0" algn="l">
+                        <a:buNone/>
+                      </a:pPr>
+                      <a:r>
+                        <a:rPr/>
+                        <a:t>age_deputy</a:t>
+                      </a:r>
+                    </a:p>
+                  </a:txBody>
+                </a:tc>
+                <a:tc>
+                  <a:txBody>
+                    <a:bodyPr/>
+                    <a:lstStyle/>
+                    <a:p>
+                      <a:endParaRPr/>
+                    </a:p>
+                  </a:txBody>
+                </a:tc>
+                <a:tc>
+                  <a:txBody>
+                    <a:bodyPr/>
+                    <a:lstStyle/>
+                    <a:p>
+                      <a:pPr lvl="0" indent="0" marL="0" algn="ctr">
+                        <a:buNone/>
+                      </a:pPr>
+                      <a:r>
+                        <a:rPr/>
+                        <a:t>−1.031</a:t>
+                      </a:r>
+                    </a:p>
+                  </a:txBody>
+                </a:tc>
+              </a:tr>
+              <a:tr h="0">
+                <a:tc>
+                  <a:txBody>
+                    <a:bodyPr/>
+                    <a:lstStyle/>
+                    <a:p>
+                      <a:endParaRPr/>
+                    </a:p>
+                  </a:txBody>
+                </a:tc>
+                <a:tc>
+                  <a:txBody>
+                    <a:bodyPr/>
+                    <a:lstStyle/>
+                    <a:p>
+                      <a:endParaRPr/>
+                    </a:p>
+                  </a:txBody>
+                </a:tc>
+                <a:tc>
+                  <a:txBody>
+                    <a:bodyPr/>
+                    <a:lstStyle/>
+                    <a:p>
+                      <a:pPr lvl="0" indent="0" marL="0" algn="ctr">
+                        <a:buNone/>
+                      </a:pPr>
+                      <a:r>
+                        <a:rPr/>
+                        <a:t>(1.671)</a:t>
+                      </a:r>
+                    </a:p>
+                  </a:txBody>
+                </a:tc>
+              </a:tr>
+              <a:tr h="0">
+                <a:tc>
+                  <a:txBody>
+                    <a:bodyPr/>
+                    <a:lstStyle/>
+                    <a:p>
+                      <a:pPr lvl="0" indent="0" marL="0" algn="l">
+                        <a:buNone/>
+                      </a:pPr>
+                      <a:r>
+                        <a:rPr/>
+                        <a:t>female_manager</a:t>
+                      </a:r>
+                    </a:p>
+                  </a:txBody>
+                </a:tc>
+                <a:tc>
+                  <a:txBody>
+                    <a:bodyPr/>
+                    <a:lstStyle/>
+                    <a:p>
+                      <a:endParaRPr/>
+                    </a:p>
+                  </a:txBody>
+                </a:tc>
+                <a:tc>
+                  <a:txBody>
+                    <a:bodyPr/>
+                    <a:lstStyle/>
+                    <a:p>
+                      <a:pPr lvl="0" indent="0" marL="0" algn="ctr">
+                        <a:buNone/>
+                      </a:pPr>
+                      <a:r>
+                        <a:rPr/>
+                        <a:t>97.258*</a:t>
+                      </a:r>
+                    </a:p>
+                  </a:txBody>
+                </a:tc>
+              </a:tr>
+              <a:tr h="0">
+                <a:tc>
+                  <a:txBody>
+                    <a:bodyPr/>
+                    <a:lstStyle/>
+                    <a:p>
+                      <a:endParaRPr/>
+                    </a:p>
+                  </a:txBody>
+                </a:tc>
+                <a:tc>
+                  <a:txBody>
+                    <a:bodyPr/>
+                    <a:lstStyle/>
+                    <a:p>
+                      <a:endParaRPr/>
+                    </a:p>
+                  </a:txBody>
+                </a:tc>
+                <a:tc>
+                  <a:txBody>
+                    <a:bodyPr/>
+                    <a:lstStyle/>
+                    <a:p>
+                      <a:pPr lvl="0" indent="0" marL="0" algn="ctr">
+                        <a:buNone/>
+                      </a:pPr>
+                      <a:r>
+                        <a:rPr/>
+                        <a:t>(45.709)</a:t>
+                      </a:r>
+                    </a:p>
+                  </a:txBody>
+                </a:tc>
+              </a:tr>
+              <a:tr h="0">
+                <a:tc>
+                  <a:txBody>
+                    <a:bodyPr/>
+                    <a:lstStyle/>
+                    <a:p>
+                      <a:pPr lvl="0" indent="0" marL="0" algn="l">
+                        <a:buNone/>
+                      </a:pPr>
+                      <a:r>
+                        <a:rPr/>
+                        <a:t>foreign_owned</a:t>
+                      </a:r>
+                    </a:p>
+                  </a:txBody>
+                </a:tc>
+                <a:tc>
+                  <a:txBody>
+                    <a:bodyPr/>
+                    <a:lstStyle/>
+                    <a:p>
+                      <a:endParaRPr/>
+                    </a:p>
+                  </a:txBody>
+                </a:tc>
+                <a:tc>
+                  <a:txBody>
+                    <a:bodyPr/>
+                    <a:lstStyle/>
+                    <a:p>
+                      <a:pPr lvl="0" indent="0" marL="0" algn="ctr">
+                        <a:buNone/>
+                      </a:pPr>
+                      <a:r>
+                        <a:rPr/>
+                        <a:t>−227.702***</a:t>
+                      </a:r>
+                    </a:p>
+                  </a:txBody>
+                </a:tc>
+              </a:tr>
+              <a:tr h="0">
+                <a:tc>
+                  <a:txBody>
+                    <a:bodyPr/>
+                    <a:lstStyle/>
+                    <a:p>
+                      <a:endParaRPr/>
+                    </a:p>
+                  </a:txBody>
+                </a:tc>
+                <a:tc>
+                  <a:txBody>
+                    <a:bodyPr/>
+                    <a:lstStyle/>
+                    <a:p>
+                      <a:endParaRPr/>
+                    </a:p>
+                  </a:txBody>
+                </a:tc>
+                <a:tc>
+                  <a:txBody>
+                    <a:bodyPr/>
+                    <a:lstStyle/>
+                    <a:p>
+                      <a:pPr lvl="0" indent="0" marL="0" algn="ctr">
+                        <a:buNone/>
+                      </a:pPr>
+                      <a:r>
+                        <a:rPr/>
+                        <a:t>(38.752)</a:t>
+                      </a:r>
+                    </a:p>
+                  </a:txBody>
+                </a:tc>
+              </a:tr>
+              <a:tr h="0">
+                <a:tc>
+                  <a:txBody>
+                    <a:bodyPr/>
+                    <a:lstStyle/>
+                    <a:p>
+                      <a:pPr lvl="0" indent="0" marL="0" algn="l">
+                        <a:buNone/>
+                      </a:pPr>
+                      <a:r>
+                        <a:rPr/>
+                        <a:t>staff_size</a:t>
+                      </a:r>
+                    </a:p>
+                  </a:txBody>
+                </a:tc>
+                <a:tc>
+                  <a:txBody>
+                    <a:bodyPr/>
+                    <a:lstStyle/>
+                    <a:p>
+                      <a:endParaRPr/>
+                    </a:p>
+                  </a:txBody>
+                </a:tc>
+                <a:tc>
+                  <a:txBody>
+                    <a:bodyPr/>
+                    <a:lstStyle/>
+                    <a:p>
+                      <a:pPr lvl="0" indent="0" marL="0" algn="ctr">
+                        <a:buNone/>
+                      </a:pPr>
+                      <a:r>
+                        <a:rPr/>
+                        <a:t>−202.957***</a:t>
+                      </a:r>
+                    </a:p>
+                  </a:txBody>
+                </a:tc>
+              </a:tr>
+              <a:tr h="0">
+                <a:tc>
+                  <a:txBody>
+                    <a:bodyPr/>
+                    <a:lstStyle/>
+                    <a:p>
+                      <a:endParaRPr/>
+                    </a:p>
+                  </a:txBody>
+                </a:tc>
+                <a:tc>
+                  <a:txBody>
+                    <a:bodyPr/>
+                    <a:lstStyle/>
+                    <a:p>
+                      <a:endParaRPr/>
+                    </a:p>
+                  </a:txBody>
+                </a:tc>
+                <a:tc>
+                  <a:txBody>
+                    <a:bodyPr/>
+                    <a:lstStyle/>
+                    <a:p>
+                      <a:pPr lvl="0" indent="0" marL="0" algn="ctr">
+                        <a:buNone/>
+                      </a:pPr>
+                      <a:r>
+                        <a:rPr/>
+                        <a:t>(6.708)</a:t>
+                      </a:r>
+                    </a:p>
+                  </a:txBody>
+                </a:tc>
+              </a:tr>
+              <a:tr h="0">
+                <a:tc>
+                  <a:txBody>
+                    <a:bodyPr/>
+                    <a:lstStyle/>
+                    <a:p>
+                      <a:pPr lvl="0" indent="0" marL="0" algn="l">
+                        <a:buNone/>
+                      </a:pPr>
+                      <a:r>
+                        <a:rPr/>
+                        <a:t>advanced_filtration</a:t>
+                      </a:r>
+                    </a:p>
+                  </a:txBody>
+                </a:tc>
+                <a:tc>
+                  <a:txBody>
+                    <a:bodyPr/>
+                    <a:lstStyle/>
+                    <a:p>
+                      <a:endParaRPr/>
+                    </a:p>
+                  </a:txBody>
+                </a:tc>
+                <a:tc>
+                  <a:txBody>
+                    <a:bodyPr/>
+                    <a:lstStyle/>
+                    <a:p>
+                      <a:pPr lvl="0" indent="0" marL="0" algn="ctr">
+                        <a:buNone/>
+                      </a:pPr>
+                      <a:r>
+                        <a:rPr/>
+                        <a:t>−216.624***</a:t>
+                      </a:r>
+                    </a:p>
+                  </a:txBody>
+                </a:tc>
+              </a:tr>
+              <a:tr h="0">
+                <a:tc>
+                  <a:txBody>
+                    <a:bodyPr/>
+                    <a:lstStyle/>
+                    <a:p>
+                      <a:endParaRPr/>
+                    </a:p>
+                  </a:txBody>
+                </a:tc>
+                <a:tc>
+                  <a:txBody>
+                    <a:bodyPr/>
+                    <a:lstStyle/>
+                    <a:p>
+                      <a:endParaRPr/>
+                    </a:p>
+                  </a:txBody>
+                </a:tc>
+                <a:tc>
+                  <a:txBody>
+                    <a:bodyPr/>
+                    <a:lstStyle/>
+                    <a:p>
+                      <a:pPr lvl="0" indent="0" marL="0" algn="ctr">
+                        <a:buNone/>
+                      </a:pPr>
+                      <a:r>
+                        <a:rPr/>
+                        <a:t>(26.332)</a:t>
+                      </a:r>
+                    </a:p>
+                  </a:txBody>
+                </a:tc>
+              </a:tr>
+              <a:tr h="0">
+                <a:tc>
+                  <a:txBody>
+                    <a:bodyPr/>
+                    <a:lstStyle/>
+                    <a:p>
+                      <a:pPr lvl="0" indent="0" marL="0" algn="l">
+                        <a:buNone/>
+                      </a:pPr>
+                      <a:r>
+                        <a:rPr/>
+                        <a:t>facility_area</a:t>
+                      </a:r>
+                    </a:p>
+                  </a:txBody>
+                </a:tc>
+                <a:tc>
+                  <a:txBody>
+                    <a:bodyPr/>
+                    <a:lstStyle/>
+                    <a:p>
+                      <a:endParaRPr/>
+                    </a:p>
+                  </a:txBody>
+                </a:tc>
+                <a:tc>
+                  <a:txBody>
+                    <a:bodyPr/>
+                    <a:lstStyle/>
+                    <a:p>
+                      <a:pPr lvl="0" indent="0" marL="0" algn="ctr">
+                        <a:buNone/>
+                      </a:pPr>
+                      <a:r>
+                        <a:rPr/>
+                        <a:t>10.232*</a:t>
+                      </a:r>
+                    </a:p>
+                  </a:txBody>
+                </a:tc>
+              </a:tr>
+              <a:tr h="0">
+                <a:tc>
+                  <a:txBody>
+                    <a:bodyPr/>
+                    <a:lstStyle/>
+                    <a:p>
+                      <a:endParaRPr/>
+                    </a:p>
+                  </a:txBody>
+                </a:tc>
+                <a:tc>
+                  <a:txBody>
+                    <a:bodyPr/>
+                    <a:lstStyle/>
+                    <a:p>
+                      <a:endParaRPr/>
+                    </a:p>
+                  </a:txBody>
+                </a:tc>
+                <a:tc>
+                  <a:txBody>
+                    <a:bodyPr/>
+                    <a:lstStyle/>
+                    <a:p>
+                      <a:pPr lvl="0" indent="0" marL="0" algn="ctr">
+                        <a:buNone/>
+                      </a:pPr>
+                      <a:r>
+                        <a:rPr/>
+                        <a:t>(4.567)</a:t>
+                      </a:r>
+                    </a:p>
+                  </a:txBody>
+                </a:tc>
+              </a:tr>
+              <a:tr h="0">
+                <a:tc>
+                  <a:txBody>
+                    <a:bodyPr/>
+                    <a:lstStyle/>
+                    <a:p>
+                      <a:pPr lvl="0" indent="0" marL="0" algn="l">
+                        <a:buNone/>
+                      </a:pPr>
+                      <a:r>
+                        <a:rPr/>
+                        <a:t>recycling_center_distance</a:t>
+                      </a:r>
+                    </a:p>
+                  </a:txBody>
+                </a:tc>
+                <a:tc>
+                  <a:txBody>
+                    <a:bodyPr/>
+                    <a:lstStyle/>
+                    <a:p>
+                      <a:endParaRPr/>
+                    </a:p>
+                  </a:txBody>
+                </a:tc>
+                <a:tc>
+                  <a:txBody>
+                    <a:bodyPr/>
+                    <a:lstStyle/>
+                    <a:p>
+                      <a:pPr lvl="0" indent="0" marL="0" algn="ctr">
+                        <a:buNone/>
+                      </a:pPr>
+                      <a:r>
+                        <a:rPr/>
+                        <a:t>−0.335</a:t>
+                      </a:r>
+                    </a:p>
+                  </a:txBody>
+                </a:tc>
+              </a:tr>
+              <a:tr h="0">
+                <a:tc>
+                  <a:txBody>
+                    <a:bodyPr/>
+                    <a:lstStyle/>
+                    <a:p>
+                      <a:endParaRPr/>
+                    </a:p>
+                  </a:txBody>
+                </a:tc>
+                <a:tc>
+                  <a:txBody>
+                    <a:bodyPr/>
+                    <a:lstStyle/>
+                    <a:p>
+                      <a:endParaRPr/>
+                    </a:p>
+                  </a:txBody>
+                </a:tc>
+                <a:tc>
+                  <a:txBody>
+                    <a:bodyPr/>
+                    <a:lstStyle/>
+                    <a:p>
+                      <a:pPr lvl="0" indent="0" marL="0" algn="ctr">
+                        <a:buNone/>
+                      </a:pPr>
+                      <a:r>
+                        <a:rPr/>
+                        <a:t>(0.468)</a:t>
+                      </a:r>
+                    </a:p>
+                  </a:txBody>
+                </a:tc>
+              </a:tr>
+              <a:tr h="0">
+                <a:tc>
+                  <a:txBody>
+                    <a:bodyPr/>
+                    <a:lstStyle/>
+                    <a:p>
+                      <a:pPr lvl="0" indent="0" marL="0" algn="l">
+                        <a:buNone/>
+                      </a:pPr>
+                      <a:r>
+                        <a:rPr/>
+                        <a:t>Num.Obs.</a:t>
+                      </a:r>
+                    </a:p>
+                  </a:txBody>
+                </a:tc>
+                <a:tc>
+                  <a:txBody>
+                    <a:bodyPr/>
+                    <a:lstStyle/>
+                    <a:p>
+                      <a:pPr lvl="0" indent="0" marL="0" algn="ctr">
+                        <a:buNone/>
+                      </a:pPr>
+                      <a:r>
+                        <a:rPr/>
+                        <a:t>9914</a:t>
+                      </a:r>
+                    </a:p>
+                  </a:txBody>
+                </a:tc>
+                <a:tc>
+                  <a:txBody>
+                    <a:bodyPr/>
+                    <a:lstStyle/>
+                    <a:p>
+                      <a:pPr lvl="0" indent="0" marL="0" algn="ctr">
+                        <a:buNone/>
+                      </a:pPr>
+                      <a:r>
+                        <a:rPr/>
+                        <a:t>9914</a:t>
+                      </a:r>
+                    </a:p>
+                  </a:txBody>
+                </a:tc>
+              </a:tr>
+              <a:tr h="0">
+                <a:tc>
+                  <a:txBody>
+                    <a:bodyPr/>
+                    <a:lstStyle/>
+                    <a:p>
+                      <a:pPr lvl="0" indent="0" marL="0" algn="l">
+                        <a:buNone/>
+                      </a:pPr>
+                      <a:r>
+                        <a:rPr/>
+                        <a:t>R2</a:t>
+                      </a:r>
+                    </a:p>
+                  </a:txBody>
+                </a:tc>
+                <a:tc>
+                  <a:txBody>
+                    <a:bodyPr/>
+                    <a:lstStyle/>
+                    <a:p>
+                      <a:pPr lvl="0" indent="0" marL="0" algn="ctr">
+                        <a:buNone/>
+                      </a:pPr>
+                      <a:r>
+                        <a:rPr/>
+                        <a:t>0.222</a:t>
+                      </a:r>
+                    </a:p>
+                  </a:txBody>
+                </a:tc>
+                <a:tc>
+                  <a:txBody>
+                    <a:bodyPr/>
+                    <a:lstStyle/>
+                    <a:p>
+                      <a:pPr lvl="0" indent="0" marL="0" algn="ctr">
+                        <a:buNone/>
+                      </a:pPr>
+                      <a:r>
+                        <a:rPr/>
+                        <a:t>0.405</a:t>
+                      </a:r>
+                    </a:p>
+                  </a:txBody>
+                </a:tc>
+              </a:tr>
+              <a:tr h="0">
+                <a:tc>
+                  <a:txBody>
+                    <a:bodyPr/>
+                    <a:lstStyle/>
+                    <a:p>
+                      <a:pPr lvl="0" indent="0" marL="0" algn="l">
+                        <a:buNone/>
+                      </a:pPr>
+                      <a:r>
+                        <a:rPr/>
+                        <a:t>R2 Adj.</a:t>
+                      </a:r>
+                    </a:p>
+                  </a:txBody>
+                </a:tc>
+                <a:tc>
+                  <a:txBody>
+                    <a:bodyPr/>
+                    <a:lstStyle/>
+                    <a:p>
+                      <a:pPr lvl="0" indent="0" marL="0" algn="ctr">
+                        <a:buNone/>
+                      </a:pPr>
+                      <a:r>
+                        <a:rPr/>
+                        <a:t>0.222</a:t>
+                      </a:r>
+                    </a:p>
+                  </a:txBody>
+                </a:tc>
+                <a:tc>
+                  <a:txBody>
+                    <a:bodyPr/>
+                    <a:lstStyle/>
+                    <a:p>
+                      <a:pPr lvl="0" indent="0" marL="0" algn="ctr">
+                        <a:buNone/>
+                      </a:pPr>
+                      <a:r>
+                        <a:rPr/>
+                        <a:t>0.404</a:t>
+                      </a:r>
+                    </a:p>
+                  </a:txBody>
+                </a:tc>
+              </a:tr>
+              <a:tr h="0">
+                <a:tc>
+                  <a:txBody>
+                    <a:bodyPr/>
+                    <a:lstStyle/>
+                    <a:p>
+                      <a:pPr lvl="0" indent="0" marL="0" algn="l">
+                        <a:buNone/>
+                      </a:pPr>
+                      <a:r>
+                        <a:rPr/>
+                        <a:t> + p &lt; 0.1, * p &lt; 0.05, ** p &lt; 0.01, *** p &lt; 0.001</a:t>
+                      </a:r>
+                    </a:p>
+                  </a:txBody>
+                </a:tc>
+                <a:tc>
+                  <a:txBody>
+                    <a:bodyPr/>
+                    <a:lstStyle/>
+                    <a:p>
+                      <a:endParaRPr/>
+                    </a:p>
+                  </a:txBody>
+                </a:tc>
+                <a:tc>
+                  <a:txBody>
+                    <a:bodyPr/>
+                    <a:lstStyle/>
+                    <a:p>
+                      <a:endParaRPr/>
+                    </a:p>
+                  </a:txBody>
+                </a:tc>
+              </a:tr>
+            </a:tbl>
+          </a:graphicData>
+        </a:graphic>
+      </p:graphicFrame>
     </p:spTree>
   </p:cSld>
-  <p:timing>
-    <p:tnLst>
-      <p:par>
-        <p:cTn id="1" dur="indefinite" restart="never" nodeType="tmRoot">
-          <p:childTnLst>
-            <p:seq concurrent="1" nextAc="seek">
-              <p:cTn id="2" dur="indefinite" nodeType="mainSeq">
-                <p:childTnLst>
-                  <p:par>
-                    <p:cTn id="3" fill="hold">
-                      <p:stCondLst>
-                        <p:cond delay="indefinite"/>
-                      </p:stCondLst>
-                      <p:childTnLst>
-                        <p:par>
-                          <p:cTn id="4" fill="hold">
-                            <p:stCondLst>
-                              <p:cond delay="0"/>
-                            </p:stCondLst>
-                            <p:childTnLst>
-                              <p:par>
-                                <p:cTn id="5" presetID="1" presetClass="entr" presetSubtype="0" fill="hold" grpId="0" nodeType="clickEffect">
-                                  <p:stCondLst>
-                                    <p:cond delay="0"/>
-                                  </p:stCondLst>
-                                  <p:childTnLst>
-                                    <p:set>
-                                      <p:cBhvr>
-                                        <p:cTn id="6" dur="1" fill="hold">
-                                          <p:stCondLst>
-                                            <p:cond delay="0"/>
-                                          </p:stCondLst>
-                                        </p:cTn>
-                                        <p:tgtEl>
-                                          <p:spTgt spid="3">
-                                            <p:txEl>
-                                              <p:pRg st="1" end="1"/>
-                                            </p:txEl>
-                                          </p:spTgt>
-                                        </p:tgtEl>
-                                        <p:attrNameLst>
-                                          <p:attrName>style.visibility</p:attrName>
-                                        </p:attrNameLst>
-                                      </p:cBhvr>
-                                      <p:to>
-                                        <p:strVal val="visible"/>
-                                      </p:to>
-                                    </p:set>
-                                  </p:childTnLst>
-                                </p:cTn>
-                              </p:par>
-                            </p:childTnLst>
-                          </p:cTn>
-                        </p:par>
-                      </p:childTnLst>
-                    </p:cTn>
-                  </p:par>
-                  <p:par>
-                    <p:cTn id="7" fill="hold">
-                      <p:stCondLst>
-                        <p:cond delay="indefinite"/>
-                      </p:stCondLst>
-                      <p:childTnLst>
-                        <p:par>
-                          <p:cTn id="8" fill="hold">
-                            <p:stCondLst>
-                              <p:cond delay="0"/>
-                            </p:stCondLst>
-                            <p:childTnLst>
-                              <p:par>
-                                <p:cTn id="9" presetID="1" presetClass="entr" presetSubtype="0" fill="hold" grpId="0" nodeType="clickEffect">
-                                  <p:stCondLst>
-                                    <p:cond delay="0"/>
-                                  </p:stCondLst>
-                                  <p:childTnLst>
-                                    <p:set>
-                                      <p:cBhvr>
-                                        <p:cTn id="10" dur="1" fill="hold">
-                                          <p:stCondLst>
-                                            <p:cond delay="0"/>
-                                          </p:stCondLst>
-                                        </p:cTn>
-                                        <p:tgtEl>
-                                          <p:spTgt spid="3">
-                                            <p:txEl>
-                                              <p:pRg st="2" end="2"/>
-                                            </p:txEl>
-                                          </p:spTgt>
-                                        </p:tgtEl>
-                                        <p:attrNameLst>
-                                          <p:attrName>style.visibility</p:attrName>
-                                        </p:attrNameLst>
-                                      </p:cBhvr>
-                                      <p:to>
-                                        <p:strVal val="visible"/>
-                                      </p:to>
-                                    </p:set>
-                                  </p:childTnLst>
-                                </p:cTn>
-                              </p:par>
-                            </p:childTnLst>
-                          </p:cTn>
-                        </p:par>
-                      </p:childTnLst>
-                    </p:cTn>
-                  </p:par>
-                  <p:par>
-                    <p:cTn id="11" fill="hold">
-                      <p:stCondLst>
-                        <p:cond delay="indefinite"/>
-                      </p:stCondLst>
-                      <p:childTnLst>
-                        <p:par>
-                          <p:cTn id="12" fill="hold">
-                            <p:stCondLst>
-                              <p:cond delay="0"/>
-                            </p:stCondLst>
-                            <p:childTnLst>
-                              <p:par>
-                                <p:cTn id="13" presetID="1" presetClass="entr" presetSubtype="0" fill="hold" grpId="0" nodeType="clickEffect">
-                                  <p:stCondLst>
-                                    <p:cond delay="0"/>
-                                  </p:stCondLst>
-                                  <p:childTnLst>
-                                    <p:set>
-                                      <p:cBhvr>
-                                        <p:cTn id="14" dur="1" fill="hold">
-                                          <p:stCondLst>
-                                            <p:cond delay="0"/>
-                                          </p:stCondLst>
-                                        </p:cTn>
-                                        <p:tgtEl>
-                                          <p:spTgt spid="3">
-                                            <p:txEl>
-                                              <p:pRg st="3" end="3"/>
-                                            </p:txEl>
-                                          </p:spTgt>
-                                        </p:tgtEl>
-                                        <p:attrNameLst>
-                                          <p:attrName>style.visibility</p:attrName>
-                                        </p:attrNameLst>
-                                      </p:cBhvr>
-                                      <p:to>
-                                        <p:strVal val="visible"/>
-                                      </p:to>
-                                    </p:set>
-                                  </p:childTnLst>
-                                </p:cTn>
-                              </p:par>
-                            </p:childTnLst>
-                          </p:cTn>
-                        </p:par>
-                      </p:childTnLst>
-                    </p:cTn>
-                  </p:par>
-                  <p:par>
-                    <p:cTn id="15" fill="hold">
-                      <p:stCondLst>
-                        <p:cond delay="indefinite"/>
-                      </p:stCondLst>
-                      <p:childTnLst>
-                        <p:par>
-                          <p:cTn id="16" fill="hold">
-                            <p:stCondLst>
-                              <p:cond delay="0"/>
-                            </p:stCondLst>
-                            <p:childTnLst>
-                              <p:par>
-                                <p:cTn id="17" presetID="1" presetClass="entr" presetSubtype="0" fill="hold" grpId="0" nodeType="clickEffect">
-                                  <p:stCondLst>
-                                    <p:cond delay="0"/>
-                                  </p:stCondLst>
-                                  <p:childTnLst>
-                                    <p:set>
-                                      <p:cBhvr>
-                                        <p:cTn id="18" dur="1" fill="hold">
-                                          <p:stCondLst>
-                                            <p:cond delay="0"/>
-                                          </p:stCondLst>
-                                        </p:cTn>
-                                        <p:tgtEl>
-                                          <p:spTgt spid="3">
-                                            <p:txEl>
-                                              <p:pRg st="4" end="4"/>
-                                            </p:txEl>
-                                          </p:spTgt>
-                                        </p:tgtEl>
-                                        <p:attrNameLst>
-                                          <p:attrName>style.visibility</p:attrName>
-                                        </p:attrNameLst>
-                                      </p:cBhvr>
-                                      <p:to>
-                                        <p:strVal val="visible"/>
-                                      </p:to>
-                                    </p:set>
-                                  </p:childTnLst>
-                                </p:cTn>
-                              </p:par>
-                            </p:childTnLst>
-                          </p:cTn>
-                        </p:par>
-                      </p:childTnLst>
-                    </p:cTn>
-                  </p:par>
-                  <p:par>
-                    <p:cTn id="19" fill="hold">
-                      <p:stCondLst>
-                        <p:cond delay="indefinite"/>
-                      </p:stCondLst>
-                      <p:childTnLst>
-                        <p:par>
-                          <p:cTn id="20" fill="hold">
-                            <p:stCondLst>
-                              <p:cond delay="0"/>
-                            </p:stCondLst>
-                            <p:childTnLst>
-                              <p:par>
-                                <p:cTn id="21" presetID="1" presetClass="entr" presetSubtype="0" fill="hold" grpId="0" nodeType="clickEffect">
-                                  <p:stCondLst>
-                                    <p:cond delay="0"/>
-                                  </p:stCondLst>
-                                  <p:childTnLst>
-                                    <p:set>
-                                      <p:cBhvr>
-                                        <p:cTn id="22" dur="1" fill="hold">
-                                          <p:stCondLst>
-                                            <p:cond delay="0"/>
-                                          </p:stCondLst>
-                                        </p:cTn>
-                                        <p:tgtEl>
-                                          <p:spTgt spid="4">
-                                            <p:txEl>
-                                              <p:pRg st="1" end="1"/>
-                                            </p:txEl>
-                                          </p:spTgt>
-                                        </p:tgtEl>
-                                        <p:attrNameLst>
-                                          <p:attrName>style.visibility</p:attrName>
-                                        </p:attrNameLst>
-                                      </p:cBhvr>
-                                      <p:to>
-                                        <p:strVal val="visible"/>
-                                      </p:to>
-                                    </p:set>
-                                  </p:childTnLst>
-                                </p:cTn>
-                              </p:par>
-                            </p:childTnLst>
-                          </p:cTn>
-                        </p:par>
-                      </p:childTnLst>
-                    </p:cTn>
-                  </p:par>
-                  <p:par>
-                    <p:cTn id="23" fill="hold">
-                      <p:stCondLst>
-                        <p:cond delay="indefinite"/>
-                      </p:stCondLst>
-                      <p:childTnLst>
-                        <p:par>
-                          <p:cTn id="24" fill="hold">
-                            <p:stCondLst>
-                              <p:cond delay="0"/>
-                            </p:stCondLst>
-                            <p:childTnLst>
-                              <p:par>
-                                <p:cTn id="25" presetID="1" presetClass="entr" presetSubtype="0" fill="hold" grpId="0" nodeType="clickEffect">
-                                  <p:stCondLst>
-                                    <p:cond delay="0"/>
-                                  </p:stCondLst>
-                                  <p:childTnLst>
-                                    <p:set>
-                                      <p:cBhvr>
-                                        <p:cTn id="26" dur="1" fill="hold">
-                                          <p:stCondLst>
-                                            <p:cond delay="0"/>
-                                          </p:stCondLst>
-                                        </p:cTn>
-                                        <p:tgtEl>
-                                          <p:spTgt spid="4">
-                                            <p:txEl>
-                                              <p:pRg st="2" end="2"/>
-                                            </p:txEl>
-                                          </p:spTgt>
-                                        </p:tgtEl>
-                                        <p:attrNameLst>
-                                          <p:attrName>style.visibility</p:attrName>
-                                        </p:attrNameLst>
-                                      </p:cBhvr>
-                                      <p:to>
-                                        <p:strVal val="visible"/>
-                                      </p:to>
-                                    </p:set>
-                                  </p:childTnLst>
-                                </p:cTn>
-                              </p:par>
-                            </p:childTnLst>
-                          </p:cTn>
-                        </p:par>
-                      </p:childTnLst>
-                    </p:cTn>
-                  </p:par>
-                  <p:par>
-                    <p:cTn id="27" fill="hold">
-                      <p:stCondLst>
-                        <p:cond delay="indefinite"/>
-                      </p:stCondLst>
-                      <p:childTnLst>
-                        <p:par>
-                          <p:cTn id="28" fill="hold">
-                            <p:stCondLst>
-                              <p:cond delay="0"/>
-                            </p:stCondLst>
-                            <p:childTnLst>
-                              <p:par>
-                                <p:cTn id="29" presetID="1" presetClass="entr" presetSubtype="0" fill="hold" grpId="0" nodeType="clickEffect">
-                                  <p:stCondLst>
-                                    <p:cond delay="0"/>
-                                  </p:stCondLst>
-                                  <p:childTnLst>
-                                    <p:set>
-                                      <p:cBhvr>
-                                        <p:cTn id="30" dur="1" fill="hold">
-                                          <p:stCondLst>
-                                            <p:cond delay="0"/>
-                                          </p:stCondLst>
-                                        </p:cTn>
-                                        <p:tgtEl>
-                                          <p:spTgt spid="4">
-                                            <p:txEl>
-                                              <p:pRg st="3" end="3"/>
-                                            </p:txEl>
-                                          </p:spTgt>
-                                        </p:tgtEl>
-                                        <p:attrNameLst>
-                                          <p:attrName>style.visibility</p:attrName>
-                                        </p:attrNameLst>
-                                      </p:cBhvr>
-                                      <p:to>
-                                        <p:strVal val="visible"/>
-                                      </p:to>
-                                    </p:set>
-                                  </p:childTnLst>
-                                </p:cTn>
-                              </p:par>
-                            </p:childTnLst>
-                          </p:cTn>
-                        </p:par>
-                      </p:childTnLst>
-                    </p:cTn>
-                  </p:par>
-                </p:childTnLst>
-              </p:cTn>
-              <p:prevCondLst>
-                <p:cond evt="onPrev" delay="0">
-                  <p:tgtEl>
-                    <p:sldTgt/>
-                  </p:tgtEl>
-                </p:cond>
-              </p:prevCondLst>
-              <p:nextCondLst>
-                <p:cond evt="onNext" delay="0">
-                  <p:tgtEl>
-                    <p:sldTgt/>
-                  </p:tgtEl>
-                </p:cond>
-              </p:nextCondLst>
-            </p:seq>
-          </p:childTnLst>
-        </p:cTn>
-      </p:par>
-    </p:tnLst>
-    <p:bldLst>
-      <p:bldP spid="3" grpId="0" uiExpand="1" build="p"/>
-      <p:bldP spid="4" grpId="0" uiExpand="1" build="p"/>
-    </p:bldLst>
-  </p:timing>
 </p:sld>
 </file>
 
